--- a/public/materials/ai-development/codex-request.pptx
+++ b/public/materials/ai-development/codex-request.pptx
@@ -2,20 +2,27 @@
 <file path=ppt/presentation.xml><?xml version="1.0" encoding="utf-8"?>
 <p:presentation xmlns:p="http://schemas.openxmlformats.org/presentationml/2006/main">
   <p:sldMasterIdLst>
-    <p:sldMasterId xmlns:r="http://schemas.openxmlformats.org/officeDocument/2006/relationships" id="2147483648" r:id="R9c0c83d17eea489f"/>
+    <p:sldMasterId xmlns:r="http://schemas.openxmlformats.org/officeDocument/2006/relationships" id="2147483648" r:id="R46fa414d40294a52"/>
   </p:sldMasterIdLst>
   <p:notesMasterIdLst>
-    <p:notesMasterId xmlns:r="http://schemas.openxmlformats.org/officeDocument/2006/relationships" r:id="R42ac4e2df743410d"/>
+    <p:notesMasterId xmlns:r="http://schemas.openxmlformats.org/officeDocument/2006/relationships" r:id="R1414cc3a2db44b46"/>
   </p:notesMasterIdLst>
   <p:sldIdLst>
-    <p:sldId xmlns:r="http://schemas.openxmlformats.org/officeDocument/2006/relationships" id="256" r:id="R5b1d128174cc4f61"/>
-    <p:sldId xmlns:r="http://schemas.openxmlformats.org/officeDocument/2006/relationships" id="257" r:id="R4e387f4ef7e04d6e"/>
-    <p:sldId xmlns:r="http://schemas.openxmlformats.org/officeDocument/2006/relationships" id="258" r:id="R96389e53e184445f"/>
-    <p:sldId xmlns:r="http://schemas.openxmlformats.org/officeDocument/2006/relationships" id="259" r:id="R44f905e525634435"/>
-    <p:sldId xmlns:r="http://schemas.openxmlformats.org/officeDocument/2006/relationships" id="260" r:id="Rb2835e35e2234e1d"/>
-    <p:sldId xmlns:r="http://schemas.openxmlformats.org/officeDocument/2006/relationships" id="261" r:id="R36b05240b6a7426e"/>
-    <p:sldId xmlns:r="http://schemas.openxmlformats.org/officeDocument/2006/relationships" id="262" r:id="R3a882e59cd0842b3"/>
-    <p:sldId xmlns:r="http://schemas.openxmlformats.org/officeDocument/2006/relationships" id="263" r:id="R4ca28224fbd14ed1"/>
+    <p:sldId xmlns:r="http://schemas.openxmlformats.org/officeDocument/2006/relationships" id="256" r:id="R5bd60b4482374f01"/>
+    <p:sldId xmlns:r="http://schemas.openxmlformats.org/officeDocument/2006/relationships" id="257" r:id="Rfb8f6cb14bf44326"/>
+    <p:sldId xmlns:r="http://schemas.openxmlformats.org/officeDocument/2006/relationships" id="258" r:id="R0b345f0dc1ee4ea3"/>
+    <p:sldId xmlns:r="http://schemas.openxmlformats.org/officeDocument/2006/relationships" id="259" r:id="R8779bda94d8041de"/>
+    <p:sldId xmlns:r="http://schemas.openxmlformats.org/officeDocument/2006/relationships" id="260" r:id="R4d6c0362a2b346dc"/>
+    <p:sldId xmlns:r="http://schemas.openxmlformats.org/officeDocument/2006/relationships" id="261" r:id="R9f4db5fb880346c9"/>
+    <p:sldId xmlns:r="http://schemas.openxmlformats.org/officeDocument/2006/relationships" id="262" r:id="R4957b77816ac4679"/>
+    <p:sldId xmlns:r="http://schemas.openxmlformats.org/officeDocument/2006/relationships" id="263" r:id="R4ddf2a5f99f4410b"/>
+    <p:sldId xmlns:r="http://schemas.openxmlformats.org/officeDocument/2006/relationships" id="264" r:id="R17b70ab511f14877"/>
+    <p:sldId xmlns:r="http://schemas.openxmlformats.org/officeDocument/2006/relationships" id="265" r:id="Rc3d0610aaa6547aa"/>
+    <p:sldId xmlns:r="http://schemas.openxmlformats.org/officeDocument/2006/relationships" id="266" r:id="R959417ea8d304385"/>
+    <p:sldId xmlns:r="http://schemas.openxmlformats.org/officeDocument/2006/relationships" id="267" r:id="Rc554ccef590e4d14"/>
+    <p:sldId xmlns:r="http://schemas.openxmlformats.org/officeDocument/2006/relationships" id="268" r:id="R3e4152c6b5c44f77"/>
+    <p:sldId xmlns:r="http://schemas.openxmlformats.org/officeDocument/2006/relationships" id="269" r:id="R94f19935ddef4bc2"/>
+    <p:sldId xmlns:r="http://schemas.openxmlformats.org/officeDocument/2006/relationships" id="270" r:id="Rc31beac864ee4261"/>
   </p:sldIdLst>
   <p:sldSz cx="12192000" cy="6858000"/>
   <p:notesSz cx="6858000" cy="9144000"/>
@@ -475,6 +482,402 @@
 </p:notes>
 </file>
 
+<file path=ppt/notesSlides/notesSlide10.xml><?xml version="1.0" encoding="utf-8"?>
+<p:notes xmlns:p="http://schemas.openxmlformats.org/presentationml/2006/main">
+  <p:cSld>
+    <p:spTree>
+      <p:nvGrpSpPr>
+        <p:cNvPr id="1" name=""/>
+        <p:cNvGrpSpPr/>
+        <p:nvPr/>
+      </p:nvGrpSpPr>
+      <p:grpSpPr>
+        <a:xfrm xmlns:a="http://schemas.openxmlformats.org/drawingml/2006/main"/>
+      </p:grpSpPr>
+      <p:sp>
+        <p:nvSpPr>
+          <p:cNvPr id="2" name="Slide Image Placeholder 1"/>
+          <p:cNvSpPr>
+            <a:spLocks xmlns:a="http://schemas.openxmlformats.org/drawingml/2006/main" noGrp="1"/>
+          </p:cNvSpPr>
+          <p:nvPr>
+            <p:ph type="sldImg" idx="0"/>
+          </p:nvPr>
+        </p:nvSpPr>
+        <p:spPr/>
+      </p:sp>
+      <p:sp>
+        <p:nvSpPr>
+          <p:cNvPr id="3" name="Notes Placeholder 2"/>
+          <p:cNvSpPr>
+            <a:spLocks xmlns:a="http://schemas.openxmlformats.org/drawingml/2006/main" noGrp="1"/>
+          </p:cNvSpPr>
+          <p:nvPr>
+            <p:ph type="body" idx="1"/>
+          </p:nvPr>
+        </p:nvSpPr>
+        <p:spPr/>
+        <p:txBody>
+          <a:bodyPr xmlns:a="http://schemas.openxmlformats.org/drawingml/2006/main"/>
+          <a:lstStyle xmlns:a="http://schemas.openxmlformats.org/drawingml/2006/main"/>
+          <a:p xmlns:a="http://schemas.openxmlformats.org/drawingml/2006/main"/>
+        </p:txBody>
+      </p:sp>
+      <p:sp>
+        <p:nvSpPr>
+          <p:cNvPr id="4" name="Slide Number Placeholder 3"/>
+          <p:cNvSpPr>
+            <a:spLocks xmlns:a="http://schemas.openxmlformats.org/drawingml/2006/main" noGrp="1"/>
+          </p:cNvSpPr>
+          <p:nvPr>
+            <p:ph type="sldNum" idx="5"/>
+          </p:nvPr>
+        </p:nvSpPr>
+        <p:spPr/>
+        <p:txBody>
+          <a:bodyPr xmlns:a="http://schemas.openxmlformats.org/drawingml/2006/main"/>
+          <a:lstStyle xmlns:a="http://schemas.openxmlformats.org/drawingml/2006/main"/>
+          <a:p xmlns:a="http://schemas.openxmlformats.org/drawingml/2006/main"/>
+        </p:txBody>
+      </p:sp>
+    </p:spTree>
+  </p:cSld>
+  <p:clrMapOvr>
+    <a:masterClrMapping xmlns:a="http://schemas.openxmlformats.org/drawingml/2006/main"/>
+  </p:clrMapOvr>
+</p:notes>
+</file>
+
+<file path=ppt/notesSlides/notesSlide11.xml><?xml version="1.0" encoding="utf-8"?>
+<p:notes xmlns:p="http://schemas.openxmlformats.org/presentationml/2006/main">
+  <p:cSld>
+    <p:spTree>
+      <p:nvGrpSpPr>
+        <p:cNvPr id="1" name=""/>
+        <p:cNvGrpSpPr/>
+        <p:nvPr/>
+      </p:nvGrpSpPr>
+      <p:grpSpPr>
+        <a:xfrm xmlns:a="http://schemas.openxmlformats.org/drawingml/2006/main"/>
+      </p:grpSpPr>
+      <p:sp>
+        <p:nvSpPr>
+          <p:cNvPr id="2" name="Slide Image Placeholder 1"/>
+          <p:cNvSpPr>
+            <a:spLocks xmlns:a="http://schemas.openxmlformats.org/drawingml/2006/main" noGrp="1"/>
+          </p:cNvSpPr>
+          <p:nvPr>
+            <p:ph type="sldImg" idx="0"/>
+          </p:nvPr>
+        </p:nvSpPr>
+        <p:spPr/>
+      </p:sp>
+      <p:sp>
+        <p:nvSpPr>
+          <p:cNvPr id="3" name="Notes Placeholder 2"/>
+          <p:cNvSpPr>
+            <a:spLocks xmlns:a="http://schemas.openxmlformats.org/drawingml/2006/main" noGrp="1"/>
+          </p:cNvSpPr>
+          <p:nvPr>
+            <p:ph type="body" idx="1"/>
+          </p:nvPr>
+        </p:nvSpPr>
+        <p:spPr/>
+        <p:txBody>
+          <a:bodyPr xmlns:a="http://schemas.openxmlformats.org/drawingml/2006/main"/>
+          <a:lstStyle xmlns:a="http://schemas.openxmlformats.org/drawingml/2006/main"/>
+          <a:p xmlns:a="http://schemas.openxmlformats.org/drawingml/2006/main"/>
+        </p:txBody>
+      </p:sp>
+      <p:sp>
+        <p:nvSpPr>
+          <p:cNvPr id="4" name="Slide Number Placeholder 3"/>
+          <p:cNvSpPr>
+            <a:spLocks xmlns:a="http://schemas.openxmlformats.org/drawingml/2006/main" noGrp="1"/>
+          </p:cNvSpPr>
+          <p:nvPr>
+            <p:ph type="sldNum" idx="5"/>
+          </p:nvPr>
+        </p:nvSpPr>
+        <p:spPr/>
+        <p:txBody>
+          <a:bodyPr xmlns:a="http://schemas.openxmlformats.org/drawingml/2006/main"/>
+          <a:lstStyle xmlns:a="http://schemas.openxmlformats.org/drawingml/2006/main"/>
+          <a:p xmlns:a="http://schemas.openxmlformats.org/drawingml/2006/main"/>
+        </p:txBody>
+      </p:sp>
+    </p:spTree>
+  </p:cSld>
+  <p:clrMapOvr>
+    <a:masterClrMapping xmlns:a="http://schemas.openxmlformats.org/drawingml/2006/main"/>
+  </p:clrMapOvr>
+</p:notes>
+</file>
+
+<file path=ppt/notesSlides/notesSlide12.xml><?xml version="1.0" encoding="utf-8"?>
+<p:notes xmlns:p="http://schemas.openxmlformats.org/presentationml/2006/main">
+  <p:cSld>
+    <p:spTree>
+      <p:nvGrpSpPr>
+        <p:cNvPr id="1" name=""/>
+        <p:cNvGrpSpPr/>
+        <p:nvPr/>
+      </p:nvGrpSpPr>
+      <p:grpSpPr>
+        <a:xfrm xmlns:a="http://schemas.openxmlformats.org/drawingml/2006/main"/>
+      </p:grpSpPr>
+      <p:sp>
+        <p:nvSpPr>
+          <p:cNvPr id="2" name="Slide Image Placeholder 1"/>
+          <p:cNvSpPr>
+            <a:spLocks xmlns:a="http://schemas.openxmlformats.org/drawingml/2006/main" noGrp="1"/>
+          </p:cNvSpPr>
+          <p:nvPr>
+            <p:ph type="sldImg" idx="0"/>
+          </p:nvPr>
+        </p:nvSpPr>
+        <p:spPr/>
+      </p:sp>
+      <p:sp>
+        <p:nvSpPr>
+          <p:cNvPr id="3" name="Notes Placeholder 2"/>
+          <p:cNvSpPr>
+            <a:spLocks xmlns:a="http://schemas.openxmlformats.org/drawingml/2006/main" noGrp="1"/>
+          </p:cNvSpPr>
+          <p:nvPr>
+            <p:ph type="body" idx="1"/>
+          </p:nvPr>
+        </p:nvSpPr>
+        <p:spPr/>
+        <p:txBody>
+          <a:bodyPr xmlns:a="http://schemas.openxmlformats.org/drawingml/2006/main"/>
+          <a:lstStyle xmlns:a="http://schemas.openxmlformats.org/drawingml/2006/main"/>
+          <a:p xmlns:a="http://schemas.openxmlformats.org/drawingml/2006/main"/>
+        </p:txBody>
+      </p:sp>
+      <p:sp>
+        <p:nvSpPr>
+          <p:cNvPr id="4" name="Slide Number Placeholder 3"/>
+          <p:cNvSpPr>
+            <a:spLocks xmlns:a="http://schemas.openxmlformats.org/drawingml/2006/main" noGrp="1"/>
+          </p:cNvSpPr>
+          <p:nvPr>
+            <p:ph type="sldNum" idx="5"/>
+          </p:nvPr>
+        </p:nvSpPr>
+        <p:spPr/>
+        <p:txBody>
+          <a:bodyPr xmlns:a="http://schemas.openxmlformats.org/drawingml/2006/main"/>
+          <a:lstStyle xmlns:a="http://schemas.openxmlformats.org/drawingml/2006/main"/>
+          <a:p xmlns:a="http://schemas.openxmlformats.org/drawingml/2006/main"/>
+        </p:txBody>
+      </p:sp>
+    </p:spTree>
+  </p:cSld>
+  <p:clrMapOvr>
+    <a:masterClrMapping xmlns:a="http://schemas.openxmlformats.org/drawingml/2006/main"/>
+  </p:clrMapOvr>
+</p:notes>
+</file>
+
+<file path=ppt/notesSlides/notesSlide13.xml><?xml version="1.0" encoding="utf-8"?>
+<p:notes xmlns:p="http://schemas.openxmlformats.org/presentationml/2006/main">
+  <p:cSld>
+    <p:spTree>
+      <p:nvGrpSpPr>
+        <p:cNvPr id="1" name=""/>
+        <p:cNvGrpSpPr/>
+        <p:nvPr/>
+      </p:nvGrpSpPr>
+      <p:grpSpPr>
+        <a:xfrm xmlns:a="http://schemas.openxmlformats.org/drawingml/2006/main"/>
+      </p:grpSpPr>
+      <p:sp>
+        <p:nvSpPr>
+          <p:cNvPr id="2" name="Slide Image Placeholder 1"/>
+          <p:cNvSpPr>
+            <a:spLocks xmlns:a="http://schemas.openxmlformats.org/drawingml/2006/main" noGrp="1"/>
+          </p:cNvSpPr>
+          <p:nvPr>
+            <p:ph type="sldImg" idx="0"/>
+          </p:nvPr>
+        </p:nvSpPr>
+        <p:spPr/>
+      </p:sp>
+      <p:sp>
+        <p:nvSpPr>
+          <p:cNvPr id="3" name="Notes Placeholder 2"/>
+          <p:cNvSpPr>
+            <a:spLocks xmlns:a="http://schemas.openxmlformats.org/drawingml/2006/main" noGrp="1"/>
+          </p:cNvSpPr>
+          <p:nvPr>
+            <p:ph type="body" idx="1"/>
+          </p:nvPr>
+        </p:nvSpPr>
+        <p:spPr/>
+        <p:txBody>
+          <a:bodyPr xmlns:a="http://schemas.openxmlformats.org/drawingml/2006/main"/>
+          <a:lstStyle xmlns:a="http://schemas.openxmlformats.org/drawingml/2006/main"/>
+          <a:p xmlns:a="http://schemas.openxmlformats.org/drawingml/2006/main"/>
+        </p:txBody>
+      </p:sp>
+      <p:sp>
+        <p:nvSpPr>
+          <p:cNvPr id="4" name="Slide Number Placeholder 3"/>
+          <p:cNvSpPr>
+            <a:spLocks xmlns:a="http://schemas.openxmlformats.org/drawingml/2006/main" noGrp="1"/>
+          </p:cNvSpPr>
+          <p:nvPr>
+            <p:ph type="sldNum" idx="5"/>
+          </p:nvPr>
+        </p:nvSpPr>
+        <p:spPr/>
+        <p:txBody>
+          <a:bodyPr xmlns:a="http://schemas.openxmlformats.org/drawingml/2006/main"/>
+          <a:lstStyle xmlns:a="http://schemas.openxmlformats.org/drawingml/2006/main"/>
+          <a:p xmlns:a="http://schemas.openxmlformats.org/drawingml/2006/main"/>
+        </p:txBody>
+      </p:sp>
+    </p:spTree>
+  </p:cSld>
+  <p:clrMapOvr>
+    <a:masterClrMapping xmlns:a="http://schemas.openxmlformats.org/drawingml/2006/main"/>
+  </p:clrMapOvr>
+</p:notes>
+</file>
+
+<file path=ppt/notesSlides/notesSlide14.xml><?xml version="1.0" encoding="utf-8"?>
+<p:notes xmlns:p="http://schemas.openxmlformats.org/presentationml/2006/main">
+  <p:cSld>
+    <p:spTree>
+      <p:nvGrpSpPr>
+        <p:cNvPr id="1" name=""/>
+        <p:cNvGrpSpPr/>
+        <p:nvPr/>
+      </p:nvGrpSpPr>
+      <p:grpSpPr>
+        <a:xfrm xmlns:a="http://schemas.openxmlformats.org/drawingml/2006/main"/>
+      </p:grpSpPr>
+      <p:sp>
+        <p:nvSpPr>
+          <p:cNvPr id="2" name="Slide Image Placeholder 1"/>
+          <p:cNvSpPr>
+            <a:spLocks xmlns:a="http://schemas.openxmlformats.org/drawingml/2006/main" noGrp="1"/>
+          </p:cNvSpPr>
+          <p:nvPr>
+            <p:ph type="sldImg" idx="0"/>
+          </p:nvPr>
+        </p:nvSpPr>
+        <p:spPr/>
+      </p:sp>
+      <p:sp>
+        <p:nvSpPr>
+          <p:cNvPr id="3" name="Notes Placeholder 2"/>
+          <p:cNvSpPr>
+            <a:spLocks xmlns:a="http://schemas.openxmlformats.org/drawingml/2006/main" noGrp="1"/>
+          </p:cNvSpPr>
+          <p:nvPr>
+            <p:ph type="body" idx="1"/>
+          </p:nvPr>
+        </p:nvSpPr>
+        <p:spPr/>
+        <p:txBody>
+          <a:bodyPr xmlns:a="http://schemas.openxmlformats.org/drawingml/2006/main"/>
+          <a:lstStyle xmlns:a="http://schemas.openxmlformats.org/drawingml/2006/main"/>
+          <a:p xmlns:a="http://schemas.openxmlformats.org/drawingml/2006/main"/>
+        </p:txBody>
+      </p:sp>
+      <p:sp>
+        <p:nvSpPr>
+          <p:cNvPr id="4" name="Slide Number Placeholder 3"/>
+          <p:cNvSpPr>
+            <a:spLocks xmlns:a="http://schemas.openxmlformats.org/drawingml/2006/main" noGrp="1"/>
+          </p:cNvSpPr>
+          <p:nvPr>
+            <p:ph type="sldNum" idx="5"/>
+          </p:nvPr>
+        </p:nvSpPr>
+        <p:spPr/>
+        <p:txBody>
+          <a:bodyPr xmlns:a="http://schemas.openxmlformats.org/drawingml/2006/main"/>
+          <a:lstStyle xmlns:a="http://schemas.openxmlformats.org/drawingml/2006/main"/>
+          <a:p xmlns:a="http://schemas.openxmlformats.org/drawingml/2006/main"/>
+        </p:txBody>
+      </p:sp>
+    </p:spTree>
+  </p:cSld>
+  <p:clrMapOvr>
+    <a:masterClrMapping xmlns:a="http://schemas.openxmlformats.org/drawingml/2006/main"/>
+  </p:clrMapOvr>
+</p:notes>
+</file>
+
+<file path=ppt/notesSlides/notesSlide15.xml><?xml version="1.0" encoding="utf-8"?>
+<p:notes xmlns:p="http://schemas.openxmlformats.org/presentationml/2006/main">
+  <p:cSld>
+    <p:spTree>
+      <p:nvGrpSpPr>
+        <p:cNvPr id="1" name=""/>
+        <p:cNvGrpSpPr/>
+        <p:nvPr/>
+      </p:nvGrpSpPr>
+      <p:grpSpPr>
+        <a:xfrm xmlns:a="http://schemas.openxmlformats.org/drawingml/2006/main"/>
+      </p:grpSpPr>
+      <p:sp>
+        <p:nvSpPr>
+          <p:cNvPr id="2" name="Slide Image Placeholder 1"/>
+          <p:cNvSpPr>
+            <a:spLocks xmlns:a="http://schemas.openxmlformats.org/drawingml/2006/main" noGrp="1"/>
+          </p:cNvSpPr>
+          <p:nvPr>
+            <p:ph type="sldImg" idx="0"/>
+          </p:nvPr>
+        </p:nvSpPr>
+        <p:spPr/>
+      </p:sp>
+      <p:sp>
+        <p:nvSpPr>
+          <p:cNvPr id="3" name="Notes Placeholder 2"/>
+          <p:cNvSpPr>
+            <a:spLocks xmlns:a="http://schemas.openxmlformats.org/drawingml/2006/main" noGrp="1"/>
+          </p:cNvSpPr>
+          <p:nvPr>
+            <p:ph type="body" idx="1"/>
+          </p:nvPr>
+        </p:nvSpPr>
+        <p:spPr/>
+        <p:txBody>
+          <a:bodyPr xmlns:a="http://schemas.openxmlformats.org/drawingml/2006/main"/>
+          <a:lstStyle xmlns:a="http://schemas.openxmlformats.org/drawingml/2006/main"/>
+          <a:p xmlns:a="http://schemas.openxmlformats.org/drawingml/2006/main"/>
+        </p:txBody>
+      </p:sp>
+      <p:sp>
+        <p:nvSpPr>
+          <p:cNvPr id="4" name="Slide Number Placeholder 3"/>
+          <p:cNvSpPr>
+            <a:spLocks xmlns:a="http://schemas.openxmlformats.org/drawingml/2006/main" noGrp="1"/>
+          </p:cNvSpPr>
+          <p:nvPr>
+            <p:ph type="sldNum" idx="5"/>
+          </p:nvPr>
+        </p:nvSpPr>
+        <p:spPr/>
+        <p:txBody>
+          <a:bodyPr xmlns:a="http://schemas.openxmlformats.org/drawingml/2006/main"/>
+          <a:lstStyle xmlns:a="http://schemas.openxmlformats.org/drawingml/2006/main"/>
+          <a:p xmlns:a="http://schemas.openxmlformats.org/drawingml/2006/main"/>
+        </p:txBody>
+      </p:sp>
+    </p:spTree>
+  </p:cSld>
+  <p:clrMapOvr>
+    <a:masterClrMapping xmlns:a="http://schemas.openxmlformats.org/drawingml/2006/main"/>
+  </p:clrMapOvr>
+</p:notes>
+</file>
+
 <file path=ppt/notesSlides/notesSlide2.xml><?xml version="1.0" encoding="utf-8"?>
 <p:notes xmlns:p="http://schemas.openxmlformats.org/presentationml/2006/main">
   <p:cSld>
@@ -872,6 +1275,72 @@
 </file>
 
 <file path=ppt/notesSlides/notesSlide8.xml><?xml version="1.0" encoding="utf-8"?>
+<p:notes xmlns:p="http://schemas.openxmlformats.org/presentationml/2006/main">
+  <p:cSld>
+    <p:spTree>
+      <p:nvGrpSpPr>
+        <p:cNvPr id="1" name=""/>
+        <p:cNvGrpSpPr/>
+        <p:nvPr/>
+      </p:nvGrpSpPr>
+      <p:grpSpPr>
+        <a:xfrm xmlns:a="http://schemas.openxmlformats.org/drawingml/2006/main"/>
+      </p:grpSpPr>
+      <p:sp>
+        <p:nvSpPr>
+          <p:cNvPr id="2" name="Slide Image Placeholder 1"/>
+          <p:cNvSpPr>
+            <a:spLocks xmlns:a="http://schemas.openxmlformats.org/drawingml/2006/main" noGrp="1"/>
+          </p:cNvSpPr>
+          <p:nvPr>
+            <p:ph type="sldImg" idx="0"/>
+          </p:nvPr>
+        </p:nvSpPr>
+        <p:spPr/>
+      </p:sp>
+      <p:sp>
+        <p:nvSpPr>
+          <p:cNvPr id="3" name="Notes Placeholder 2"/>
+          <p:cNvSpPr>
+            <a:spLocks xmlns:a="http://schemas.openxmlformats.org/drawingml/2006/main" noGrp="1"/>
+          </p:cNvSpPr>
+          <p:nvPr>
+            <p:ph type="body" idx="1"/>
+          </p:nvPr>
+        </p:nvSpPr>
+        <p:spPr/>
+        <p:txBody>
+          <a:bodyPr xmlns:a="http://schemas.openxmlformats.org/drawingml/2006/main"/>
+          <a:lstStyle xmlns:a="http://schemas.openxmlformats.org/drawingml/2006/main"/>
+          <a:p xmlns:a="http://schemas.openxmlformats.org/drawingml/2006/main"/>
+        </p:txBody>
+      </p:sp>
+      <p:sp>
+        <p:nvSpPr>
+          <p:cNvPr id="4" name="Slide Number Placeholder 3"/>
+          <p:cNvSpPr>
+            <a:spLocks xmlns:a="http://schemas.openxmlformats.org/drawingml/2006/main" noGrp="1"/>
+          </p:cNvSpPr>
+          <p:nvPr>
+            <p:ph type="sldNum" idx="5"/>
+          </p:nvPr>
+        </p:nvSpPr>
+        <p:spPr/>
+        <p:txBody>
+          <a:bodyPr xmlns:a="http://schemas.openxmlformats.org/drawingml/2006/main"/>
+          <a:lstStyle xmlns:a="http://schemas.openxmlformats.org/drawingml/2006/main"/>
+          <a:p xmlns:a="http://schemas.openxmlformats.org/drawingml/2006/main"/>
+        </p:txBody>
+      </p:sp>
+    </p:spTree>
+  </p:cSld>
+  <p:clrMapOvr>
+    <a:masterClrMapping xmlns:a="http://schemas.openxmlformats.org/drawingml/2006/main"/>
+  </p:clrMapOvr>
+</p:notes>
+</file>
+
+<file path=ppt/notesSlides/notesSlide9.xml><?xml version="1.0" encoding="utf-8"?>
 <p:notes xmlns:p="http://schemas.openxmlformats.org/presentationml/2006/main">
   <p:cSld>
     <p:spTree>
@@ -975,7 +1444,7 @@
   </p:cSld>
   <p:clrMap bg1="lt1" tx1="dk1" bg2="lt2" tx2="dk2" accent1="accent1" accent2="accent2" accent3="accent3" accent4="accent4" accent5="accent5" accent6="accent6" hlink="hlink" folHlink="folHlink"/>
   <p:sldLayoutIdLst>
-    <p:sldLayoutId xmlns:r="http://schemas.openxmlformats.org/officeDocument/2006/relationships" id="2147483649" r:id="Ra4c6d6c8be1f4dd8"/>
+    <p:sldLayoutId xmlns:r="http://schemas.openxmlformats.org/officeDocument/2006/relationships" id="2147483649" r:id="R767e4c919eb9423d"/>
   </p:sldLayoutIdLst>
   <p:txStyles>
     <p:titleStyle>
@@ -1526,7 +1995,7 @@
           <p:cNvPr id="9" name="">
             <a:extLst xmlns:a="http://schemas.openxmlformats.org/drawingml/2006/main">
               <a:ext uri="{FF2B5EF4-FFF2-40B4-BE49-F238E27FC236}">
-                <a16:creationId xmlns:a16="http://schemas.microsoft.com/office/drawing/2014/main" id="{27287591-94B2-44CA-A30A-E2FDBAB4CCB9}"/>
+                <a16:creationId xmlns:a16="http://schemas.microsoft.com/office/drawing/2014/main" id="{9631B6B8-22E4-44BA-8671-D59FB5721DAA}"/>
               </a:ext>
             </a:extLst>
           </p:cNvPr>
@@ -1557,7 +2026,7 @@
           <p:cNvPr id="2" name="">
             <a:extLst xmlns:a="http://schemas.openxmlformats.org/drawingml/2006/main">
               <a:ext uri="{FF2B5EF4-FFF2-40B4-BE49-F238E27FC236}">
-                <a16:creationId xmlns:a16="http://schemas.microsoft.com/office/drawing/2014/main" id="{455A24A5-DFAF-43E7-91A2-8B3B35ED12F8}"/>
+                <a16:creationId xmlns:a16="http://schemas.microsoft.com/office/drawing/2014/main" id="{3F9AD57B-939E-4693-A3AE-B944B3E2E1E3}"/>
               </a:ext>
             </a:extLst>
           </p:cNvPr>
@@ -1607,7 +2076,7 @@
           <p:cNvPr id="3" name="">
             <a:extLst xmlns:a="http://schemas.openxmlformats.org/drawingml/2006/main">
               <a:ext uri="{FF2B5EF4-FFF2-40B4-BE49-F238E27FC236}">
-                <a16:creationId xmlns:a16="http://schemas.microsoft.com/office/drawing/2014/main" id="{A1EE7E97-5C06-41EA-B25C-95001CC5E0A4}"/>
+                <a16:creationId xmlns:a16="http://schemas.microsoft.com/office/drawing/2014/main" id="{ACFBB1C4-2D58-4E44-87F1-13C25A747C3F}"/>
               </a:ext>
             </a:extLst>
           </p:cNvPr>
@@ -1657,7 +2126,7 @@
           <p:cNvPr id="4" name="">
             <a:extLst xmlns:a="http://schemas.openxmlformats.org/drawingml/2006/main">
               <a:ext uri="{FF2B5EF4-FFF2-40B4-BE49-F238E27FC236}">
-                <a16:creationId xmlns:a16="http://schemas.microsoft.com/office/drawing/2014/main" id="{92B61BEF-82E7-4D58-9134-067569B8164F}"/>
+                <a16:creationId xmlns:a16="http://schemas.microsoft.com/office/drawing/2014/main" id="{285A5519-874A-441A-BA66-DA6C74E4BE07}"/>
               </a:ext>
             </a:extLst>
           </p:cNvPr>
@@ -1707,7 +2176,7 @@
           <p:cNvPr id="5" name="">
             <a:extLst xmlns:a="http://schemas.openxmlformats.org/drawingml/2006/main">
               <a:ext uri="{FF2B5EF4-FFF2-40B4-BE49-F238E27FC236}">
-                <a16:creationId xmlns:a16="http://schemas.microsoft.com/office/drawing/2014/main" id="{02DABBBA-F7B1-4CAF-BFC0-EA73F5B4B7C7}"/>
+                <a16:creationId xmlns:a16="http://schemas.microsoft.com/office/drawing/2014/main" id="{7F9A72CE-10E3-4435-97AF-593FA859D3F5}"/>
               </a:ext>
             </a:extLst>
           </p:cNvPr>
@@ -1740,7 +2209,7 @@
           <p:cNvPr id="6" name="">
             <a:extLst xmlns:a="http://schemas.openxmlformats.org/drawingml/2006/main">
               <a:ext uri="{FF2B5EF4-FFF2-40B4-BE49-F238E27FC236}">
-                <a16:creationId xmlns:a16="http://schemas.microsoft.com/office/drawing/2014/main" id="{A23C429E-9412-4016-AFA3-0E9CA41CB789}"/>
+                <a16:creationId xmlns:a16="http://schemas.microsoft.com/office/drawing/2014/main" id="{3150C27B-BDF7-417E-882D-E4F3092E889D}"/>
               </a:ext>
             </a:extLst>
           </p:cNvPr>
@@ -1794,7 +2263,7 @@
           <p:nvPr/>
         </p:nvPicPr>
         <p:blipFill>
-          <a:blip xmlns:r="http://schemas.openxmlformats.org/officeDocument/2006/relationships" xmlns:a="http://schemas.openxmlformats.org/drawingml/2006/main" r:embed="Ra4ba252de23c4975"/>
+          <a:blip xmlns:r="http://schemas.openxmlformats.org/officeDocument/2006/relationships" xmlns:a="http://schemas.openxmlformats.org/drawingml/2006/main" r:embed="R0c3cf6eae1334b90"/>
           <a:srcRect xmlns:a="http://schemas.openxmlformats.org/drawingml/2006/main" l="17949" t="0" r="17949" b="0"/>
           <a:stretch xmlns:a="http://schemas.openxmlformats.org/drawingml/2006/main">
             <a:fillRect l="0" t="0" r="0" b="0"/>
@@ -1817,7 +2286,7 @@
           <p:cNvPr id="8" name="">
             <a:extLst xmlns:a="http://schemas.openxmlformats.org/drawingml/2006/main">
               <a:ext uri="{FF2B5EF4-FFF2-40B4-BE49-F238E27FC236}">
-                <a16:creationId xmlns:a16="http://schemas.microsoft.com/office/drawing/2014/main" id="{B69A88A0-98EB-45DD-AF28-96A3AC7F3EE0}"/>
+                <a16:creationId xmlns:a16="http://schemas.microsoft.com/office/drawing/2014/main" id="{DD912847-3BA6-43FD-8B0D-4F024EDEB8A4}"/>
               </a:ext>
             </a:extLst>
           </p:cNvPr>
@@ -1865,7 +2334,3130 @@
     </p:spTree>
     <p:extLst>
       <p:ext uri="{BB962C8B-B14F-4D97-AF65-F5344CB8AC3E}">
-        <p14:creationId xmlns:p14="http://schemas.microsoft.com/office/powerpoint/2010/main" val="236358236"/>
+        <p14:creationId xmlns:p14="http://schemas.microsoft.com/office/powerpoint/2010/main" val="1905097472"/>
+      </p:ext>
+    </p:extLst>
+  </p:cSld>
+</p:sld>
+</file>
+
+<file path=ppt/slides/slide10.xml><?xml version="1.0" encoding="utf-8"?>
+<p:sld xmlns:p="http://schemas.openxmlformats.org/presentationml/2006/main">
+  <p:cSld>
+    <p:bg>
+      <p:bgPr>
+        <a:solidFill xmlns:a="http://schemas.openxmlformats.org/drawingml/2006/main">
+          <a:srgbClr val="FFFCF8"/>
+        </a:solidFill>
+      </p:bgPr>
+    </p:bg>
+    <p:spTree>
+      <p:nvGrpSpPr>
+        <p:cNvPr id="1" name=""/>
+        <p:cNvGrpSpPr/>
+        <p:nvPr/>
+      </p:nvGrpSpPr>
+      <p:grpSpPr>
+        <a:xfrm xmlns:a="http://schemas.openxmlformats.org/drawingml/2006/main"/>
+      </p:grpSpPr>
+      <p:sp>
+        <p:nvSpPr>
+          <p:cNvPr id="16" name="">
+            <a:extLst xmlns:a="http://schemas.openxmlformats.org/drawingml/2006/main">
+              <a:ext uri="{FF2B5EF4-FFF2-40B4-BE49-F238E27FC236}">
+                <a16:creationId xmlns:a16="http://schemas.microsoft.com/office/drawing/2014/main" id="{74B1C5E4-6FA6-4FFC-9EA2-86EA6C1EBC4F}"/>
+              </a:ext>
+            </a:extLst>
+          </p:cNvPr>
+          <p:cNvSpPr>
+            <a:spLocks xmlns:a="http://schemas.openxmlformats.org/drawingml/2006/main" noGrp="1"/>
+          </p:cNvSpPr>
+          <p:nvPr/>
+        </p:nvSpPr>
+        <p:spPr>
+          <a:xfrm xmlns:a="http://schemas.openxmlformats.org/drawingml/2006/main">
+            <a:off x="0" y="0"/>
+            <a:ext cx="171450" cy="6858000"/>
+          </a:xfrm>
+          <a:prstGeom xmlns:a="http://schemas.openxmlformats.org/drawingml/2006/main" prst="rect">
+            <a:avLst/>
+          </a:prstGeom>
+          <a:solidFill xmlns:a="http://schemas.openxmlformats.org/drawingml/2006/main">
+            <a:srgbClr val="6657E8"/>
+          </a:solidFill>
+          <a:ln xmlns:a="http://schemas.openxmlformats.org/drawingml/2006/main" w="0">
+            <a:noFill/>
+            <a:prstDash val="solid"/>
+          </a:ln>
+        </p:spPr>
+      </p:sp>
+      <p:sp>
+        <p:nvSpPr>
+          <p:cNvPr id="2" name="">
+            <a:extLst xmlns:a="http://schemas.openxmlformats.org/drawingml/2006/main">
+              <a:ext uri="{FF2B5EF4-FFF2-40B4-BE49-F238E27FC236}">
+                <a16:creationId xmlns:a16="http://schemas.microsoft.com/office/drawing/2014/main" id="{C903CC46-E5EB-41C4-A515-EBBE10591457}"/>
+              </a:ext>
+            </a:extLst>
+          </p:cNvPr>
+          <p:cNvSpPr>
+            <a:spLocks xmlns:a="http://schemas.openxmlformats.org/drawingml/2006/main" noGrp="1"/>
+          </p:cNvSpPr>
+          <p:nvPr/>
+        </p:nvSpPr>
+        <p:spPr>
+          <a:xfrm xmlns:a="http://schemas.openxmlformats.org/drawingml/2006/main">
+            <a:off x="647700" y="457200"/>
+            <a:ext cx="10096500" cy="552450"/>
+          </a:xfrm>
+          <a:prstGeom xmlns:a="http://schemas.openxmlformats.org/drawingml/2006/main" prst="rect">
+            <a:avLst/>
+          </a:prstGeom>
+          <a:noFill xmlns:a="http://schemas.openxmlformats.org/drawingml/2006/main"/>
+          <a:ln xmlns:a="http://schemas.openxmlformats.org/drawingml/2006/main" w="0">
+            <a:noFill/>
+            <a:prstDash val="solid"/>
+          </a:ln>
+        </p:spPr>
+        <p:txBody>
+          <a:bodyPr xmlns:a="http://schemas.openxmlformats.org/drawingml/2006/main"/>
+          <a:lstStyle xmlns:a="http://schemas.openxmlformats.org/drawingml/2006/main"/>
+          <a:p xmlns:a="http://schemas.openxmlformats.org/drawingml/2006/main">
+            <a:pPr>
+              <a:defRPr sz="2700" b="1">
+                <a:solidFill>
+                  <a:srgbClr val="182235"/>
+                </a:solidFill>
+              </a:defRPr>
+            </a:pPr>
+            <a:r>
+              <a:rPr sz="2700" b="1">
+                <a:solidFill>
+                  <a:srgbClr val="182235"/>
+                </a:solidFill>
+              </a:rPr>
+              <a:t>준비가 끝나면 실습이 훨씬 편해집니다</a:t>
+            </a:r>
+          </a:p>
+        </p:txBody>
+      </p:sp>
+      <p:sp>
+        <p:nvSpPr>
+          <p:cNvPr id="3" name="">
+            <a:extLst xmlns:a="http://schemas.openxmlformats.org/drawingml/2006/main">
+              <a:ext uri="{FF2B5EF4-FFF2-40B4-BE49-F238E27FC236}">
+                <a16:creationId xmlns:a16="http://schemas.microsoft.com/office/drawing/2014/main" id="{78949275-9F32-40B9-9E1F-687D1626169E}"/>
+              </a:ext>
+            </a:extLst>
+          </p:cNvPr>
+          <p:cNvSpPr>
+            <a:spLocks xmlns:a="http://schemas.openxmlformats.org/drawingml/2006/main" noGrp="1"/>
+          </p:cNvSpPr>
+          <p:nvPr/>
+        </p:nvSpPr>
+        <p:spPr>
+          <a:xfrm xmlns:a="http://schemas.openxmlformats.org/drawingml/2006/main">
+            <a:off x="666750" y="6419850"/>
+            <a:ext cx="10096500" cy="209550"/>
+          </a:xfrm>
+          <a:prstGeom xmlns:a="http://schemas.openxmlformats.org/drawingml/2006/main" prst="rect">
+            <a:avLst/>
+          </a:prstGeom>
+          <a:noFill xmlns:a="http://schemas.openxmlformats.org/drawingml/2006/main"/>
+          <a:ln xmlns:a="http://schemas.openxmlformats.org/drawingml/2006/main" w="0">
+            <a:noFill/>
+            <a:prstDash val="solid"/>
+          </a:ln>
+        </p:spPr>
+        <p:txBody>
+          <a:bodyPr xmlns:a="http://schemas.openxmlformats.org/drawingml/2006/main"/>
+          <a:lstStyle xmlns:a="http://schemas.openxmlformats.org/drawingml/2006/main"/>
+          <a:p xmlns:a="http://schemas.openxmlformats.org/drawingml/2006/main">
+            <a:pPr>
+              <a:defRPr sz="975">
+                <a:solidFill>
+                  <a:srgbClr val="657083"/>
+                </a:solidFill>
+              </a:defRPr>
+            </a:pPr>
+            <a:r>
+              <a:rPr sz="975">
+                <a:solidFill>
+                  <a:srgbClr val="657083"/>
+                </a:solidFill>
+              </a:rPr>
+              <a:t>EDU 웹개발 교육 플랫폼  ·  10</a:t>
+            </a:r>
+          </a:p>
+        </p:txBody>
+      </p:sp>
+      <p:sp>
+        <p:nvSpPr>
+          <p:cNvPr id="4" name="">
+            <a:extLst xmlns:a="http://schemas.openxmlformats.org/drawingml/2006/main">
+              <a:ext uri="{FF2B5EF4-FFF2-40B4-BE49-F238E27FC236}">
+                <a16:creationId xmlns:a16="http://schemas.microsoft.com/office/drawing/2014/main" id="{A11E50CD-6148-484C-BA92-95119FBEBCD0}"/>
+              </a:ext>
+            </a:extLst>
+          </p:cNvPr>
+          <p:cNvSpPr>
+            <a:spLocks xmlns:a="http://schemas.openxmlformats.org/drawingml/2006/main" noGrp="1"/>
+          </p:cNvSpPr>
+          <p:nvPr/>
+        </p:nvSpPr>
+        <p:spPr>
+          <a:xfrm xmlns:a="http://schemas.openxmlformats.org/drawingml/2006/main">
+            <a:off x="742950" y="1428750"/>
+            <a:ext cx="514350" cy="514350"/>
+          </a:xfrm>
+          <a:prstGeom xmlns:a="http://schemas.openxmlformats.org/drawingml/2006/main" prst="roundRect">
+            <a:avLst>
+              <a:gd name="adj" fmla="val 22222"/>
+            </a:avLst>
+          </a:prstGeom>
+          <a:solidFill xmlns:a="http://schemas.openxmlformats.org/drawingml/2006/main">
+            <a:srgbClr val="EEEAFE"/>
+          </a:solidFill>
+          <a:ln xmlns:a="http://schemas.openxmlformats.org/drawingml/2006/main" w="0">
+            <a:noFill/>
+            <a:prstDash val="solid"/>
+          </a:ln>
+        </p:spPr>
+      </p:sp>
+      <p:sp>
+        <p:nvSpPr>
+          <p:cNvPr id="5" name="">
+            <a:extLst xmlns:a="http://schemas.openxmlformats.org/drawingml/2006/main">
+              <a:ext uri="{FF2B5EF4-FFF2-40B4-BE49-F238E27FC236}">
+                <a16:creationId xmlns:a16="http://schemas.microsoft.com/office/drawing/2014/main" id="{FA2875C9-799C-4D3A-86EC-9324675BC0FF}"/>
+              </a:ext>
+            </a:extLst>
+          </p:cNvPr>
+          <p:cNvSpPr>
+            <a:spLocks xmlns:a="http://schemas.openxmlformats.org/drawingml/2006/main" noGrp="1"/>
+          </p:cNvSpPr>
+          <p:nvPr/>
+        </p:nvSpPr>
+        <p:spPr>
+          <a:xfrm xmlns:a="http://schemas.openxmlformats.org/drawingml/2006/main">
+            <a:off x="742950" y="1524000"/>
+            <a:ext cx="514350" cy="304800"/>
+          </a:xfrm>
+          <a:prstGeom xmlns:a="http://schemas.openxmlformats.org/drawingml/2006/main" prst="rect">
+            <a:avLst/>
+          </a:prstGeom>
+          <a:noFill xmlns:a="http://schemas.openxmlformats.org/drawingml/2006/main"/>
+          <a:ln xmlns:a="http://schemas.openxmlformats.org/drawingml/2006/main" w="0">
+            <a:noFill/>
+            <a:prstDash val="solid"/>
+          </a:ln>
+        </p:spPr>
+        <p:txBody>
+          <a:bodyPr xmlns:a="http://schemas.openxmlformats.org/drawingml/2006/main"/>
+          <a:lstStyle xmlns:a="http://schemas.openxmlformats.org/drawingml/2006/main"/>
+          <a:p xmlns:a="http://schemas.openxmlformats.org/drawingml/2006/main">
+            <a:pPr algn="ctr">
+              <a:defRPr sz="1500" b="1">
+                <a:solidFill>
+                  <a:srgbClr val="57C7A5"/>
+                </a:solidFill>
+              </a:defRPr>
+            </a:pPr>
+            <a:r>
+              <a:rPr sz="1500" b="1">
+                <a:solidFill>
+                  <a:srgbClr val="57C7A5"/>
+                </a:solidFill>
+              </a:rPr>
+              <a:t>1</a:t>
+            </a:r>
+          </a:p>
+        </p:txBody>
+      </p:sp>
+      <p:sp>
+        <p:nvSpPr>
+          <p:cNvPr id="6" name="">
+            <a:extLst xmlns:a="http://schemas.openxmlformats.org/drawingml/2006/main">
+              <a:ext uri="{FF2B5EF4-FFF2-40B4-BE49-F238E27FC236}">
+                <a16:creationId xmlns:a16="http://schemas.microsoft.com/office/drawing/2014/main" id="{2A0D5404-345B-4D20-BA6D-82AFB12AEDA0}"/>
+              </a:ext>
+            </a:extLst>
+          </p:cNvPr>
+          <p:cNvSpPr>
+            <a:spLocks xmlns:a="http://schemas.openxmlformats.org/drawingml/2006/main" noGrp="1"/>
+          </p:cNvSpPr>
+          <p:nvPr/>
+        </p:nvSpPr>
+        <p:spPr>
+          <a:xfrm xmlns:a="http://schemas.openxmlformats.org/drawingml/2006/main">
+            <a:off x="1485900" y="1466850"/>
+            <a:ext cx="9239250" cy="619125"/>
+          </a:xfrm>
+          <a:prstGeom xmlns:a="http://schemas.openxmlformats.org/drawingml/2006/main" prst="rect">
+            <a:avLst/>
+          </a:prstGeom>
+          <a:noFill xmlns:a="http://schemas.openxmlformats.org/drawingml/2006/main"/>
+          <a:ln xmlns:a="http://schemas.openxmlformats.org/drawingml/2006/main" w="0">
+            <a:noFill/>
+            <a:prstDash val="solid"/>
+          </a:ln>
+        </p:spPr>
+        <p:txBody>
+          <a:bodyPr xmlns:a="http://schemas.openxmlformats.org/drawingml/2006/main"/>
+          <a:lstStyle xmlns:a="http://schemas.openxmlformats.org/drawingml/2006/main"/>
+          <a:p xmlns:a="http://schemas.openxmlformats.org/drawingml/2006/main">
+            <a:pPr>
+              <a:defRPr sz="1800">
+                <a:solidFill>
+                  <a:srgbClr val="182235"/>
+                </a:solidFill>
+              </a:defRPr>
+            </a:pPr>
+            <a:r>
+              <a:rPr sz="1800">
+                <a:solidFill>
+                  <a:srgbClr val="182235"/>
+                </a:solidFill>
+              </a:rPr>
+              <a:t>프로젝트의 정확한 폴더 경로</a:t>
+            </a:r>
+          </a:p>
+        </p:txBody>
+      </p:sp>
+      <p:sp>
+        <p:nvSpPr>
+          <p:cNvPr id="7" name="">
+            <a:extLst xmlns:a="http://schemas.openxmlformats.org/drawingml/2006/main">
+              <a:ext uri="{FF2B5EF4-FFF2-40B4-BE49-F238E27FC236}">
+                <a16:creationId xmlns:a16="http://schemas.microsoft.com/office/drawing/2014/main" id="{E32A218A-F066-4B52-945E-535643CE4EF4}"/>
+              </a:ext>
+            </a:extLst>
+          </p:cNvPr>
+          <p:cNvSpPr>
+            <a:spLocks xmlns:a="http://schemas.openxmlformats.org/drawingml/2006/main" noGrp="1"/>
+          </p:cNvSpPr>
+          <p:nvPr/>
+        </p:nvSpPr>
+        <p:spPr>
+          <a:xfrm xmlns:a="http://schemas.openxmlformats.org/drawingml/2006/main">
+            <a:off x="742950" y="2400300"/>
+            <a:ext cx="514350" cy="514350"/>
+          </a:xfrm>
+          <a:prstGeom xmlns:a="http://schemas.openxmlformats.org/drawingml/2006/main" prst="roundRect">
+            <a:avLst>
+              <a:gd name="adj" fmla="val 22222"/>
+            </a:avLst>
+          </a:prstGeom>
+          <a:solidFill xmlns:a="http://schemas.openxmlformats.org/drawingml/2006/main">
+            <a:srgbClr val="EAF8F3"/>
+          </a:solidFill>
+          <a:ln xmlns:a="http://schemas.openxmlformats.org/drawingml/2006/main" w="0">
+            <a:noFill/>
+            <a:prstDash val="solid"/>
+          </a:ln>
+        </p:spPr>
+      </p:sp>
+      <p:sp>
+        <p:nvSpPr>
+          <p:cNvPr id="8" name="">
+            <a:extLst xmlns:a="http://schemas.openxmlformats.org/drawingml/2006/main">
+              <a:ext uri="{FF2B5EF4-FFF2-40B4-BE49-F238E27FC236}">
+                <a16:creationId xmlns:a16="http://schemas.microsoft.com/office/drawing/2014/main" id="{0081628C-C932-4887-BBCD-2D05998EF95E}"/>
+              </a:ext>
+            </a:extLst>
+          </p:cNvPr>
+          <p:cNvSpPr>
+            <a:spLocks xmlns:a="http://schemas.openxmlformats.org/drawingml/2006/main" noGrp="1"/>
+          </p:cNvSpPr>
+          <p:nvPr/>
+        </p:nvSpPr>
+        <p:spPr>
+          <a:xfrm xmlns:a="http://schemas.openxmlformats.org/drawingml/2006/main">
+            <a:off x="742950" y="2495550"/>
+            <a:ext cx="514350" cy="304800"/>
+          </a:xfrm>
+          <a:prstGeom xmlns:a="http://schemas.openxmlformats.org/drawingml/2006/main" prst="rect">
+            <a:avLst/>
+          </a:prstGeom>
+          <a:noFill xmlns:a="http://schemas.openxmlformats.org/drawingml/2006/main"/>
+          <a:ln xmlns:a="http://schemas.openxmlformats.org/drawingml/2006/main" w="0">
+            <a:noFill/>
+            <a:prstDash val="solid"/>
+          </a:ln>
+        </p:spPr>
+        <p:txBody>
+          <a:bodyPr xmlns:a="http://schemas.openxmlformats.org/drawingml/2006/main"/>
+          <a:lstStyle xmlns:a="http://schemas.openxmlformats.org/drawingml/2006/main"/>
+          <a:p xmlns:a="http://schemas.openxmlformats.org/drawingml/2006/main">
+            <a:pPr algn="ctr">
+              <a:defRPr sz="1500" b="1">
+                <a:solidFill>
+                  <a:srgbClr val="57C7A5"/>
+                </a:solidFill>
+              </a:defRPr>
+            </a:pPr>
+            <a:r>
+              <a:rPr sz="1500" b="1">
+                <a:solidFill>
+                  <a:srgbClr val="57C7A5"/>
+                </a:solidFill>
+              </a:rPr>
+              <a:t>2</a:t>
+            </a:r>
+          </a:p>
+        </p:txBody>
+      </p:sp>
+      <p:sp>
+        <p:nvSpPr>
+          <p:cNvPr id="9" name="">
+            <a:extLst xmlns:a="http://schemas.openxmlformats.org/drawingml/2006/main">
+              <a:ext uri="{FF2B5EF4-FFF2-40B4-BE49-F238E27FC236}">
+                <a16:creationId xmlns:a16="http://schemas.microsoft.com/office/drawing/2014/main" id="{A76AC737-1E5E-466A-A859-B93458FD74E0}"/>
+              </a:ext>
+            </a:extLst>
+          </p:cNvPr>
+          <p:cNvSpPr>
+            <a:spLocks xmlns:a="http://schemas.openxmlformats.org/drawingml/2006/main" noGrp="1"/>
+          </p:cNvSpPr>
+          <p:nvPr/>
+        </p:nvSpPr>
+        <p:spPr>
+          <a:xfrm xmlns:a="http://schemas.openxmlformats.org/drawingml/2006/main">
+            <a:off x="1485900" y="2438400"/>
+            <a:ext cx="9239250" cy="619125"/>
+          </a:xfrm>
+          <a:prstGeom xmlns:a="http://schemas.openxmlformats.org/drawingml/2006/main" prst="rect">
+            <a:avLst/>
+          </a:prstGeom>
+          <a:noFill xmlns:a="http://schemas.openxmlformats.org/drawingml/2006/main"/>
+          <a:ln xmlns:a="http://schemas.openxmlformats.org/drawingml/2006/main" w="0">
+            <a:noFill/>
+            <a:prstDash val="solid"/>
+          </a:ln>
+        </p:spPr>
+        <p:txBody>
+          <a:bodyPr xmlns:a="http://schemas.openxmlformats.org/drawingml/2006/main"/>
+          <a:lstStyle xmlns:a="http://schemas.openxmlformats.org/drawingml/2006/main"/>
+          <a:p xmlns:a="http://schemas.openxmlformats.org/drawingml/2006/main">
+            <a:pPr>
+              <a:defRPr sz="1800">
+                <a:solidFill>
+                  <a:srgbClr val="182235"/>
+                </a:solidFill>
+              </a:defRPr>
+            </a:pPr>
+            <a:r>
+              <a:rPr sz="1800">
+                <a:solidFill>
+                  <a:srgbClr val="182235"/>
+                </a:solidFill>
+              </a:rPr>
+              <a:t>현재 화면 또는 오류 내용</a:t>
+            </a:r>
+          </a:p>
+        </p:txBody>
+      </p:sp>
+      <p:sp>
+        <p:nvSpPr>
+          <p:cNvPr id="10" name="">
+            <a:extLst xmlns:a="http://schemas.openxmlformats.org/drawingml/2006/main">
+              <a:ext uri="{FF2B5EF4-FFF2-40B4-BE49-F238E27FC236}">
+                <a16:creationId xmlns:a16="http://schemas.microsoft.com/office/drawing/2014/main" id="{CE3E7D2C-E43E-4C25-B22B-178A716AD51E}"/>
+              </a:ext>
+            </a:extLst>
+          </p:cNvPr>
+          <p:cNvSpPr>
+            <a:spLocks xmlns:a="http://schemas.openxmlformats.org/drawingml/2006/main" noGrp="1"/>
+          </p:cNvSpPr>
+          <p:nvPr/>
+        </p:nvSpPr>
+        <p:spPr>
+          <a:xfrm xmlns:a="http://schemas.openxmlformats.org/drawingml/2006/main">
+            <a:off x="742950" y="3371850"/>
+            <a:ext cx="514350" cy="514350"/>
+          </a:xfrm>
+          <a:prstGeom xmlns:a="http://schemas.openxmlformats.org/drawingml/2006/main" prst="roundRect">
+            <a:avLst>
+              <a:gd name="adj" fmla="val 22222"/>
+            </a:avLst>
+          </a:prstGeom>
+          <a:solidFill xmlns:a="http://schemas.openxmlformats.org/drawingml/2006/main">
+            <a:srgbClr val="EEEAFE"/>
+          </a:solidFill>
+          <a:ln xmlns:a="http://schemas.openxmlformats.org/drawingml/2006/main" w="0">
+            <a:noFill/>
+            <a:prstDash val="solid"/>
+          </a:ln>
+        </p:spPr>
+      </p:sp>
+      <p:sp>
+        <p:nvSpPr>
+          <p:cNvPr id="11" name="">
+            <a:extLst xmlns:a="http://schemas.openxmlformats.org/drawingml/2006/main">
+              <a:ext uri="{FF2B5EF4-FFF2-40B4-BE49-F238E27FC236}">
+                <a16:creationId xmlns:a16="http://schemas.microsoft.com/office/drawing/2014/main" id="{05944E0C-1F20-4143-A8B2-CE4697A9F633}"/>
+              </a:ext>
+            </a:extLst>
+          </p:cNvPr>
+          <p:cNvSpPr>
+            <a:spLocks xmlns:a="http://schemas.openxmlformats.org/drawingml/2006/main" noGrp="1"/>
+          </p:cNvSpPr>
+          <p:nvPr/>
+        </p:nvSpPr>
+        <p:spPr>
+          <a:xfrm xmlns:a="http://schemas.openxmlformats.org/drawingml/2006/main">
+            <a:off x="742950" y="3467100"/>
+            <a:ext cx="514350" cy="304800"/>
+          </a:xfrm>
+          <a:prstGeom xmlns:a="http://schemas.openxmlformats.org/drawingml/2006/main" prst="rect">
+            <a:avLst/>
+          </a:prstGeom>
+          <a:noFill xmlns:a="http://schemas.openxmlformats.org/drawingml/2006/main"/>
+          <a:ln xmlns:a="http://schemas.openxmlformats.org/drawingml/2006/main" w="0">
+            <a:noFill/>
+            <a:prstDash val="solid"/>
+          </a:ln>
+        </p:spPr>
+        <p:txBody>
+          <a:bodyPr xmlns:a="http://schemas.openxmlformats.org/drawingml/2006/main"/>
+          <a:lstStyle xmlns:a="http://schemas.openxmlformats.org/drawingml/2006/main"/>
+          <a:p xmlns:a="http://schemas.openxmlformats.org/drawingml/2006/main">
+            <a:pPr algn="ctr">
+              <a:defRPr sz="1500" b="1">
+                <a:solidFill>
+                  <a:srgbClr val="57C7A5"/>
+                </a:solidFill>
+              </a:defRPr>
+            </a:pPr>
+            <a:r>
+              <a:rPr sz="1500" b="1">
+                <a:solidFill>
+                  <a:srgbClr val="57C7A5"/>
+                </a:solidFill>
+              </a:rPr>
+              <a:t>3</a:t>
+            </a:r>
+          </a:p>
+        </p:txBody>
+      </p:sp>
+      <p:sp>
+        <p:nvSpPr>
+          <p:cNvPr id="12" name="">
+            <a:extLst xmlns:a="http://schemas.openxmlformats.org/drawingml/2006/main">
+              <a:ext uri="{FF2B5EF4-FFF2-40B4-BE49-F238E27FC236}">
+                <a16:creationId xmlns:a16="http://schemas.microsoft.com/office/drawing/2014/main" id="{930151C5-2B5F-44B2-98F7-0804CE595540}"/>
+              </a:ext>
+            </a:extLst>
+          </p:cNvPr>
+          <p:cNvSpPr>
+            <a:spLocks xmlns:a="http://schemas.openxmlformats.org/drawingml/2006/main" noGrp="1"/>
+          </p:cNvSpPr>
+          <p:nvPr/>
+        </p:nvSpPr>
+        <p:spPr>
+          <a:xfrm xmlns:a="http://schemas.openxmlformats.org/drawingml/2006/main">
+            <a:off x="1485900" y="3409950"/>
+            <a:ext cx="9239250" cy="619125"/>
+          </a:xfrm>
+          <a:prstGeom xmlns:a="http://schemas.openxmlformats.org/drawingml/2006/main" prst="rect">
+            <a:avLst/>
+          </a:prstGeom>
+          <a:noFill xmlns:a="http://schemas.openxmlformats.org/drawingml/2006/main"/>
+          <a:ln xmlns:a="http://schemas.openxmlformats.org/drawingml/2006/main" w="0">
+            <a:noFill/>
+            <a:prstDash val="solid"/>
+          </a:ln>
+        </p:spPr>
+        <p:txBody>
+          <a:bodyPr xmlns:a="http://schemas.openxmlformats.org/drawingml/2006/main"/>
+          <a:lstStyle xmlns:a="http://schemas.openxmlformats.org/drawingml/2006/main"/>
+          <a:p xmlns:a="http://schemas.openxmlformats.org/drawingml/2006/main">
+            <a:pPr>
+              <a:defRPr sz="1800">
+                <a:solidFill>
+                  <a:srgbClr val="182235"/>
+                </a:solidFill>
+              </a:defRPr>
+            </a:pPr>
+            <a:r>
+              <a:rPr sz="1800">
+                <a:solidFill>
+                  <a:srgbClr val="182235"/>
+                </a:solidFill>
+              </a:rPr>
+              <a:t>유지할 기능 목록</a:t>
+            </a:r>
+          </a:p>
+        </p:txBody>
+      </p:sp>
+      <p:sp>
+        <p:nvSpPr>
+          <p:cNvPr id="13" name="">
+            <a:extLst xmlns:a="http://schemas.openxmlformats.org/drawingml/2006/main">
+              <a:ext uri="{FF2B5EF4-FFF2-40B4-BE49-F238E27FC236}">
+                <a16:creationId xmlns:a16="http://schemas.microsoft.com/office/drawing/2014/main" id="{C0F5D28A-413F-407C-9199-53EB5FEB4629}"/>
+              </a:ext>
+            </a:extLst>
+          </p:cNvPr>
+          <p:cNvSpPr>
+            <a:spLocks xmlns:a="http://schemas.openxmlformats.org/drawingml/2006/main" noGrp="1"/>
+          </p:cNvSpPr>
+          <p:nvPr/>
+        </p:nvSpPr>
+        <p:spPr>
+          <a:xfrm xmlns:a="http://schemas.openxmlformats.org/drawingml/2006/main">
+            <a:off x="742950" y="4343400"/>
+            <a:ext cx="514350" cy="514350"/>
+          </a:xfrm>
+          <a:prstGeom xmlns:a="http://schemas.openxmlformats.org/drawingml/2006/main" prst="roundRect">
+            <a:avLst>
+              <a:gd name="adj" fmla="val 22222"/>
+            </a:avLst>
+          </a:prstGeom>
+          <a:solidFill xmlns:a="http://schemas.openxmlformats.org/drawingml/2006/main">
+            <a:srgbClr val="EAF8F3"/>
+          </a:solidFill>
+          <a:ln xmlns:a="http://schemas.openxmlformats.org/drawingml/2006/main" w="0">
+            <a:noFill/>
+            <a:prstDash val="solid"/>
+          </a:ln>
+        </p:spPr>
+      </p:sp>
+      <p:sp>
+        <p:nvSpPr>
+          <p:cNvPr id="14" name="">
+            <a:extLst xmlns:a="http://schemas.openxmlformats.org/drawingml/2006/main">
+              <a:ext uri="{FF2B5EF4-FFF2-40B4-BE49-F238E27FC236}">
+                <a16:creationId xmlns:a16="http://schemas.microsoft.com/office/drawing/2014/main" id="{40CB6B06-E41B-4CB0-B948-08720D4D81F9}"/>
+              </a:ext>
+            </a:extLst>
+          </p:cNvPr>
+          <p:cNvSpPr>
+            <a:spLocks xmlns:a="http://schemas.openxmlformats.org/drawingml/2006/main" noGrp="1"/>
+          </p:cNvSpPr>
+          <p:nvPr/>
+        </p:nvSpPr>
+        <p:spPr>
+          <a:xfrm xmlns:a="http://schemas.openxmlformats.org/drawingml/2006/main">
+            <a:off x="742950" y="4438650"/>
+            <a:ext cx="514350" cy="304800"/>
+          </a:xfrm>
+          <a:prstGeom xmlns:a="http://schemas.openxmlformats.org/drawingml/2006/main" prst="rect">
+            <a:avLst/>
+          </a:prstGeom>
+          <a:noFill xmlns:a="http://schemas.openxmlformats.org/drawingml/2006/main"/>
+          <a:ln xmlns:a="http://schemas.openxmlformats.org/drawingml/2006/main" w="0">
+            <a:noFill/>
+            <a:prstDash val="solid"/>
+          </a:ln>
+        </p:spPr>
+        <p:txBody>
+          <a:bodyPr xmlns:a="http://schemas.openxmlformats.org/drawingml/2006/main"/>
+          <a:lstStyle xmlns:a="http://schemas.openxmlformats.org/drawingml/2006/main"/>
+          <a:p xmlns:a="http://schemas.openxmlformats.org/drawingml/2006/main">
+            <a:pPr algn="ctr">
+              <a:defRPr sz="1500" b="1">
+                <a:solidFill>
+                  <a:srgbClr val="57C7A5"/>
+                </a:solidFill>
+              </a:defRPr>
+            </a:pPr>
+            <a:r>
+              <a:rPr sz="1500" b="1">
+                <a:solidFill>
+                  <a:srgbClr val="57C7A5"/>
+                </a:solidFill>
+              </a:rPr>
+              <a:t>4</a:t>
+            </a:r>
+          </a:p>
+        </p:txBody>
+      </p:sp>
+      <p:sp>
+        <p:nvSpPr>
+          <p:cNvPr id="15" name="">
+            <a:extLst xmlns:a="http://schemas.openxmlformats.org/drawingml/2006/main">
+              <a:ext uri="{FF2B5EF4-FFF2-40B4-BE49-F238E27FC236}">
+                <a16:creationId xmlns:a16="http://schemas.microsoft.com/office/drawing/2014/main" id="{11D7F758-CB38-4695-AF5C-DAD1492141EB}"/>
+              </a:ext>
+            </a:extLst>
+          </p:cNvPr>
+          <p:cNvSpPr>
+            <a:spLocks xmlns:a="http://schemas.openxmlformats.org/drawingml/2006/main" noGrp="1"/>
+          </p:cNvSpPr>
+          <p:nvPr/>
+        </p:nvSpPr>
+        <p:spPr>
+          <a:xfrm xmlns:a="http://schemas.openxmlformats.org/drawingml/2006/main">
+            <a:off x="1485900" y="4381500"/>
+            <a:ext cx="9239250" cy="619125"/>
+          </a:xfrm>
+          <a:prstGeom xmlns:a="http://schemas.openxmlformats.org/drawingml/2006/main" prst="rect">
+            <a:avLst/>
+          </a:prstGeom>
+          <a:noFill xmlns:a="http://schemas.openxmlformats.org/drawingml/2006/main"/>
+          <a:ln xmlns:a="http://schemas.openxmlformats.org/drawingml/2006/main" w="0">
+            <a:noFill/>
+            <a:prstDash val="solid"/>
+          </a:ln>
+        </p:spPr>
+        <p:txBody>
+          <a:bodyPr xmlns:a="http://schemas.openxmlformats.org/drawingml/2006/main"/>
+          <a:lstStyle xmlns:a="http://schemas.openxmlformats.org/drawingml/2006/main"/>
+          <a:p xmlns:a="http://schemas.openxmlformats.org/drawingml/2006/main">
+            <a:pPr>
+              <a:defRPr sz="1800">
+                <a:solidFill>
+                  <a:srgbClr val="182235"/>
+                </a:solidFill>
+              </a:defRPr>
+            </a:pPr>
+            <a:r>
+              <a:rPr sz="1800">
+                <a:solidFill>
+                  <a:srgbClr val="182235"/>
+                </a:solidFill>
+              </a:rPr>
+              <a:t>원하는 결과 한 가지</a:t>
+            </a:r>
+          </a:p>
+        </p:txBody>
+      </p:sp>
+    </p:spTree>
+    <p:extLst>
+      <p:ext uri="{BB962C8B-B14F-4D97-AF65-F5344CB8AC3E}">
+        <p14:creationId xmlns:p14="http://schemas.microsoft.com/office/powerpoint/2010/main" val="906474670"/>
+      </p:ext>
+    </p:extLst>
+  </p:cSld>
+</p:sld>
+</file>
+
+<file path=ppt/slides/slide11.xml><?xml version="1.0" encoding="utf-8"?>
+<p:sld xmlns:p="http://schemas.openxmlformats.org/presentationml/2006/main">
+  <p:cSld>
+    <p:bg>
+      <p:bgPr>
+        <a:solidFill xmlns:a="http://schemas.openxmlformats.org/drawingml/2006/main">
+          <a:srgbClr val="FFFCF8"/>
+        </a:solidFill>
+      </p:bgPr>
+    </p:bg>
+    <p:spTree>
+      <p:nvGrpSpPr>
+        <p:cNvPr id="1" name=""/>
+        <p:cNvGrpSpPr/>
+        <p:nvPr/>
+      </p:nvGrpSpPr>
+      <p:grpSpPr>
+        <a:xfrm xmlns:a="http://schemas.openxmlformats.org/drawingml/2006/main"/>
+      </p:grpSpPr>
+      <p:sp>
+        <p:nvSpPr>
+          <p:cNvPr id="12" name="">
+            <a:extLst xmlns:a="http://schemas.openxmlformats.org/drawingml/2006/main">
+              <a:ext uri="{FF2B5EF4-FFF2-40B4-BE49-F238E27FC236}">
+                <a16:creationId xmlns:a16="http://schemas.microsoft.com/office/drawing/2014/main" id="{C6F7D3FF-71CA-432A-96F3-3C88844E30D0}"/>
+              </a:ext>
+            </a:extLst>
+          </p:cNvPr>
+          <p:cNvSpPr>
+            <a:spLocks xmlns:a="http://schemas.openxmlformats.org/drawingml/2006/main" noGrp="1"/>
+          </p:cNvSpPr>
+          <p:nvPr/>
+        </p:nvSpPr>
+        <p:spPr>
+          <a:xfrm xmlns:a="http://schemas.openxmlformats.org/drawingml/2006/main">
+            <a:off x="0" y="0"/>
+            <a:ext cx="171450" cy="6858000"/>
+          </a:xfrm>
+          <a:prstGeom xmlns:a="http://schemas.openxmlformats.org/drawingml/2006/main" prst="rect">
+            <a:avLst/>
+          </a:prstGeom>
+          <a:solidFill xmlns:a="http://schemas.openxmlformats.org/drawingml/2006/main">
+            <a:srgbClr val="6657E8"/>
+          </a:solidFill>
+          <a:ln xmlns:a="http://schemas.openxmlformats.org/drawingml/2006/main" w="0">
+            <a:noFill/>
+            <a:prstDash val="solid"/>
+          </a:ln>
+        </p:spPr>
+      </p:sp>
+      <p:sp>
+        <p:nvSpPr>
+          <p:cNvPr id="2" name="">
+            <a:extLst xmlns:a="http://schemas.openxmlformats.org/drawingml/2006/main">
+              <a:ext uri="{FF2B5EF4-FFF2-40B4-BE49-F238E27FC236}">
+                <a16:creationId xmlns:a16="http://schemas.microsoft.com/office/drawing/2014/main" id="{CA9274FB-A428-4BF2-A051-2A336D84BEC9}"/>
+              </a:ext>
+            </a:extLst>
+          </p:cNvPr>
+          <p:cNvSpPr>
+            <a:spLocks xmlns:a="http://schemas.openxmlformats.org/drawingml/2006/main" noGrp="1"/>
+          </p:cNvSpPr>
+          <p:nvPr/>
+        </p:nvSpPr>
+        <p:spPr>
+          <a:xfrm xmlns:a="http://schemas.openxmlformats.org/drawingml/2006/main">
+            <a:off x="647700" y="457200"/>
+            <a:ext cx="10096500" cy="552450"/>
+          </a:xfrm>
+          <a:prstGeom xmlns:a="http://schemas.openxmlformats.org/drawingml/2006/main" prst="rect">
+            <a:avLst/>
+          </a:prstGeom>
+          <a:noFill xmlns:a="http://schemas.openxmlformats.org/drawingml/2006/main"/>
+          <a:ln xmlns:a="http://schemas.openxmlformats.org/drawingml/2006/main" w="0">
+            <a:noFill/>
+            <a:prstDash val="solid"/>
+          </a:ln>
+        </p:spPr>
+        <p:txBody>
+          <a:bodyPr xmlns:a="http://schemas.openxmlformats.org/drawingml/2006/main"/>
+          <a:lstStyle xmlns:a="http://schemas.openxmlformats.org/drawingml/2006/main"/>
+          <a:p xmlns:a="http://schemas.openxmlformats.org/drawingml/2006/main">
+            <a:pPr>
+              <a:defRPr sz="2700" b="1">
+                <a:solidFill>
+                  <a:srgbClr val="182235"/>
+                </a:solidFill>
+              </a:defRPr>
+            </a:pPr>
+            <a:r>
+              <a:rPr sz="2700" b="1">
+                <a:solidFill>
+                  <a:srgbClr val="182235"/>
+                </a:solidFill>
+              </a:rPr>
+              <a:t>코드의 역할을 하나씩 연결해 보세요</a:t>
+            </a:r>
+          </a:p>
+        </p:txBody>
+      </p:sp>
+      <p:sp>
+        <p:nvSpPr>
+          <p:cNvPr id="3" name="">
+            <a:extLst xmlns:a="http://schemas.openxmlformats.org/drawingml/2006/main">
+              <a:ext uri="{FF2B5EF4-FFF2-40B4-BE49-F238E27FC236}">
+                <a16:creationId xmlns:a16="http://schemas.microsoft.com/office/drawing/2014/main" id="{E01534E8-88F0-4416-9B15-4D0796D8FAAF}"/>
+              </a:ext>
+            </a:extLst>
+          </p:cNvPr>
+          <p:cNvSpPr>
+            <a:spLocks xmlns:a="http://schemas.openxmlformats.org/drawingml/2006/main" noGrp="1"/>
+          </p:cNvSpPr>
+          <p:nvPr/>
+        </p:nvSpPr>
+        <p:spPr>
+          <a:xfrm xmlns:a="http://schemas.openxmlformats.org/drawingml/2006/main">
+            <a:off x="666750" y="6419850"/>
+            <a:ext cx="10096500" cy="209550"/>
+          </a:xfrm>
+          <a:prstGeom xmlns:a="http://schemas.openxmlformats.org/drawingml/2006/main" prst="rect">
+            <a:avLst/>
+          </a:prstGeom>
+          <a:noFill xmlns:a="http://schemas.openxmlformats.org/drawingml/2006/main"/>
+          <a:ln xmlns:a="http://schemas.openxmlformats.org/drawingml/2006/main" w="0">
+            <a:noFill/>
+            <a:prstDash val="solid"/>
+          </a:ln>
+        </p:spPr>
+        <p:txBody>
+          <a:bodyPr xmlns:a="http://schemas.openxmlformats.org/drawingml/2006/main"/>
+          <a:lstStyle xmlns:a="http://schemas.openxmlformats.org/drawingml/2006/main"/>
+          <a:p xmlns:a="http://schemas.openxmlformats.org/drawingml/2006/main">
+            <a:pPr>
+              <a:defRPr sz="975">
+                <a:solidFill>
+                  <a:srgbClr val="657083"/>
+                </a:solidFill>
+              </a:defRPr>
+            </a:pPr>
+            <a:r>
+              <a:rPr sz="975">
+                <a:solidFill>
+                  <a:srgbClr val="657083"/>
+                </a:solidFill>
+              </a:rPr>
+              <a:t>EDU 웹개발 교육 플랫폼  ·  11</a:t>
+            </a:r>
+          </a:p>
+        </p:txBody>
+      </p:sp>
+      <p:sp>
+        <p:nvSpPr>
+          <p:cNvPr id="4" name="">
+            <a:extLst xmlns:a="http://schemas.openxmlformats.org/drawingml/2006/main">
+              <a:ext uri="{FF2B5EF4-FFF2-40B4-BE49-F238E27FC236}">
+                <a16:creationId xmlns:a16="http://schemas.microsoft.com/office/drawing/2014/main" id="{096B05F4-A3FA-4204-A444-53750EBE7064}"/>
+              </a:ext>
+            </a:extLst>
+          </p:cNvPr>
+          <p:cNvSpPr>
+            <a:spLocks xmlns:a="http://schemas.openxmlformats.org/drawingml/2006/main" noGrp="1"/>
+          </p:cNvSpPr>
+          <p:nvPr/>
+        </p:nvSpPr>
+        <p:spPr>
+          <a:xfrm xmlns:a="http://schemas.openxmlformats.org/drawingml/2006/main">
+            <a:off x="857250" y="1428750"/>
+            <a:ext cx="2381250" cy="400050"/>
+          </a:xfrm>
+          <a:prstGeom xmlns:a="http://schemas.openxmlformats.org/drawingml/2006/main" prst="rect">
+            <a:avLst/>
+          </a:prstGeom>
+          <a:noFill xmlns:a="http://schemas.openxmlformats.org/drawingml/2006/main"/>
+          <a:ln xmlns:a="http://schemas.openxmlformats.org/drawingml/2006/main" w="0">
+            <a:noFill/>
+            <a:prstDash val="solid"/>
+          </a:ln>
+        </p:spPr>
+        <p:txBody>
+          <a:bodyPr xmlns:a="http://schemas.openxmlformats.org/drawingml/2006/main"/>
+          <a:lstStyle xmlns:a="http://schemas.openxmlformats.org/drawingml/2006/main"/>
+          <a:p xmlns:a="http://schemas.openxmlformats.org/drawingml/2006/main">
+            <a:pPr>
+              <a:defRPr sz="1725" b="1">
+                <a:solidFill>
+                  <a:srgbClr val="6657E8"/>
+                </a:solidFill>
+              </a:defRPr>
+            </a:pPr>
+            <a:r>
+              <a:rPr sz="1725" b="1">
+                <a:solidFill>
+                  <a:srgbClr val="6657E8"/>
+                </a:solidFill>
+              </a:rPr>
+              <a:t>작업 위치</a:t>
+            </a:r>
+          </a:p>
+        </p:txBody>
+      </p:sp>
+      <p:sp>
+        <p:nvSpPr>
+          <p:cNvPr id="5" name="">
+            <a:extLst xmlns:a="http://schemas.openxmlformats.org/drawingml/2006/main">
+              <a:ext uri="{FF2B5EF4-FFF2-40B4-BE49-F238E27FC236}">
+                <a16:creationId xmlns:a16="http://schemas.microsoft.com/office/drawing/2014/main" id="{39FC957B-8457-4867-9741-C11D0D14F26B}"/>
+              </a:ext>
+            </a:extLst>
+          </p:cNvPr>
+          <p:cNvSpPr>
+            <a:spLocks xmlns:a="http://schemas.openxmlformats.org/drawingml/2006/main" noGrp="1"/>
+          </p:cNvSpPr>
+          <p:nvPr/>
+        </p:nvSpPr>
+        <p:spPr>
+          <a:xfrm xmlns:a="http://schemas.openxmlformats.org/drawingml/2006/main">
+            <a:off x="3429000" y="1428750"/>
+            <a:ext cx="7429500" cy="666750"/>
+          </a:xfrm>
+          <a:prstGeom xmlns:a="http://schemas.openxmlformats.org/drawingml/2006/main" prst="rect">
+            <a:avLst/>
+          </a:prstGeom>
+          <a:noFill xmlns:a="http://schemas.openxmlformats.org/drawingml/2006/main"/>
+          <a:ln xmlns:a="http://schemas.openxmlformats.org/drawingml/2006/main" w="0">
+            <a:noFill/>
+            <a:prstDash val="solid"/>
+          </a:ln>
+        </p:spPr>
+        <p:txBody>
+          <a:bodyPr xmlns:a="http://schemas.openxmlformats.org/drawingml/2006/main"/>
+          <a:lstStyle xmlns:a="http://schemas.openxmlformats.org/drawingml/2006/main"/>
+          <a:p xmlns:a="http://schemas.openxmlformats.org/drawingml/2006/main">
+            <a:pPr>
+              <a:defRPr sz="1650">
+                <a:solidFill>
+                  <a:srgbClr val="182235"/>
+                </a:solidFill>
+              </a:defRPr>
+            </a:pPr>
+            <a:r>
+              <a:rPr sz="1650">
+                <a:solidFill>
+                  <a:srgbClr val="182235"/>
+                </a:solidFill>
+              </a:rPr>
+              <a:t>다른 프로젝트를 건드리지 않도록 폴더를 적습니다.</a:t>
+            </a:r>
+          </a:p>
+        </p:txBody>
+      </p:sp>
+      <p:sp>
+        <p:nvSpPr>
+          <p:cNvPr id="6" name="">
+            <a:extLst xmlns:a="http://schemas.openxmlformats.org/drawingml/2006/main">
+              <a:ext uri="{FF2B5EF4-FFF2-40B4-BE49-F238E27FC236}">
+                <a16:creationId xmlns:a16="http://schemas.microsoft.com/office/drawing/2014/main" id="{8977B3E3-4E1E-43FD-9C43-F873B86A989D}"/>
+              </a:ext>
+            </a:extLst>
+          </p:cNvPr>
+          <p:cNvSpPr>
+            <a:spLocks xmlns:a="http://schemas.openxmlformats.org/drawingml/2006/main" noGrp="1"/>
+          </p:cNvSpPr>
+          <p:nvPr/>
+        </p:nvSpPr>
+        <p:spPr>
+          <a:xfrm xmlns:a="http://schemas.openxmlformats.org/drawingml/2006/main">
+            <a:off x="857250" y="2524125"/>
+            <a:ext cx="2381250" cy="400050"/>
+          </a:xfrm>
+          <a:prstGeom xmlns:a="http://schemas.openxmlformats.org/drawingml/2006/main" prst="rect">
+            <a:avLst/>
+          </a:prstGeom>
+          <a:noFill xmlns:a="http://schemas.openxmlformats.org/drawingml/2006/main"/>
+          <a:ln xmlns:a="http://schemas.openxmlformats.org/drawingml/2006/main" w="0">
+            <a:noFill/>
+            <a:prstDash val="solid"/>
+          </a:ln>
+        </p:spPr>
+        <p:txBody>
+          <a:bodyPr xmlns:a="http://schemas.openxmlformats.org/drawingml/2006/main"/>
+          <a:lstStyle xmlns:a="http://schemas.openxmlformats.org/drawingml/2006/main"/>
+          <a:p xmlns:a="http://schemas.openxmlformats.org/drawingml/2006/main">
+            <a:pPr>
+              <a:defRPr sz="1725" b="1">
+                <a:solidFill>
+                  <a:srgbClr val="6657E8"/>
+                </a:solidFill>
+              </a:defRPr>
+            </a:pPr>
+            <a:r>
+              <a:rPr sz="1725" b="1">
+                <a:solidFill>
+                  <a:srgbClr val="6657E8"/>
+                </a:solidFill>
+              </a:rPr>
+              <a:t>구현 범위</a:t>
+            </a:r>
+          </a:p>
+        </p:txBody>
+      </p:sp>
+      <p:sp>
+        <p:nvSpPr>
+          <p:cNvPr id="7" name="">
+            <a:extLst xmlns:a="http://schemas.openxmlformats.org/drawingml/2006/main">
+              <a:ext uri="{FF2B5EF4-FFF2-40B4-BE49-F238E27FC236}">
+                <a16:creationId xmlns:a16="http://schemas.microsoft.com/office/drawing/2014/main" id="{D24A6F3C-6052-4F2F-9BB1-8AD7D1F6940D}"/>
+              </a:ext>
+            </a:extLst>
+          </p:cNvPr>
+          <p:cNvSpPr>
+            <a:spLocks xmlns:a="http://schemas.openxmlformats.org/drawingml/2006/main" noGrp="1"/>
+          </p:cNvSpPr>
+          <p:nvPr/>
+        </p:nvSpPr>
+        <p:spPr>
+          <a:xfrm xmlns:a="http://schemas.openxmlformats.org/drawingml/2006/main">
+            <a:off x="3429000" y="2524125"/>
+            <a:ext cx="7429500" cy="666750"/>
+          </a:xfrm>
+          <a:prstGeom xmlns:a="http://schemas.openxmlformats.org/drawingml/2006/main" prst="rect">
+            <a:avLst/>
+          </a:prstGeom>
+          <a:noFill xmlns:a="http://schemas.openxmlformats.org/drawingml/2006/main"/>
+          <a:ln xmlns:a="http://schemas.openxmlformats.org/drawingml/2006/main" w="0">
+            <a:noFill/>
+            <a:prstDash val="solid"/>
+          </a:ln>
+        </p:spPr>
+        <p:txBody>
+          <a:bodyPr xmlns:a="http://schemas.openxmlformats.org/drawingml/2006/main"/>
+          <a:lstStyle xmlns:a="http://schemas.openxmlformats.org/drawingml/2006/main"/>
+          <a:p xmlns:a="http://schemas.openxmlformats.org/drawingml/2006/main">
+            <a:pPr>
+              <a:defRPr sz="1650">
+                <a:solidFill>
+                  <a:srgbClr val="182235"/>
+                </a:solidFill>
+              </a:defRPr>
+            </a:pPr>
+            <a:r>
+              <a:rPr sz="1650">
+                <a:solidFill>
+                  <a:srgbClr val="182235"/>
+                </a:solidFill>
+              </a:rPr>
+              <a:t>이번에 만들 한 가지 결과를 씁니다.</a:t>
+            </a:r>
+          </a:p>
+        </p:txBody>
+      </p:sp>
+      <p:sp>
+        <p:nvSpPr>
+          <p:cNvPr id="8" name="">
+            <a:extLst xmlns:a="http://schemas.openxmlformats.org/drawingml/2006/main">
+              <a:ext uri="{FF2B5EF4-FFF2-40B4-BE49-F238E27FC236}">
+                <a16:creationId xmlns:a16="http://schemas.microsoft.com/office/drawing/2014/main" id="{C99E28EC-A0D5-4DBA-AF25-8BA491C5B7FB}"/>
+              </a:ext>
+            </a:extLst>
+          </p:cNvPr>
+          <p:cNvSpPr>
+            <a:spLocks xmlns:a="http://schemas.openxmlformats.org/drawingml/2006/main" noGrp="1"/>
+          </p:cNvSpPr>
+          <p:nvPr/>
+        </p:nvSpPr>
+        <p:spPr>
+          <a:xfrm xmlns:a="http://schemas.openxmlformats.org/drawingml/2006/main">
+            <a:off x="857250" y="3619500"/>
+            <a:ext cx="2381250" cy="400050"/>
+          </a:xfrm>
+          <a:prstGeom xmlns:a="http://schemas.openxmlformats.org/drawingml/2006/main" prst="rect">
+            <a:avLst/>
+          </a:prstGeom>
+          <a:noFill xmlns:a="http://schemas.openxmlformats.org/drawingml/2006/main"/>
+          <a:ln xmlns:a="http://schemas.openxmlformats.org/drawingml/2006/main" w="0">
+            <a:noFill/>
+            <a:prstDash val="solid"/>
+          </a:ln>
+        </p:spPr>
+        <p:txBody>
+          <a:bodyPr xmlns:a="http://schemas.openxmlformats.org/drawingml/2006/main"/>
+          <a:lstStyle xmlns:a="http://schemas.openxmlformats.org/drawingml/2006/main"/>
+          <a:p xmlns:a="http://schemas.openxmlformats.org/drawingml/2006/main">
+            <a:pPr>
+              <a:defRPr sz="1725" b="1">
+                <a:solidFill>
+                  <a:srgbClr val="6657E8"/>
+                </a:solidFill>
+              </a:defRPr>
+            </a:pPr>
+            <a:r>
+              <a:rPr sz="1725" b="1">
+                <a:solidFill>
+                  <a:srgbClr val="6657E8"/>
+                </a:solidFill>
+              </a:rPr>
+              <a:t>제외 범위</a:t>
+            </a:r>
+          </a:p>
+        </p:txBody>
+      </p:sp>
+      <p:sp>
+        <p:nvSpPr>
+          <p:cNvPr id="9" name="">
+            <a:extLst xmlns:a="http://schemas.openxmlformats.org/drawingml/2006/main">
+              <a:ext uri="{FF2B5EF4-FFF2-40B4-BE49-F238E27FC236}">
+                <a16:creationId xmlns:a16="http://schemas.microsoft.com/office/drawing/2014/main" id="{21F07960-4A8E-4D79-ADBE-AFBA1A457AC5}"/>
+              </a:ext>
+            </a:extLst>
+          </p:cNvPr>
+          <p:cNvSpPr>
+            <a:spLocks xmlns:a="http://schemas.openxmlformats.org/drawingml/2006/main" noGrp="1"/>
+          </p:cNvSpPr>
+          <p:nvPr/>
+        </p:nvSpPr>
+        <p:spPr>
+          <a:xfrm xmlns:a="http://schemas.openxmlformats.org/drawingml/2006/main">
+            <a:off x="3429000" y="3619500"/>
+            <a:ext cx="7429500" cy="666750"/>
+          </a:xfrm>
+          <a:prstGeom xmlns:a="http://schemas.openxmlformats.org/drawingml/2006/main" prst="rect">
+            <a:avLst/>
+          </a:prstGeom>
+          <a:noFill xmlns:a="http://schemas.openxmlformats.org/drawingml/2006/main"/>
+          <a:ln xmlns:a="http://schemas.openxmlformats.org/drawingml/2006/main" w="0">
+            <a:noFill/>
+            <a:prstDash val="solid"/>
+          </a:ln>
+        </p:spPr>
+        <p:txBody>
+          <a:bodyPr xmlns:a="http://schemas.openxmlformats.org/drawingml/2006/main"/>
+          <a:lstStyle xmlns:a="http://schemas.openxmlformats.org/drawingml/2006/main"/>
+          <a:p xmlns:a="http://schemas.openxmlformats.org/drawingml/2006/main">
+            <a:pPr>
+              <a:defRPr sz="1650">
+                <a:solidFill>
+                  <a:srgbClr val="182235"/>
+                </a:solidFill>
+              </a:defRPr>
+            </a:pPr>
+            <a:r>
+              <a:rPr sz="1650">
+                <a:solidFill>
+                  <a:srgbClr val="182235"/>
+                </a:solidFill>
+              </a:rPr>
+              <a:t>아직 만들지 않을 기능을 정합니다.</a:t>
+            </a:r>
+          </a:p>
+        </p:txBody>
+      </p:sp>
+      <p:sp>
+        <p:nvSpPr>
+          <p:cNvPr id="10" name="">
+            <a:extLst xmlns:a="http://schemas.openxmlformats.org/drawingml/2006/main">
+              <a:ext uri="{FF2B5EF4-FFF2-40B4-BE49-F238E27FC236}">
+                <a16:creationId xmlns:a16="http://schemas.microsoft.com/office/drawing/2014/main" id="{A9F1C4DE-3BF9-4592-A962-7BED5BE6DAC8}"/>
+              </a:ext>
+            </a:extLst>
+          </p:cNvPr>
+          <p:cNvSpPr>
+            <a:spLocks xmlns:a="http://schemas.openxmlformats.org/drawingml/2006/main" noGrp="1"/>
+          </p:cNvSpPr>
+          <p:nvPr/>
+        </p:nvSpPr>
+        <p:spPr>
+          <a:xfrm xmlns:a="http://schemas.openxmlformats.org/drawingml/2006/main">
+            <a:off x="857250" y="4714875"/>
+            <a:ext cx="2381250" cy="400050"/>
+          </a:xfrm>
+          <a:prstGeom xmlns:a="http://schemas.openxmlformats.org/drawingml/2006/main" prst="rect">
+            <a:avLst/>
+          </a:prstGeom>
+          <a:noFill xmlns:a="http://schemas.openxmlformats.org/drawingml/2006/main"/>
+          <a:ln xmlns:a="http://schemas.openxmlformats.org/drawingml/2006/main" w="0">
+            <a:noFill/>
+            <a:prstDash val="solid"/>
+          </a:ln>
+        </p:spPr>
+        <p:txBody>
+          <a:bodyPr xmlns:a="http://schemas.openxmlformats.org/drawingml/2006/main"/>
+          <a:lstStyle xmlns:a="http://schemas.openxmlformats.org/drawingml/2006/main"/>
+          <a:p xmlns:a="http://schemas.openxmlformats.org/drawingml/2006/main">
+            <a:pPr>
+              <a:defRPr sz="1725" b="1">
+                <a:solidFill>
+                  <a:srgbClr val="6657E8"/>
+                </a:solidFill>
+              </a:defRPr>
+            </a:pPr>
+            <a:r>
+              <a:rPr sz="1725" b="1">
+                <a:solidFill>
+                  <a:srgbClr val="6657E8"/>
+                </a:solidFill>
+              </a:rPr>
+              <a:t>완료 확인</a:t>
+            </a:r>
+          </a:p>
+        </p:txBody>
+      </p:sp>
+      <p:sp>
+        <p:nvSpPr>
+          <p:cNvPr id="11" name="">
+            <a:extLst xmlns:a="http://schemas.openxmlformats.org/drawingml/2006/main">
+              <a:ext uri="{FF2B5EF4-FFF2-40B4-BE49-F238E27FC236}">
+                <a16:creationId xmlns:a16="http://schemas.microsoft.com/office/drawing/2014/main" id="{7F6B6B8A-993D-4042-BDA9-7C8736CAB36C}"/>
+              </a:ext>
+            </a:extLst>
+          </p:cNvPr>
+          <p:cNvSpPr>
+            <a:spLocks xmlns:a="http://schemas.openxmlformats.org/drawingml/2006/main" noGrp="1"/>
+          </p:cNvSpPr>
+          <p:nvPr/>
+        </p:nvSpPr>
+        <p:spPr>
+          <a:xfrm xmlns:a="http://schemas.openxmlformats.org/drawingml/2006/main">
+            <a:off x="3429000" y="4714875"/>
+            <a:ext cx="7429500" cy="666750"/>
+          </a:xfrm>
+          <a:prstGeom xmlns:a="http://schemas.openxmlformats.org/drawingml/2006/main" prst="rect">
+            <a:avLst/>
+          </a:prstGeom>
+          <a:noFill xmlns:a="http://schemas.openxmlformats.org/drawingml/2006/main"/>
+          <a:ln xmlns:a="http://schemas.openxmlformats.org/drawingml/2006/main" w="0">
+            <a:noFill/>
+            <a:prstDash val="solid"/>
+          </a:ln>
+        </p:spPr>
+        <p:txBody>
+          <a:bodyPr xmlns:a="http://schemas.openxmlformats.org/drawingml/2006/main"/>
+          <a:lstStyle xmlns:a="http://schemas.openxmlformats.org/drawingml/2006/main"/>
+          <a:p xmlns:a="http://schemas.openxmlformats.org/drawingml/2006/main">
+            <a:pPr>
+              <a:defRPr sz="1650">
+                <a:solidFill>
+                  <a:srgbClr val="182235"/>
+                </a:solidFill>
+              </a:defRPr>
+            </a:pPr>
+            <a:r>
+              <a:rPr sz="1650">
+                <a:solidFill>
+                  <a:srgbClr val="182235"/>
+                </a:solidFill>
+              </a:rPr>
+              <a:t>빌드와 화면에서 확인할 항목을 적습니다.</a:t>
+            </a:r>
+          </a:p>
+        </p:txBody>
+      </p:sp>
+    </p:spTree>
+    <p:extLst>
+      <p:ext uri="{BB962C8B-B14F-4D97-AF65-F5344CB8AC3E}">
+        <p14:creationId xmlns:p14="http://schemas.microsoft.com/office/powerpoint/2010/main" val="1690935013"/>
+      </p:ext>
+    </p:extLst>
+  </p:cSld>
+</p:sld>
+</file>
+
+<file path=ppt/slides/slide12.xml><?xml version="1.0" encoding="utf-8"?>
+<p:sld xmlns:p="http://schemas.openxmlformats.org/presentationml/2006/main">
+  <p:cSld>
+    <p:bg>
+      <p:bgPr>
+        <a:solidFill xmlns:a="http://schemas.openxmlformats.org/drawingml/2006/main">
+          <a:srgbClr val="FFFCF8"/>
+        </a:solidFill>
+      </p:bgPr>
+    </p:bg>
+    <p:spTree>
+      <p:nvGrpSpPr>
+        <p:cNvPr id="1" name=""/>
+        <p:cNvGrpSpPr/>
+        <p:nvPr/>
+      </p:nvGrpSpPr>
+      <p:grpSpPr>
+        <a:xfrm xmlns:a="http://schemas.openxmlformats.org/drawingml/2006/main"/>
+      </p:grpSpPr>
+      <p:sp>
+        <p:nvSpPr>
+          <p:cNvPr id="13" name="">
+            <a:extLst xmlns:a="http://schemas.openxmlformats.org/drawingml/2006/main">
+              <a:ext uri="{FF2B5EF4-FFF2-40B4-BE49-F238E27FC236}">
+                <a16:creationId xmlns:a16="http://schemas.microsoft.com/office/drawing/2014/main" id="{10ECBBE4-A158-4187-A43A-5D90E07FC2AB}"/>
+              </a:ext>
+            </a:extLst>
+          </p:cNvPr>
+          <p:cNvSpPr>
+            <a:spLocks xmlns:a="http://schemas.openxmlformats.org/drawingml/2006/main" noGrp="1"/>
+          </p:cNvSpPr>
+          <p:nvPr/>
+        </p:nvSpPr>
+        <p:spPr>
+          <a:xfrm xmlns:a="http://schemas.openxmlformats.org/drawingml/2006/main">
+            <a:off x="0" y="0"/>
+            <a:ext cx="171450" cy="6858000"/>
+          </a:xfrm>
+          <a:prstGeom xmlns:a="http://schemas.openxmlformats.org/drawingml/2006/main" prst="rect">
+            <a:avLst/>
+          </a:prstGeom>
+          <a:solidFill xmlns:a="http://schemas.openxmlformats.org/drawingml/2006/main">
+            <a:srgbClr val="6657E8"/>
+          </a:solidFill>
+          <a:ln xmlns:a="http://schemas.openxmlformats.org/drawingml/2006/main" w="0">
+            <a:noFill/>
+            <a:prstDash val="solid"/>
+          </a:ln>
+        </p:spPr>
+      </p:sp>
+      <p:sp>
+        <p:nvSpPr>
+          <p:cNvPr id="2" name="">
+            <a:extLst xmlns:a="http://schemas.openxmlformats.org/drawingml/2006/main">
+              <a:ext uri="{FF2B5EF4-FFF2-40B4-BE49-F238E27FC236}">
+                <a16:creationId xmlns:a16="http://schemas.microsoft.com/office/drawing/2014/main" id="{37063DCD-D8B0-4C4D-9CCB-73F6E32EEC20}"/>
+              </a:ext>
+            </a:extLst>
+          </p:cNvPr>
+          <p:cNvSpPr>
+            <a:spLocks xmlns:a="http://schemas.openxmlformats.org/drawingml/2006/main" noGrp="1"/>
+          </p:cNvSpPr>
+          <p:nvPr/>
+        </p:nvSpPr>
+        <p:spPr>
+          <a:xfrm xmlns:a="http://schemas.openxmlformats.org/drawingml/2006/main">
+            <a:off x="647700" y="457200"/>
+            <a:ext cx="10096500" cy="552450"/>
+          </a:xfrm>
+          <a:prstGeom xmlns:a="http://schemas.openxmlformats.org/drawingml/2006/main" prst="rect">
+            <a:avLst/>
+          </a:prstGeom>
+          <a:noFill xmlns:a="http://schemas.openxmlformats.org/drawingml/2006/main"/>
+          <a:ln xmlns:a="http://schemas.openxmlformats.org/drawingml/2006/main" w="0">
+            <a:noFill/>
+            <a:prstDash val="solid"/>
+          </a:ln>
+        </p:spPr>
+        <p:txBody>
+          <a:bodyPr xmlns:a="http://schemas.openxmlformats.org/drawingml/2006/main"/>
+          <a:lstStyle xmlns:a="http://schemas.openxmlformats.org/drawingml/2006/main"/>
+          <a:p xmlns:a="http://schemas.openxmlformats.org/drawingml/2006/main">
+            <a:pPr>
+              <a:defRPr sz="2700" b="1">
+                <a:solidFill>
+                  <a:srgbClr val="182235"/>
+                </a:solidFill>
+              </a:defRPr>
+            </a:pPr>
+            <a:r>
+              <a:rPr sz="2700" b="1">
+                <a:solidFill>
+                  <a:srgbClr val="182235"/>
+                </a:solidFill>
+              </a:rPr>
+              <a:t>오류는 첫 문장부터 차례로 해결합니다</a:t>
+            </a:r>
+          </a:p>
+        </p:txBody>
+      </p:sp>
+      <p:sp>
+        <p:nvSpPr>
+          <p:cNvPr id="3" name="">
+            <a:extLst xmlns:a="http://schemas.openxmlformats.org/drawingml/2006/main">
+              <a:ext uri="{FF2B5EF4-FFF2-40B4-BE49-F238E27FC236}">
+                <a16:creationId xmlns:a16="http://schemas.microsoft.com/office/drawing/2014/main" id="{87F8E719-F962-4B20-A715-50801D5E6BEC}"/>
+              </a:ext>
+            </a:extLst>
+          </p:cNvPr>
+          <p:cNvSpPr>
+            <a:spLocks xmlns:a="http://schemas.openxmlformats.org/drawingml/2006/main" noGrp="1"/>
+          </p:cNvSpPr>
+          <p:nvPr/>
+        </p:nvSpPr>
+        <p:spPr>
+          <a:xfrm xmlns:a="http://schemas.openxmlformats.org/drawingml/2006/main">
+            <a:off x="666750" y="6419850"/>
+            <a:ext cx="10096500" cy="209550"/>
+          </a:xfrm>
+          <a:prstGeom xmlns:a="http://schemas.openxmlformats.org/drawingml/2006/main" prst="rect">
+            <a:avLst/>
+          </a:prstGeom>
+          <a:noFill xmlns:a="http://schemas.openxmlformats.org/drawingml/2006/main"/>
+          <a:ln xmlns:a="http://schemas.openxmlformats.org/drawingml/2006/main" w="0">
+            <a:noFill/>
+            <a:prstDash val="solid"/>
+          </a:ln>
+        </p:spPr>
+        <p:txBody>
+          <a:bodyPr xmlns:a="http://schemas.openxmlformats.org/drawingml/2006/main"/>
+          <a:lstStyle xmlns:a="http://schemas.openxmlformats.org/drawingml/2006/main"/>
+          <a:p xmlns:a="http://schemas.openxmlformats.org/drawingml/2006/main">
+            <a:pPr>
+              <a:defRPr sz="975">
+                <a:solidFill>
+                  <a:srgbClr val="657083"/>
+                </a:solidFill>
+              </a:defRPr>
+            </a:pPr>
+            <a:r>
+              <a:rPr sz="975">
+                <a:solidFill>
+                  <a:srgbClr val="657083"/>
+                </a:solidFill>
+              </a:rPr>
+              <a:t>EDU 웹개발 교육 플랫폼  ·  12</a:t>
+            </a:r>
+          </a:p>
+        </p:txBody>
+      </p:sp>
+      <p:sp>
+        <p:nvSpPr>
+          <p:cNvPr id="4" name="">
+            <a:extLst xmlns:a="http://schemas.openxmlformats.org/drawingml/2006/main">
+              <a:ext uri="{FF2B5EF4-FFF2-40B4-BE49-F238E27FC236}">
+                <a16:creationId xmlns:a16="http://schemas.microsoft.com/office/drawing/2014/main" id="{008A21C4-F4BE-4C9C-89DF-32F1CBCD1290}"/>
+              </a:ext>
+            </a:extLst>
+          </p:cNvPr>
+          <p:cNvSpPr>
+            <a:spLocks xmlns:a="http://schemas.openxmlformats.org/drawingml/2006/main" noGrp="1"/>
+          </p:cNvSpPr>
+          <p:nvPr/>
+        </p:nvSpPr>
+        <p:spPr>
+          <a:xfrm xmlns:a="http://schemas.openxmlformats.org/drawingml/2006/main">
+            <a:off x="723900" y="1333500"/>
+            <a:ext cx="10744200" cy="1123950"/>
+          </a:xfrm>
+          <a:prstGeom xmlns:a="http://schemas.openxmlformats.org/drawingml/2006/main" prst="roundRect">
+            <a:avLst>
+              <a:gd name="adj" fmla="val 10169"/>
+            </a:avLst>
+          </a:prstGeom>
+          <a:solidFill xmlns:a="http://schemas.openxmlformats.org/drawingml/2006/main">
+            <a:srgbClr val="FFF0ED"/>
+          </a:solidFill>
+          <a:ln xmlns:a="http://schemas.openxmlformats.org/drawingml/2006/main" w="0">
+            <a:noFill/>
+            <a:prstDash val="solid"/>
+          </a:ln>
+        </p:spPr>
+      </p:sp>
+      <p:sp>
+        <p:nvSpPr>
+          <p:cNvPr id="5" name="">
+            <a:extLst xmlns:a="http://schemas.openxmlformats.org/drawingml/2006/main">
+              <a:ext uri="{FF2B5EF4-FFF2-40B4-BE49-F238E27FC236}">
+                <a16:creationId xmlns:a16="http://schemas.microsoft.com/office/drawing/2014/main" id="{E124E99A-B61D-4371-972B-25FDE1538925}"/>
+              </a:ext>
+            </a:extLst>
+          </p:cNvPr>
+          <p:cNvSpPr>
+            <a:spLocks xmlns:a="http://schemas.openxmlformats.org/drawingml/2006/main" noGrp="1"/>
+          </p:cNvSpPr>
+          <p:nvPr/>
+        </p:nvSpPr>
+        <p:spPr>
+          <a:xfrm xmlns:a="http://schemas.openxmlformats.org/drawingml/2006/main">
+            <a:off x="1000125" y="1562100"/>
+            <a:ext cx="2857500" cy="361950"/>
+          </a:xfrm>
+          <a:prstGeom xmlns:a="http://schemas.openxmlformats.org/drawingml/2006/main" prst="rect">
+            <a:avLst/>
+          </a:prstGeom>
+          <a:noFill xmlns:a="http://schemas.openxmlformats.org/drawingml/2006/main"/>
+          <a:ln xmlns:a="http://schemas.openxmlformats.org/drawingml/2006/main" w="0">
+            <a:noFill/>
+            <a:prstDash val="solid"/>
+          </a:ln>
+        </p:spPr>
+        <p:txBody>
+          <a:bodyPr xmlns:a="http://schemas.openxmlformats.org/drawingml/2006/main"/>
+          <a:lstStyle xmlns:a="http://schemas.openxmlformats.org/drawingml/2006/main"/>
+          <a:p xmlns:a="http://schemas.openxmlformats.org/drawingml/2006/main">
+            <a:pPr>
+              <a:defRPr sz="1650" b="1">
+                <a:solidFill>
+                  <a:srgbClr val="A8493B"/>
+                </a:solidFill>
+              </a:defRPr>
+            </a:pPr>
+            <a:r>
+              <a:rPr sz="1650" b="1">
+                <a:solidFill>
+                  <a:srgbClr val="A8493B"/>
+                </a:solidFill>
+              </a:rPr>
+              <a:t>요청이 너무 커요</a:t>
+            </a:r>
+          </a:p>
+        </p:txBody>
+      </p:sp>
+      <p:sp>
+        <p:nvSpPr>
+          <p:cNvPr id="6" name="">
+            <a:extLst xmlns:a="http://schemas.openxmlformats.org/drawingml/2006/main">
+              <a:ext uri="{FF2B5EF4-FFF2-40B4-BE49-F238E27FC236}">
+                <a16:creationId xmlns:a16="http://schemas.microsoft.com/office/drawing/2014/main" id="{85182217-6106-47BF-A56F-A38C14DB10FD}"/>
+              </a:ext>
+            </a:extLst>
+          </p:cNvPr>
+          <p:cNvSpPr>
+            <a:spLocks xmlns:a="http://schemas.openxmlformats.org/drawingml/2006/main" noGrp="1"/>
+          </p:cNvSpPr>
+          <p:nvPr/>
+        </p:nvSpPr>
+        <p:spPr>
+          <a:xfrm xmlns:a="http://schemas.openxmlformats.org/drawingml/2006/main">
+            <a:off x="4000500" y="1495425"/>
+            <a:ext cx="6953250" cy="619125"/>
+          </a:xfrm>
+          <a:prstGeom xmlns:a="http://schemas.openxmlformats.org/drawingml/2006/main" prst="rect">
+            <a:avLst/>
+          </a:prstGeom>
+          <a:noFill xmlns:a="http://schemas.openxmlformats.org/drawingml/2006/main"/>
+          <a:ln xmlns:a="http://schemas.openxmlformats.org/drawingml/2006/main" w="0">
+            <a:noFill/>
+            <a:prstDash val="solid"/>
+          </a:ln>
+        </p:spPr>
+        <p:txBody>
+          <a:bodyPr xmlns:a="http://schemas.openxmlformats.org/drawingml/2006/main"/>
+          <a:lstStyle xmlns:a="http://schemas.openxmlformats.org/drawingml/2006/main"/>
+          <a:p xmlns:a="http://schemas.openxmlformats.org/drawingml/2006/main">
+            <a:pPr>
+              <a:defRPr sz="1575">
+                <a:solidFill>
+                  <a:srgbClr val="182235"/>
+                </a:solidFill>
+              </a:defRPr>
+            </a:pPr>
+            <a:r>
+              <a:rPr sz="1575">
+                <a:solidFill>
+                  <a:srgbClr val="182235"/>
+                </a:solidFill>
+              </a:rPr>
+              <a:t>하루에 확인 가능한 기능 한 묶음으로 줄입니다.</a:t>
+            </a:r>
+          </a:p>
+        </p:txBody>
+      </p:sp>
+      <p:sp>
+        <p:nvSpPr>
+          <p:cNvPr id="7" name="">
+            <a:extLst xmlns:a="http://schemas.openxmlformats.org/drawingml/2006/main">
+              <a:ext uri="{FF2B5EF4-FFF2-40B4-BE49-F238E27FC236}">
+                <a16:creationId xmlns:a16="http://schemas.microsoft.com/office/drawing/2014/main" id="{C9E29B65-25BC-4079-A083-F501ABA371B9}"/>
+              </a:ext>
+            </a:extLst>
+          </p:cNvPr>
+          <p:cNvSpPr>
+            <a:spLocks xmlns:a="http://schemas.openxmlformats.org/drawingml/2006/main" noGrp="1"/>
+          </p:cNvSpPr>
+          <p:nvPr/>
+        </p:nvSpPr>
+        <p:spPr>
+          <a:xfrm xmlns:a="http://schemas.openxmlformats.org/drawingml/2006/main">
+            <a:off x="723900" y="2762250"/>
+            <a:ext cx="10744200" cy="1123950"/>
+          </a:xfrm>
+          <a:prstGeom xmlns:a="http://schemas.openxmlformats.org/drawingml/2006/main" prst="roundRect">
+            <a:avLst>
+              <a:gd name="adj" fmla="val 10169"/>
+            </a:avLst>
+          </a:prstGeom>
+          <a:solidFill xmlns:a="http://schemas.openxmlformats.org/drawingml/2006/main">
+            <a:srgbClr val="EAF8F3"/>
+          </a:solidFill>
+          <a:ln xmlns:a="http://schemas.openxmlformats.org/drawingml/2006/main" w="0">
+            <a:noFill/>
+            <a:prstDash val="solid"/>
+          </a:ln>
+        </p:spPr>
+      </p:sp>
+      <p:sp>
+        <p:nvSpPr>
+          <p:cNvPr id="8" name="">
+            <a:extLst xmlns:a="http://schemas.openxmlformats.org/drawingml/2006/main">
+              <a:ext uri="{FF2B5EF4-FFF2-40B4-BE49-F238E27FC236}">
+                <a16:creationId xmlns:a16="http://schemas.microsoft.com/office/drawing/2014/main" id="{11D82E88-A6C0-4133-9D75-19C4DC66420C}"/>
+              </a:ext>
+            </a:extLst>
+          </p:cNvPr>
+          <p:cNvSpPr>
+            <a:spLocks xmlns:a="http://schemas.openxmlformats.org/drawingml/2006/main" noGrp="1"/>
+          </p:cNvSpPr>
+          <p:nvPr/>
+        </p:nvSpPr>
+        <p:spPr>
+          <a:xfrm xmlns:a="http://schemas.openxmlformats.org/drawingml/2006/main">
+            <a:off x="1000125" y="2990850"/>
+            <a:ext cx="2857500" cy="361950"/>
+          </a:xfrm>
+          <a:prstGeom xmlns:a="http://schemas.openxmlformats.org/drawingml/2006/main" prst="rect">
+            <a:avLst/>
+          </a:prstGeom>
+          <a:noFill xmlns:a="http://schemas.openxmlformats.org/drawingml/2006/main"/>
+          <a:ln xmlns:a="http://schemas.openxmlformats.org/drawingml/2006/main" w="0">
+            <a:noFill/>
+            <a:prstDash val="solid"/>
+          </a:ln>
+        </p:spPr>
+        <p:txBody>
+          <a:bodyPr xmlns:a="http://schemas.openxmlformats.org/drawingml/2006/main"/>
+          <a:lstStyle xmlns:a="http://schemas.openxmlformats.org/drawingml/2006/main"/>
+          <a:p xmlns:a="http://schemas.openxmlformats.org/drawingml/2006/main">
+            <a:pPr>
+              <a:defRPr sz="1650" b="1">
+                <a:solidFill>
+                  <a:srgbClr val="26755F"/>
+                </a:solidFill>
+              </a:defRPr>
+            </a:pPr>
+            <a:r>
+              <a:rPr sz="1650" b="1">
+                <a:solidFill>
+                  <a:srgbClr val="26755F"/>
+                </a:solidFill>
+              </a:rPr>
+              <a:t>기존 기능이 사라졌어요</a:t>
+            </a:r>
+          </a:p>
+        </p:txBody>
+      </p:sp>
+      <p:sp>
+        <p:nvSpPr>
+          <p:cNvPr id="9" name="">
+            <a:extLst xmlns:a="http://schemas.openxmlformats.org/drawingml/2006/main">
+              <a:ext uri="{FF2B5EF4-FFF2-40B4-BE49-F238E27FC236}">
+                <a16:creationId xmlns:a16="http://schemas.microsoft.com/office/drawing/2014/main" id="{05437C31-DD81-402B-9DD1-347D1156EFC7}"/>
+              </a:ext>
+            </a:extLst>
+          </p:cNvPr>
+          <p:cNvSpPr>
+            <a:spLocks xmlns:a="http://schemas.openxmlformats.org/drawingml/2006/main" noGrp="1"/>
+          </p:cNvSpPr>
+          <p:nvPr/>
+        </p:nvSpPr>
+        <p:spPr>
+          <a:xfrm xmlns:a="http://schemas.openxmlformats.org/drawingml/2006/main">
+            <a:off x="4000500" y="2924175"/>
+            <a:ext cx="6953250" cy="619125"/>
+          </a:xfrm>
+          <a:prstGeom xmlns:a="http://schemas.openxmlformats.org/drawingml/2006/main" prst="rect">
+            <a:avLst/>
+          </a:prstGeom>
+          <a:noFill xmlns:a="http://schemas.openxmlformats.org/drawingml/2006/main"/>
+          <a:ln xmlns:a="http://schemas.openxmlformats.org/drawingml/2006/main" w="0">
+            <a:noFill/>
+            <a:prstDash val="solid"/>
+          </a:ln>
+        </p:spPr>
+        <p:txBody>
+          <a:bodyPr xmlns:a="http://schemas.openxmlformats.org/drawingml/2006/main"/>
+          <a:lstStyle xmlns:a="http://schemas.openxmlformats.org/drawingml/2006/main"/>
+          <a:p xmlns:a="http://schemas.openxmlformats.org/drawingml/2006/main">
+            <a:pPr>
+              <a:defRPr sz="1575">
+                <a:solidFill>
+                  <a:srgbClr val="182235"/>
+                </a:solidFill>
+              </a:defRPr>
+            </a:pPr>
+            <a:r>
+              <a:rPr sz="1575">
+                <a:solidFill>
+                  <a:srgbClr val="182235"/>
+                </a:solidFill>
+              </a:rPr>
+              <a:t>유지할 화면과 기능을 요청문에 명시합니다.</a:t>
+            </a:r>
+          </a:p>
+        </p:txBody>
+      </p:sp>
+      <p:sp>
+        <p:nvSpPr>
+          <p:cNvPr id="10" name="">
+            <a:extLst xmlns:a="http://schemas.openxmlformats.org/drawingml/2006/main">
+              <a:ext uri="{FF2B5EF4-FFF2-40B4-BE49-F238E27FC236}">
+                <a16:creationId xmlns:a16="http://schemas.microsoft.com/office/drawing/2014/main" id="{9ADBB1D7-9B86-4FDD-BCC5-F0C12C6917B9}"/>
+              </a:ext>
+            </a:extLst>
+          </p:cNvPr>
+          <p:cNvSpPr>
+            <a:spLocks xmlns:a="http://schemas.openxmlformats.org/drawingml/2006/main" noGrp="1"/>
+          </p:cNvSpPr>
+          <p:nvPr/>
+        </p:nvSpPr>
+        <p:spPr>
+          <a:xfrm xmlns:a="http://schemas.openxmlformats.org/drawingml/2006/main">
+            <a:off x="723900" y="4191000"/>
+            <a:ext cx="10744200" cy="1123950"/>
+          </a:xfrm>
+          <a:prstGeom xmlns:a="http://schemas.openxmlformats.org/drawingml/2006/main" prst="roundRect">
+            <a:avLst>
+              <a:gd name="adj" fmla="val 10169"/>
+            </a:avLst>
+          </a:prstGeom>
+          <a:solidFill xmlns:a="http://schemas.openxmlformats.org/drawingml/2006/main">
+            <a:srgbClr val="FFF0ED"/>
+          </a:solidFill>
+          <a:ln xmlns:a="http://schemas.openxmlformats.org/drawingml/2006/main" w="0">
+            <a:noFill/>
+            <a:prstDash val="solid"/>
+          </a:ln>
+        </p:spPr>
+      </p:sp>
+      <p:sp>
+        <p:nvSpPr>
+          <p:cNvPr id="11" name="">
+            <a:extLst xmlns:a="http://schemas.openxmlformats.org/drawingml/2006/main">
+              <a:ext uri="{FF2B5EF4-FFF2-40B4-BE49-F238E27FC236}">
+                <a16:creationId xmlns:a16="http://schemas.microsoft.com/office/drawing/2014/main" id="{285E6C80-9D2D-4E12-8BC9-C42C3A53D35D}"/>
+              </a:ext>
+            </a:extLst>
+          </p:cNvPr>
+          <p:cNvSpPr>
+            <a:spLocks xmlns:a="http://schemas.openxmlformats.org/drawingml/2006/main" noGrp="1"/>
+          </p:cNvSpPr>
+          <p:nvPr/>
+        </p:nvSpPr>
+        <p:spPr>
+          <a:xfrm xmlns:a="http://schemas.openxmlformats.org/drawingml/2006/main">
+            <a:off x="1000125" y="4419600"/>
+            <a:ext cx="2857500" cy="361950"/>
+          </a:xfrm>
+          <a:prstGeom xmlns:a="http://schemas.openxmlformats.org/drawingml/2006/main" prst="rect">
+            <a:avLst/>
+          </a:prstGeom>
+          <a:noFill xmlns:a="http://schemas.openxmlformats.org/drawingml/2006/main"/>
+          <a:ln xmlns:a="http://schemas.openxmlformats.org/drawingml/2006/main" w="0">
+            <a:noFill/>
+            <a:prstDash val="solid"/>
+          </a:ln>
+        </p:spPr>
+        <p:txBody>
+          <a:bodyPr xmlns:a="http://schemas.openxmlformats.org/drawingml/2006/main"/>
+          <a:lstStyle xmlns:a="http://schemas.openxmlformats.org/drawingml/2006/main"/>
+          <a:p xmlns:a="http://schemas.openxmlformats.org/drawingml/2006/main">
+            <a:pPr>
+              <a:defRPr sz="1650" b="1">
+                <a:solidFill>
+                  <a:srgbClr val="A8493B"/>
+                </a:solidFill>
+              </a:defRPr>
+            </a:pPr>
+            <a:r>
+              <a:rPr sz="1650" b="1">
+                <a:solidFill>
+                  <a:srgbClr val="A8493B"/>
+                </a:solidFill>
+              </a:rPr>
+              <a:t>완료 여부를 모르겠어요</a:t>
+            </a:r>
+          </a:p>
+        </p:txBody>
+      </p:sp>
+      <p:sp>
+        <p:nvSpPr>
+          <p:cNvPr id="12" name="">
+            <a:extLst xmlns:a="http://schemas.openxmlformats.org/drawingml/2006/main">
+              <a:ext uri="{FF2B5EF4-FFF2-40B4-BE49-F238E27FC236}">
+                <a16:creationId xmlns:a16="http://schemas.microsoft.com/office/drawing/2014/main" id="{E8B635C7-9262-429E-9E3D-982D6120CF5C}"/>
+              </a:ext>
+            </a:extLst>
+          </p:cNvPr>
+          <p:cNvSpPr>
+            <a:spLocks xmlns:a="http://schemas.openxmlformats.org/drawingml/2006/main" noGrp="1"/>
+          </p:cNvSpPr>
+          <p:nvPr/>
+        </p:nvSpPr>
+        <p:spPr>
+          <a:xfrm xmlns:a="http://schemas.openxmlformats.org/drawingml/2006/main">
+            <a:off x="4000500" y="4352925"/>
+            <a:ext cx="6953250" cy="619125"/>
+          </a:xfrm>
+          <a:prstGeom xmlns:a="http://schemas.openxmlformats.org/drawingml/2006/main" prst="rect">
+            <a:avLst/>
+          </a:prstGeom>
+          <a:noFill xmlns:a="http://schemas.openxmlformats.org/drawingml/2006/main"/>
+          <a:ln xmlns:a="http://schemas.openxmlformats.org/drawingml/2006/main" w="0">
+            <a:noFill/>
+            <a:prstDash val="solid"/>
+          </a:ln>
+        </p:spPr>
+        <p:txBody>
+          <a:bodyPr xmlns:a="http://schemas.openxmlformats.org/drawingml/2006/main"/>
+          <a:lstStyle xmlns:a="http://schemas.openxmlformats.org/drawingml/2006/main"/>
+          <a:p xmlns:a="http://schemas.openxmlformats.org/drawingml/2006/main">
+            <a:pPr>
+              <a:defRPr sz="1575">
+                <a:solidFill>
+                  <a:srgbClr val="182235"/>
+                </a:solidFill>
+              </a:defRPr>
+            </a:pPr>
+            <a:r>
+              <a:rPr sz="1575">
+                <a:solidFill>
+                  <a:srgbClr val="182235"/>
+                </a:solidFill>
+              </a:rPr>
+              <a:t>명령과 화면 테스트 결과를 보고하도록 요청합니다.</a:t>
+            </a:r>
+          </a:p>
+        </p:txBody>
+      </p:sp>
+    </p:spTree>
+    <p:extLst>
+      <p:ext uri="{BB962C8B-B14F-4D97-AF65-F5344CB8AC3E}">
+        <p14:creationId xmlns:p14="http://schemas.microsoft.com/office/powerpoint/2010/main" val="884012236"/>
+      </p:ext>
+    </p:extLst>
+  </p:cSld>
+</p:sld>
+</file>
+
+<file path=ppt/slides/slide13.xml><?xml version="1.0" encoding="utf-8"?>
+<p:sld xmlns:p="http://schemas.openxmlformats.org/presentationml/2006/main">
+  <p:cSld>
+    <p:bg>
+      <p:bgPr>
+        <a:solidFill xmlns:a="http://schemas.openxmlformats.org/drawingml/2006/main">
+          <a:srgbClr val="FFFCF8"/>
+        </a:solidFill>
+      </p:bgPr>
+    </p:bg>
+    <p:spTree>
+      <p:nvGrpSpPr>
+        <p:cNvPr id="1" name=""/>
+        <p:cNvGrpSpPr/>
+        <p:nvPr/>
+      </p:nvGrpSpPr>
+      <p:grpSpPr>
+        <a:xfrm xmlns:a="http://schemas.openxmlformats.org/drawingml/2006/main"/>
+      </p:grpSpPr>
+      <p:sp>
+        <p:nvSpPr>
+          <p:cNvPr id="13" name="">
+            <a:extLst xmlns:a="http://schemas.openxmlformats.org/drawingml/2006/main">
+              <a:ext uri="{FF2B5EF4-FFF2-40B4-BE49-F238E27FC236}">
+                <a16:creationId xmlns:a16="http://schemas.microsoft.com/office/drawing/2014/main" id="{6C14FEC3-BE79-4259-A991-3B6ED8810A92}"/>
+              </a:ext>
+            </a:extLst>
+          </p:cNvPr>
+          <p:cNvSpPr>
+            <a:spLocks xmlns:a="http://schemas.openxmlformats.org/drawingml/2006/main" noGrp="1"/>
+          </p:cNvSpPr>
+          <p:nvPr/>
+        </p:nvSpPr>
+        <p:spPr>
+          <a:xfrm xmlns:a="http://schemas.openxmlformats.org/drawingml/2006/main">
+            <a:off x="0" y="0"/>
+            <a:ext cx="171450" cy="6858000"/>
+          </a:xfrm>
+          <a:prstGeom xmlns:a="http://schemas.openxmlformats.org/drawingml/2006/main" prst="rect">
+            <a:avLst/>
+          </a:prstGeom>
+          <a:solidFill xmlns:a="http://schemas.openxmlformats.org/drawingml/2006/main">
+            <a:srgbClr val="6657E8"/>
+          </a:solidFill>
+          <a:ln xmlns:a="http://schemas.openxmlformats.org/drawingml/2006/main" w="0">
+            <a:noFill/>
+            <a:prstDash val="solid"/>
+          </a:ln>
+        </p:spPr>
+      </p:sp>
+      <p:sp>
+        <p:nvSpPr>
+          <p:cNvPr id="2" name="">
+            <a:extLst xmlns:a="http://schemas.openxmlformats.org/drawingml/2006/main">
+              <a:ext uri="{FF2B5EF4-FFF2-40B4-BE49-F238E27FC236}">
+                <a16:creationId xmlns:a16="http://schemas.microsoft.com/office/drawing/2014/main" id="{91256225-A61D-4F6F-B6B2-F94EFC2E2899}"/>
+              </a:ext>
+            </a:extLst>
+          </p:cNvPr>
+          <p:cNvSpPr>
+            <a:spLocks xmlns:a="http://schemas.openxmlformats.org/drawingml/2006/main" noGrp="1"/>
+          </p:cNvSpPr>
+          <p:nvPr/>
+        </p:nvSpPr>
+        <p:spPr>
+          <a:xfrm xmlns:a="http://schemas.openxmlformats.org/drawingml/2006/main">
+            <a:off x="647700" y="457200"/>
+            <a:ext cx="10096500" cy="552450"/>
+          </a:xfrm>
+          <a:prstGeom xmlns:a="http://schemas.openxmlformats.org/drawingml/2006/main" prst="rect">
+            <a:avLst/>
+          </a:prstGeom>
+          <a:noFill xmlns:a="http://schemas.openxmlformats.org/drawingml/2006/main"/>
+          <a:ln xmlns:a="http://schemas.openxmlformats.org/drawingml/2006/main" w="0">
+            <a:noFill/>
+            <a:prstDash val="solid"/>
+          </a:ln>
+        </p:spPr>
+        <p:txBody>
+          <a:bodyPr xmlns:a="http://schemas.openxmlformats.org/drawingml/2006/main"/>
+          <a:lstStyle xmlns:a="http://schemas.openxmlformats.org/drawingml/2006/main"/>
+          <a:p xmlns:a="http://schemas.openxmlformats.org/drawingml/2006/main">
+            <a:pPr>
+              <a:defRPr sz="2700" b="1">
+                <a:solidFill>
+                  <a:srgbClr val="182235"/>
+                </a:solidFill>
+              </a:defRPr>
+            </a:pPr>
+            <a:r>
+              <a:rPr sz="2700" b="1">
+                <a:solidFill>
+                  <a:srgbClr val="182235"/>
+                </a:solidFill>
+              </a:rPr>
+              <a:t>상황에 맞는 Codex 요청문을 골라 쓰세요</a:t>
+            </a:r>
+          </a:p>
+        </p:txBody>
+      </p:sp>
+      <p:sp>
+        <p:nvSpPr>
+          <p:cNvPr id="3" name="">
+            <a:extLst xmlns:a="http://schemas.openxmlformats.org/drawingml/2006/main">
+              <a:ext uri="{FF2B5EF4-FFF2-40B4-BE49-F238E27FC236}">
+                <a16:creationId xmlns:a16="http://schemas.microsoft.com/office/drawing/2014/main" id="{2B578171-4CE6-4CE3-B30A-A4F6F6AF61C1}"/>
+              </a:ext>
+            </a:extLst>
+          </p:cNvPr>
+          <p:cNvSpPr>
+            <a:spLocks xmlns:a="http://schemas.openxmlformats.org/drawingml/2006/main" noGrp="1"/>
+          </p:cNvSpPr>
+          <p:nvPr/>
+        </p:nvSpPr>
+        <p:spPr>
+          <a:xfrm xmlns:a="http://schemas.openxmlformats.org/drawingml/2006/main">
+            <a:off x="666750" y="6419850"/>
+            <a:ext cx="10096500" cy="209550"/>
+          </a:xfrm>
+          <a:prstGeom xmlns:a="http://schemas.openxmlformats.org/drawingml/2006/main" prst="rect">
+            <a:avLst/>
+          </a:prstGeom>
+          <a:noFill xmlns:a="http://schemas.openxmlformats.org/drawingml/2006/main"/>
+          <a:ln xmlns:a="http://schemas.openxmlformats.org/drawingml/2006/main" w="0">
+            <a:noFill/>
+            <a:prstDash val="solid"/>
+          </a:ln>
+        </p:spPr>
+        <p:txBody>
+          <a:bodyPr xmlns:a="http://schemas.openxmlformats.org/drawingml/2006/main"/>
+          <a:lstStyle xmlns:a="http://schemas.openxmlformats.org/drawingml/2006/main"/>
+          <a:p xmlns:a="http://schemas.openxmlformats.org/drawingml/2006/main">
+            <a:pPr>
+              <a:defRPr sz="975">
+                <a:solidFill>
+                  <a:srgbClr val="657083"/>
+                </a:solidFill>
+              </a:defRPr>
+            </a:pPr>
+            <a:r>
+              <a:rPr sz="975">
+                <a:solidFill>
+                  <a:srgbClr val="657083"/>
+                </a:solidFill>
+              </a:rPr>
+              <a:t>EDU 웹개발 교육 플랫폼  ·  13</a:t>
+            </a:r>
+          </a:p>
+        </p:txBody>
+      </p:sp>
+      <p:sp>
+        <p:nvSpPr>
+          <p:cNvPr id="4" name="">
+            <a:extLst xmlns:a="http://schemas.openxmlformats.org/drawingml/2006/main">
+              <a:ext uri="{FF2B5EF4-FFF2-40B4-BE49-F238E27FC236}">
+                <a16:creationId xmlns:a16="http://schemas.microsoft.com/office/drawing/2014/main" id="{32B6011D-BAAE-407D-B7B6-8D7DF27D6949}"/>
+              </a:ext>
+            </a:extLst>
+          </p:cNvPr>
+          <p:cNvSpPr>
+            <a:spLocks xmlns:a="http://schemas.openxmlformats.org/drawingml/2006/main" noGrp="1"/>
+          </p:cNvSpPr>
+          <p:nvPr/>
+        </p:nvSpPr>
+        <p:spPr>
+          <a:xfrm xmlns:a="http://schemas.openxmlformats.org/drawingml/2006/main">
+            <a:off x="742950" y="1381125"/>
+            <a:ext cx="514350" cy="514350"/>
+          </a:xfrm>
+          <a:prstGeom xmlns:a="http://schemas.openxmlformats.org/drawingml/2006/main" prst="roundRect">
+            <a:avLst>
+              <a:gd name="adj" fmla="val 22222"/>
+            </a:avLst>
+          </a:prstGeom>
+          <a:solidFill xmlns:a="http://schemas.openxmlformats.org/drawingml/2006/main">
+            <a:srgbClr val="EEEAFE"/>
+          </a:solidFill>
+          <a:ln xmlns:a="http://schemas.openxmlformats.org/drawingml/2006/main" w="0">
+            <a:noFill/>
+            <a:prstDash val="solid"/>
+          </a:ln>
+        </p:spPr>
+      </p:sp>
+      <p:sp>
+        <p:nvSpPr>
+          <p:cNvPr id="5" name="">
+            <a:extLst xmlns:a="http://schemas.openxmlformats.org/drawingml/2006/main">
+              <a:ext uri="{FF2B5EF4-FFF2-40B4-BE49-F238E27FC236}">
+                <a16:creationId xmlns:a16="http://schemas.microsoft.com/office/drawing/2014/main" id="{44EAF31A-017B-4F22-BA42-4A6933CEF902}"/>
+              </a:ext>
+            </a:extLst>
+          </p:cNvPr>
+          <p:cNvSpPr>
+            <a:spLocks xmlns:a="http://schemas.openxmlformats.org/drawingml/2006/main" noGrp="1"/>
+          </p:cNvSpPr>
+          <p:nvPr/>
+        </p:nvSpPr>
+        <p:spPr>
+          <a:xfrm xmlns:a="http://schemas.openxmlformats.org/drawingml/2006/main">
+            <a:off x="742950" y="1476375"/>
+            <a:ext cx="514350" cy="304800"/>
+          </a:xfrm>
+          <a:prstGeom xmlns:a="http://schemas.openxmlformats.org/drawingml/2006/main" prst="rect">
+            <a:avLst/>
+          </a:prstGeom>
+          <a:noFill xmlns:a="http://schemas.openxmlformats.org/drawingml/2006/main"/>
+          <a:ln xmlns:a="http://schemas.openxmlformats.org/drawingml/2006/main" w="0">
+            <a:noFill/>
+            <a:prstDash val="solid"/>
+          </a:ln>
+        </p:spPr>
+        <p:txBody>
+          <a:bodyPr xmlns:a="http://schemas.openxmlformats.org/drawingml/2006/main"/>
+          <a:lstStyle xmlns:a="http://schemas.openxmlformats.org/drawingml/2006/main"/>
+          <a:p xmlns:a="http://schemas.openxmlformats.org/drawingml/2006/main">
+            <a:pPr algn="ctr">
+              <a:defRPr sz="1500" b="1">
+                <a:solidFill>
+                  <a:srgbClr val="6657E8"/>
+                </a:solidFill>
+              </a:defRPr>
+            </a:pPr>
+            <a:r>
+              <a:rPr sz="1500" b="1">
+                <a:solidFill>
+                  <a:srgbClr val="6657E8"/>
+                </a:solidFill>
+              </a:rPr>
+              <a:t>1</a:t>
+            </a:r>
+          </a:p>
+        </p:txBody>
+      </p:sp>
+      <p:sp>
+        <p:nvSpPr>
+          <p:cNvPr id="6" name="">
+            <a:extLst xmlns:a="http://schemas.openxmlformats.org/drawingml/2006/main">
+              <a:ext uri="{FF2B5EF4-FFF2-40B4-BE49-F238E27FC236}">
+                <a16:creationId xmlns:a16="http://schemas.microsoft.com/office/drawing/2014/main" id="{9506267B-AC57-4CB2-9BF9-41B4525B4D34}"/>
+              </a:ext>
+            </a:extLst>
+          </p:cNvPr>
+          <p:cNvSpPr>
+            <a:spLocks xmlns:a="http://schemas.openxmlformats.org/drawingml/2006/main" noGrp="1"/>
+          </p:cNvSpPr>
+          <p:nvPr/>
+        </p:nvSpPr>
+        <p:spPr>
+          <a:xfrm xmlns:a="http://schemas.openxmlformats.org/drawingml/2006/main">
+            <a:off x="1485900" y="1419225"/>
+            <a:ext cx="9239250" cy="619125"/>
+          </a:xfrm>
+          <a:prstGeom xmlns:a="http://schemas.openxmlformats.org/drawingml/2006/main" prst="rect">
+            <a:avLst/>
+          </a:prstGeom>
+          <a:noFill xmlns:a="http://schemas.openxmlformats.org/drawingml/2006/main"/>
+          <a:ln xmlns:a="http://schemas.openxmlformats.org/drawingml/2006/main" w="0">
+            <a:noFill/>
+            <a:prstDash val="solid"/>
+          </a:ln>
+        </p:spPr>
+        <p:txBody>
+          <a:bodyPr xmlns:a="http://schemas.openxmlformats.org/drawingml/2006/main"/>
+          <a:lstStyle xmlns:a="http://schemas.openxmlformats.org/drawingml/2006/main"/>
+          <a:p xmlns:a="http://schemas.openxmlformats.org/drawingml/2006/main">
+            <a:pPr>
+              <a:defRPr sz="1800">
+                <a:solidFill>
+                  <a:srgbClr val="182235"/>
+                </a:solidFill>
+              </a:defRPr>
+            </a:pPr>
+            <a:r>
+              <a:rPr sz="1800">
+                <a:solidFill>
+                  <a:srgbClr val="182235"/>
+                </a:solidFill>
+              </a:rPr>
+              <a:t>내 요청에서 모호한 표현을 찾아 질문 없이 실행 가능한 문장으로 고쳐줘.</a:t>
+            </a:r>
+          </a:p>
+        </p:txBody>
+      </p:sp>
+      <p:sp>
+        <p:nvSpPr>
+          <p:cNvPr id="7" name="">
+            <a:extLst xmlns:a="http://schemas.openxmlformats.org/drawingml/2006/main">
+              <a:ext uri="{FF2B5EF4-FFF2-40B4-BE49-F238E27FC236}">
+                <a16:creationId xmlns:a16="http://schemas.microsoft.com/office/drawing/2014/main" id="{D7D9F32C-2594-4E31-988F-01910002289F}"/>
+              </a:ext>
+            </a:extLst>
+          </p:cNvPr>
+          <p:cNvSpPr>
+            <a:spLocks xmlns:a="http://schemas.openxmlformats.org/drawingml/2006/main" noGrp="1"/>
+          </p:cNvSpPr>
+          <p:nvPr/>
+        </p:nvSpPr>
+        <p:spPr>
+          <a:xfrm xmlns:a="http://schemas.openxmlformats.org/drawingml/2006/main">
+            <a:off x="742950" y="2352675"/>
+            <a:ext cx="514350" cy="514350"/>
+          </a:xfrm>
+          <a:prstGeom xmlns:a="http://schemas.openxmlformats.org/drawingml/2006/main" prst="roundRect">
+            <a:avLst>
+              <a:gd name="adj" fmla="val 22222"/>
+            </a:avLst>
+          </a:prstGeom>
+          <a:solidFill xmlns:a="http://schemas.openxmlformats.org/drawingml/2006/main">
+            <a:srgbClr val="EAF8F3"/>
+          </a:solidFill>
+          <a:ln xmlns:a="http://schemas.openxmlformats.org/drawingml/2006/main" w="0">
+            <a:noFill/>
+            <a:prstDash val="solid"/>
+          </a:ln>
+        </p:spPr>
+      </p:sp>
+      <p:sp>
+        <p:nvSpPr>
+          <p:cNvPr id="8" name="">
+            <a:extLst xmlns:a="http://schemas.openxmlformats.org/drawingml/2006/main">
+              <a:ext uri="{FF2B5EF4-FFF2-40B4-BE49-F238E27FC236}">
+                <a16:creationId xmlns:a16="http://schemas.microsoft.com/office/drawing/2014/main" id="{0F1F9C61-8075-4EA3-A4E8-913326CC9AF8}"/>
+              </a:ext>
+            </a:extLst>
+          </p:cNvPr>
+          <p:cNvSpPr>
+            <a:spLocks xmlns:a="http://schemas.openxmlformats.org/drawingml/2006/main" noGrp="1"/>
+          </p:cNvSpPr>
+          <p:nvPr/>
+        </p:nvSpPr>
+        <p:spPr>
+          <a:xfrm xmlns:a="http://schemas.openxmlformats.org/drawingml/2006/main">
+            <a:off x="742950" y="2447925"/>
+            <a:ext cx="514350" cy="304800"/>
+          </a:xfrm>
+          <a:prstGeom xmlns:a="http://schemas.openxmlformats.org/drawingml/2006/main" prst="rect">
+            <a:avLst/>
+          </a:prstGeom>
+          <a:noFill xmlns:a="http://schemas.openxmlformats.org/drawingml/2006/main"/>
+          <a:ln xmlns:a="http://schemas.openxmlformats.org/drawingml/2006/main" w="0">
+            <a:noFill/>
+            <a:prstDash val="solid"/>
+          </a:ln>
+        </p:spPr>
+        <p:txBody>
+          <a:bodyPr xmlns:a="http://schemas.openxmlformats.org/drawingml/2006/main"/>
+          <a:lstStyle xmlns:a="http://schemas.openxmlformats.org/drawingml/2006/main"/>
+          <a:p xmlns:a="http://schemas.openxmlformats.org/drawingml/2006/main">
+            <a:pPr algn="ctr">
+              <a:defRPr sz="1500" b="1">
+                <a:solidFill>
+                  <a:srgbClr val="6657E8"/>
+                </a:solidFill>
+              </a:defRPr>
+            </a:pPr>
+            <a:r>
+              <a:rPr sz="1500" b="1">
+                <a:solidFill>
+                  <a:srgbClr val="6657E8"/>
+                </a:solidFill>
+              </a:rPr>
+              <a:t>2</a:t>
+            </a:r>
+          </a:p>
+        </p:txBody>
+      </p:sp>
+      <p:sp>
+        <p:nvSpPr>
+          <p:cNvPr id="9" name="">
+            <a:extLst xmlns:a="http://schemas.openxmlformats.org/drawingml/2006/main">
+              <a:ext uri="{FF2B5EF4-FFF2-40B4-BE49-F238E27FC236}">
+                <a16:creationId xmlns:a16="http://schemas.microsoft.com/office/drawing/2014/main" id="{72A56BDE-9FE9-4DCE-88D5-1E4CC4416FDD}"/>
+              </a:ext>
+            </a:extLst>
+          </p:cNvPr>
+          <p:cNvSpPr>
+            <a:spLocks xmlns:a="http://schemas.openxmlformats.org/drawingml/2006/main" noGrp="1"/>
+          </p:cNvSpPr>
+          <p:nvPr/>
+        </p:nvSpPr>
+        <p:spPr>
+          <a:xfrm xmlns:a="http://schemas.openxmlformats.org/drawingml/2006/main">
+            <a:off x="1485900" y="2390775"/>
+            <a:ext cx="9239250" cy="619125"/>
+          </a:xfrm>
+          <a:prstGeom xmlns:a="http://schemas.openxmlformats.org/drawingml/2006/main" prst="rect">
+            <a:avLst/>
+          </a:prstGeom>
+          <a:noFill xmlns:a="http://schemas.openxmlformats.org/drawingml/2006/main"/>
+          <a:ln xmlns:a="http://schemas.openxmlformats.org/drawingml/2006/main" w="0">
+            <a:noFill/>
+            <a:prstDash val="solid"/>
+          </a:ln>
+        </p:spPr>
+        <p:txBody>
+          <a:bodyPr xmlns:a="http://schemas.openxmlformats.org/drawingml/2006/main"/>
+          <a:lstStyle xmlns:a="http://schemas.openxmlformats.org/drawingml/2006/main"/>
+          <a:p xmlns:a="http://schemas.openxmlformats.org/drawingml/2006/main">
+            <a:pPr>
+              <a:defRPr sz="1800">
+                <a:solidFill>
+                  <a:srgbClr val="182235"/>
+                </a:solidFill>
+              </a:defRPr>
+            </a:pPr>
+            <a:r>
+              <a:rPr sz="1800">
+                <a:solidFill>
+                  <a:srgbClr val="182235"/>
+                </a:solidFill>
+              </a:rPr>
+              <a:t>기존 기능 유지, 수정 파일 보고, 빌드 확인을 포함한 요청서로 정리해줘.</a:t>
+            </a:r>
+          </a:p>
+        </p:txBody>
+      </p:sp>
+      <p:sp>
+        <p:nvSpPr>
+          <p:cNvPr id="10" name="">
+            <a:extLst xmlns:a="http://schemas.openxmlformats.org/drawingml/2006/main">
+              <a:ext uri="{FF2B5EF4-FFF2-40B4-BE49-F238E27FC236}">
+                <a16:creationId xmlns:a16="http://schemas.microsoft.com/office/drawing/2014/main" id="{9767CEB0-A16E-48EE-83B5-535C6E8D9F05}"/>
+              </a:ext>
+            </a:extLst>
+          </p:cNvPr>
+          <p:cNvSpPr>
+            <a:spLocks xmlns:a="http://schemas.openxmlformats.org/drawingml/2006/main" noGrp="1"/>
+          </p:cNvSpPr>
+          <p:nvPr/>
+        </p:nvSpPr>
+        <p:spPr>
+          <a:xfrm xmlns:a="http://schemas.openxmlformats.org/drawingml/2006/main">
+            <a:off x="742950" y="3324225"/>
+            <a:ext cx="514350" cy="514350"/>
+          </a:xfrm>
+          <a:prstGeom xmlns:a="http://schemas.openxmlformats.org/drawingml/2006/main" prst="roundRect">
+            <a:avLst>
+              <a:gd name="adj" fmla="val 22222"/>
+            </a:avLst>
+          </a:prstGeom>
+          <a:solidFill xmlns:a="http://schemas.openxmlformats.org/drawingml/2006/main">
+            <a:srgbClr val="EEEAFE"/>
+          </a:solidFill>
+          <a:ln xmlns:a="http://schemas.openxmlformats.org/drawingml/2006/main" w="0">
+            <a:noFill/>
+            <a:prstDash val="solid"/>
+          </a:ln>
+        </p:spPr>
+      </p:sp>
+      <p:sp>
+        <p:nvSpPr>
+          <p:cNvPr id="11" name="">
+            <a:extLst xmlns:a="http://schemas.openxmlformats.org/drawingml/2006/main">
+              <a:ext uri="{FF2B5EF4-FFF2-40B4-BE49-F238E27FC236}">
+                <a16:creationId xmlns:a16="http://schemas.microsoft.com/office/drawing/2014/main" id="{890FFBA3-3A85-4AFF-B521-BDC74F668E8E}"/>
+              </a:ext>
+            </a:extLst>
+          </p:cNvPr>
+          <p:cNvSpPr>
+            <a:spLocks xmlns:a="http://schemas.openxmlformats.org/drawingml/2006/main" noGrp="1"/>
+          </p:cNvSpPr>
+          <p:nvPr/>
+        </p:nvSpPr>
+        <p:spPr>
+          <a:xfrm xmlns:a="http://schemas.openxmlformats.org/drawingml/2006/main">
+            <a:off x="742950" y="3419475"/>
+            <a:ext cx="514350" cy="304800"/>
+          </a:xfrm>
+          <a:prstGeom xmlns:a="http://schemas.openxmlformats.org/drawingml/2006/main" prst="rect">
+            <a:avLst/>
+          </a:prstGeom>
+          <a:noFill xmlns:a="http://schemas.openxmlformats.org/drawingml/2006/main"/>
+          <a:ln xmlns:a="http://schemas.openxmlformats.org/drawingml/2006/main" w="0">
+            <a:noFill/>
+            <a:prstDash val="solid"/>
+          </a:ln>
+        </p:spPr>
+        <p:txBody>
+          <a:bodyPr xmlns:a="http://schemas.openxmlformats.org/drawingml/2006/main"/>
+          <a:lstStyle xmlns:a="http://schemas.openxmlformats.org/drawingml/2006/main"/>
+          <a:p xmlns:a="http://schemas.openxmlformats.org/drawingml/2006/main">
+            <a:pPr algn="ctr">
+              <a:defRPr sz="1500" b="1">
+                <a:solidFill>
+                  <a:srgbClr val="6657E8"/>
+                </a:solidFill>
+              </a:defRPr>
+            </a:pPr>
+            <a:r>
+              <a:rPr sz="1500" b="1">
+                <a:solidFill>
+                  <a:srgbClr val="6657E8"/>
+                </a:solidFill>
+              </a:rPr>
+              <a:t>3</a:t>
+            </a:r>
+          </a:p>
+        </p:txBody>
+      </p:sp>
+      <p:sp>
+        <p:nvSpPr>
+          <p:cNvPr id="12" name="">
+            <a:extLst xmlns:a="http://schemas.openxmlformats.org/drawingml/2006/main">
+              <a:ext uri="{FF2B5EF4-FFF2-40B4-BE49-F238E27FC236}">
+                <a16:creationId xmlns:a16="http://schemas.microsoft.com/office/drawing/2014/main" id="{414393EE-FED0-448A-8400-90A55345FC57}"/>
+              </a:ext>
+            </a:extLst>
+          </p:cNvPr>
+          <p:cNvSpPr>
+            <a:spLocks xmlns:a="http://schemas.openxmlformats.org/drawingml/2006/main" noGrp="1"/>
+          </p:cNvSpPr>
+          <p:nvPr/>
+        </p:nvSpPr>
+        <p:spPr>
+          <a:xfrm xmlns:a="http://schemas.openxmlformats.org/drawingml/2006/main">
+            <a:off x="1485900" y="3362325"/>
+            <a:ext cx="9239250" cy="619125"/>
+          </a:xfrm>
+          <a:prstGeom xmlns:a="http://schemas.openxmlformats.org/drawingml/2006/main" prst="rect">
+            <a:avLst/>
+          </a:prstGeom>
+          <a:noFill xmlns:a="http://schemas.openxmlformats.org/drawingml/2006/main"/>
+          <a:ln xmlns:a="http://schemas.openxmlformats.org/drawingml/2006/main" w="0">
+            <a:noFill/>
+            <a:prstDash val="solid"/>
+          </a:ln>
+        </p:spPr>
+        <p:txBody>
+          <a:bodyPr xmlns:a="http://schemas.openxmlformats.org/drawingml/2006/main"/>
+          <a:lstStyle xmlns:a="http://schemas.openxmlformats.org/drawingml/2006/main"/>
+          <a:p xmlns:a="http://schemas.openxmlformats.org/drawingml/2006/main">
+            <a:pPr>
+              <a:defRPr sz="1800">
+                <a:solidFill>
+                  <a:srgbClr val="182235"/>
+                </a:solidFill>
+              </a:defRPr>
+            </a:pPr>
+            <a:r>
+              <a:rPr sz="1800">
+                <a:solidFill>
+                  <a:srgbClr val="182235"/>
+                </a:solidFill>
+              </a:rPr>
+              <a:t>이 작업을 초보자가 확인할 수 있는 완료 기준 5개로 바꿔줘.</a:t>
+            </a:r>
+          </a:p>
+        </p:txBody>
+      </p:sp>
+    </p:spTree>
+    <p:extLst>
+      <p:ext uri="{BB962C8B-B14F-4D97-AF65-F5344CB8AC3E}">
+        <p14:creationId xmlns:p14="http://schemas.microsoft.com/office/powerpoint/2010/main" val="638010092"/>
+      </p:ext>
+    </p:extLst>
+  </p:cSld>
+</p:sld>
+</file>
+
+<file path=ppt/slides/slide14.xml><?xml version="1.0" encoding="utf-8"?>
+<p:sld xmlns:p="http://schemas.openxmlformats.org/presentationml/2006/main">
+  <p:cSld>
+    <p:bg>
+      <p:bgPr>
+        <a:solidFill xmlns:a="http://schemas.openxmlformats.org/drawingml/2006/main">
+          <a:srgbClr val="FFFCF8"/>
+        </a:solidFill>
+      </p:bgPr>
+    </p:bg>
+    <p:spTree>
+      <p:nvGrpSpPr>
+        <p:cNvPr id="1" name=""/>
+        <p:cNvGrpSpPr/>
+        <p:nvPr/>
+      </p:nvGrpSpPr>
+      <p:grpSpPr>
+        <a:xfrm xmlns:a="http://schemas.openxmlformats.org/drawingml/2006/main"/>
+      </p:grpSpPr>
+      <p:sp>
+        <p:nvSpPr>
+          <p:cNvPr id="7" name="">
+            <a:extLst xmlns:a="http://schemas.openxmlformats.org/drawingml/2006/main">
+              <a:ext uri="{FF2B5EF4-FFF2-40B4-BE49-F238E27FC236}">
+                <a16:creationId xmlns:a16="http://schemas.microsoft.com/office/drawing/2014/main" id="{B6C6C418-E3A6-47CD-BE03-BFF0FFCFE407}"/>
+              </a:ext>
+            </a:extLst>
+          </p:cNvPr>
+          <p:cNvSpPr>
+            <a:spLocks xmlns:a="http://schemas.openxmlformats.org/drawingml/2006/main" noGrp="1"/>
+          </p:cNvSpPr>
+          <p:nvPr/>
+        </p:nvSpPr>
+        <p:spPr>
+          <a:xfrm xmlns:a="http://schemas.openxmlformats.org/drawingml/2006/main">
+            <a:off x="0" y="0"/>
+            <a:ext cx="171450" cy="6858000"/>
+          </a:xfrm>
+          <a:prstGeom xmlns:a="http://schemas.openxmlformats.org/drawingml/2006/main" prst="rect">
+            <a:avLst/>
+          </a:prstGeom>
+          <a:solidFill xmlns:a="http://schemas.openxmlformats.org/drawingml/2006/main">
+            <a:srgbClr val="6657E8"/>
+          </a:solidFill>
+          <a:ln xmlns:a="http://schemas.openxmlformats.org/drawingml/2006/main" w="0">
+            <a:noFill/>
+            <a:prstDash val="solid"/>
+          </a:ln>
+        </p:spPr>
+      </p:sp>
+      <p:sp>
+        <p:nvSpPr>
+          <p:cNvPr id="2" name="">
+            <a:extLst xmlns:a="http://schemas.openxmlformats.org/drawingml/2006/main">
+              <a:ext uri="{FF2B5EF4-FFF2-40B4-BE49-F238E27FC236}">
+                <a16:creationId xmlns:a16="http://schemas.microsoft.com/office/drawing/2014/main" id="{CF78D998-46A9-434D-B923-620DB5F1C49D}"/>
+              </a:ext>
+            </a:extLst>
+          </p:cNvPr>
+          <p:cNvSpPr>
+            <a:spLocks xmlns:a="http://schemas.openxmlformats.org/drawingml/2006/main" noGrp="1"/>
+          </p:cNvSpPr>
+          <p:nvPr/>
+        </p:nvSpPr>
+        <p:spPr>
+          <a:xfrm xmlns:a="http://schemas.openxmlformats.org/drawingml/2006/main">
+            <a:off x="647700" y="457200"/>
+            <a:ext cx="10096500" cy="552450"/>
+          </a:xfrm>
+          <a:prstGeom xmlns:a="http://schemas.openxmlformats.org/drawingml/2006/main" prst="rect">
+            <a:avLst/>
+          </a:prstGeom>
+          <a:noFill xmlns:a="http://schemas.openxmlformats.org/drawingml/2006/main"/>
+          <a:ln xmlns:a="http://schemas.openxmlformats.org/drawingml/2006/main" w="0">
+            <a:noFill/>
+            <a:prstDash val="solid"/>
+          </a:ln>
+        </p:spPr>
+        <p:txBody>
+          <a:bodyPr xmlns:a="http://schemas.openxmlformats.org/drawingml/2006/main"/>
+          <a:lstStyle xmlns:a="http://schemas.openxmlformats.org/drawingml/2006/main"/>
+          <a:p xmlns:a="http://schemas.openxmlformats.org/drawingml/2006/main">
+            <a:pPr>
+              <a:defRPr sz="2700" b="1">
+                <a:solidFill>
+                  <a:srgbClr val="182235"/>
+                </a:solidFill>
+              </a:defRPr>
+            </a:pPr>
+            <a:r>
+              <a:rPr sz="2700" b="1">
+                <a:solidFill>
+                  <a:srgbClr val="182235"/>
+                </a:solidFill>
+              </a:rPr>
+              <a:t>작은 응용이 내 실력으로 바뀌는 순간입니다</a:t>
+            </a:r>
+          </a:p>
+        </p:txBody>
+      </p:sp>
+      <p:sp>
+        <p:nvSpPr>
+          <p:cNvPr id="3" name="">
+            <a:extLst xmlns:a="http://schemas.openxmlformats.org/drawingml/2006/main">
+              <a:ext uri="{FF2B5EF4-FFF2-40B4-BE49-F238E27FC236}">
+                <a16:creationId xmlns:a16="http://schemas.microsoft.com/office/drawing/2014/main" id="{5D19537F-6271-4B4A-B87D-EF22E435338C}"/>
+              </a:ext>
+            </a:extLst>
+          </p:cNvPr>
+          <p:cNvSpPr>
+            <a:spLocks xmlns:a="http://schemas.openxmlformats.org/drawingml/2006/main" noGrp="1"/>
+          </p:cNvSpPr>
+          <p:nvPr/>
+        </p:nvSpPr>
+        <p:spPr>
+          <a:xfrm xmlns:a="http://schemas.openxmlformats.org/drawingml/2006/main">
+            <a:off x="666750" y="6419850"/>
+            <a:ext cx="10096500" cy="209550"/>
+          </a:xfrm>
+          <a:prstGeom xmlns:a="http://schemas.openxmlformats.org/drawingml/2006/main" prst="rect">
+            <a:avLst/>
+          </a:prstGeom>
+          <a:noFill xmlns:a="http://schemas.openxmlformats.org/drawingml/2006/main"/>
+          <a:ln xmlns:a="http://schemas.openxmlformats.org/drawingml/2006/main" w="0">
+            <a:noFill/>
+            <a:prstDash val="solid"/>
+          </a:ln>
+        </p:spPr>
+        <p:txBody>
+          <a:bodyPr xmlns:a="http://schemas.openxmlformats.org/drawingml/2006/main"/>
+          <a:lstStyle xmlns:a="http://schemas.openxmlformats.org/drawingml/2006/main"/>
+          <a:p xmlns:a="http://schemas.openxmlformats.org/drawingml/2006/main">
+            <a:pPr>
+              <a:defRPr sz="975">
+                <a:solidFill>
+                  <a:srgbClr val="657083"/>
+                </a:solidFill>
+              </a:defRPr>
+            </a:pPr>
+            <a:r>
+              <a:rPr sz="975">
+                <a:solidFill>
+                  <a:srgbClr val="657083"/>
+                </a:solidFill>
+              </a:rPr>
+              <a:t>EDU 웹개발 교육 플랫폼  ·  14</a:t>
+            </a:r>
+          </a:p>
+        </p:txBody>
+      </p:sp>
+      <p:sp>
+        <p:nvSpPr>
+          <p:cNvPr id="4" name="">
+            <a:extLst xmlns:a="http://schemas.openxmlformats.org/drawingml/2006/main">
+              <a:ext uri="{FF2B5EF4-FFF2-40B4-BE49-F238E27FC236}">
+                <a16:creationId xmlns:a16="http://schemas.microsoft.com/office/drawing/2014/main" id="{882671EB-90D1-41B6-AD40-8371F196D949}"/>
+              </a:ext>
+            </a:extLst>
+          </p:cNvPr>
+          <p:cNvSpPr>
+            <a:spLocks xmlns:a="http://schemas.openxmlformats.org/drawingml/2006/main" noGrp="1"/>
+          </p:cNvSpPr>
+          <p:nvPr/>
+        </p:nvSpPr>
+        <p:spPr>
+          <a:xfrm xmlns:a="http://schemas.openxmlformats.org/drawingml/2006/main">
+            <a:off x="685800" y="1524000"/>
+            <a:ext cx="10820400" cy="2381250"/>
+          </a:xfrm>
+          <a:prstGeom xmlns:a="http://schemas.openxmlformats.org/drawingml/2006/main" prst="roundRect">
+            <a:avLst>
+              <a:gd name="adj" fmla="val 4800"/>
+            </a:avLst>
+          </a:prstGeom>
+          <a:solidFill xmlns:a="http://schemas.openxmlformats.org/drawingml/2006/main">
+            <a:srgbClr val="EAF8F3"/>
+          </a:solidFill>
+          <a:ln xmlns:a="http://schemas.openxmlformats.org/drawingml/2006/main" w="0">
+            <a:noFill/>
+            <a:prstDash val="solid"/>
+          </a:ln>
+        </p:spPr>
+      </p:sp>
+      <p:sp>
+        <p:nvSpPr>
+          <p:cNvPr id="5" name="">
+            <a:extLst xmlns:a="http://schemas.openxmlformats.org/drawingml/2006/main">
+              <a:ext uri="{FF2B5EF4-FFF2-40B4-BE49-F238E27FC236}">
+                <a16:creationId xmlns:a16="http://schemas.microsoft.com/office/drawing/2014/main" id="{05EE2F5D-C1B4-4C93-A3BB-4A4C00778CFD}"/>
+              </a:ext>
+            </a:extLst>
+          </p:cNvPr>
+          <p:cNvSpPr>
+            <a:spLocks xmlns:a="http://schemas.openxmlformats.org/drawingml/2006/main" noGrp="1"/>
+          </p:cNvSpPr>
+          <p:nvPr/>
+        </p:nvSpPr>
+        <p:spPr>
+          <a:xfrm xmlns:a="http://schemas.openxmlformats.org/drawingml/2006/main">
+            <a:off x="1123950" y="2076450"/>
+            <a:ext cx="9944100" cy="1238250"/>
+          </a:xfrm>
+          <a:prstGeom xmlns:a="http://schemas.openxmlformats.org/drawingml/2006/main" prst="rect">
+            <a:avLst/>
+          </a:prstGeom>
+          <a:noFill xmlns:a="http://schemas.openxmlformats.org/drawingml/2006/main"/>
+          <a:ln xmlns:a="http://schemas.openxmlformats.org/drawingml/2006/main" w="0">
+            <a:noFill/>
+            <a:prstDash val="solid"/>
+          </a:ln>
+        </p:spPr>
+        <p:txBody>
+          <a:bodyPr xmlns:a="http://schemas.openxmlformats.org/drawingml/2006/main"/>
+          <a:lstStyle xmlns:a="http://schemas.openxmlformats.org/drawingml/2006/main"/>
+          <a:p xmlns:a="http://schemas.openxmlformats.org/drawingml/2006/main">
+            <a:pPr>
+              <a:defRPr sz="2175" b="1">
+                <a:solidFill>
+                  <a:srgbClr val="182235"/>
+                </a:solidFill>
+              </a:defRPr>
+            </a:pPr>
+            <a:r>
+              <a:rPr sz="2175" b="1">
+                <a:solidFill>
+                  <a:srgbClr val="182235"/>
+                </a:solidFill>
+              </a:rPr>
+              <a:t>현재 EDU 홈페이지에서 바꾸고 싶은 기능 하나를 골라 위치·범위·제외·테스트를 포함한 요청서를 작성하세요.</a:t>
+            </a:r>
+          </a:p>
+        </p:txBody>
+      </p:sp>
+      <p:sp>
+        <p:nvSpPr>
+          <p:cNvPr id="6" name="">
+            <a:extLst xmlns:a="http://schemas.openxmlformats.org/drawingml/2006/main">
+              <a:ext uri="{FF2B5EF4-FFF2-40B4-BE49-F238E27FC236}">
+                <a16:creationId xmlns:a16="http://schemas.microsoft.com/office/drawing/2014/main" id="{75246C27-12C2-4121-8678-41A854C429BA}"/>
+              </a:ext>
+            </a:extLst>
+          </p:cNvPr>
+          <p:cNvSpPr>
+            <a:spLocks xmlns:a="http://schemas.openxmlformats.org/drawingml/2006/main" noGrp="1"/>
+          </p:cNvSpPr>
+          <p:nvPr/>
+        </p:nvSpPr>
+        <p:spPr>
+          <a:xfrm xmlns:a="http://schemas.openxmlformats.org/drawingml/2006/main">
+            <a:off x="1143000" y="4524375"/>
+            <a:ext cx="9525000" cy="571500"/>
+          </a:xfrm>
+          <a:prstGeom xmlns:a="http://schemas.openxmlformats.org/drawingml/2006/main" prst="rect">
+            <a:avLst/>
+          </a:prstGeom>
+          <a:noFill xmlns:a="http://schemas.openxmlformats.org/drawingml/2006/main"/>
+          <a:ln xmlns:a="http://schemas.openxmlformats.org/drawingml/2006/main" w="0">
+            <a:noFill/>
+            <a:prstDash val="solid"/>
+          </a:ln>
+        </p:spPr>
+        <p:txBody>
+          <a:bodyPr xmlns:a="http://schemas.openxmlformats.org/drawingml/2006/main"/>
+          <a:lstStyle xmlns:a="http://schemas.openxmlformats.org/drawingml/2006/main"/>
+          <a:p xmlns:a="http://schemas.openxmlformats.org/drawingml/2006/main">
+            <a:pPr>
+              <a:defRPr sz="1650">
+                <a:solidFill>
+                  <a:srgbClr val="657083"/>
+                </a:solidFill>
+              </a:defRPr>
+            </a:pPr>
+            <a:r>
+              <a:rPr sz="1650">
+                <a:solidFill>
+                  <a:srgbClr val="657083"/>
+                </a:solidFill>
+              </a:rPr>
+              <a:t>완성한 뒤 원래 결과와 무엇이 달라졌는지 한 문장으로 설명해 보세요.</a:t>
+            </a:r>
+          </a:p>
+        </p:txBody>
+      </p:sp>
+    </p:spTree>
+    <p:extLst>
+      <p:ext uri="{BB962C8B-B14F-4D97-AF65-F5344CB8AC3E}">
+        <p14:creationId xmlns:p14="http://schemas.microsoft.com/office/powerpoint/2010/main" val="1211882676"/>
+      </p:ext>
+    </p:extLst>
+  </p:cSld>
+</p:sld>
+</file>
+
+<file path=ppt/slides/slide15.xml><?xml version="1.0" encoding="utf-8"?>
+<p:sld xmlns:p="http://schemas.openxmlformats.org/presentationml/2006/main">
+  <p:cSld>
+    <p:bg>
+      <p:bgPr>
+        <a:solidFill xmlns:a="http://schemas.openxmlformats.org/drawingml/2006/main">
+          <a:srgbClr val="FFFCF8"/>
+        </a:solidFill>
+      </p:bgPr>
+    </p:bg>
+    <p:spTree>
+      <p:nvGrpSpPr>
+        <p:cNvPr id="1" name=""/>
+        <p:cNvGrpSpPr/>
+        <p:nvPr/>
+      </p:nvGrpSpPr>
+      <p:grpSpPr>
+        <a:xfrm xmlns:a="http://schemas.openxmlformats.org/drawingml/2006/main"/>
+      </p:grpSpPr>
+      <p:sp>
+        <p:nvSpPr>
+          <p:cNvPr id="10" name="">
+            <a:extLst xmlns:a="http://schemas.openxmlformats.org/drawingml/2006/main">
+              <a:ext uri="{FF2B5EF4-FFF2-40B4-BE49-F238E27FC236}">
+                <a16:creationId xmlns:a16="http://schemas.microsoft.com/office/drawing/2014/main" id="{F839BBA1-245E-45D5-9D07-961644695DD2}"/>
+              </a:ext>
+            </a:extLst>
+          </p:cNvPr>
+          <p:cNvSpPr>
+            <a:spLocks xmlns:a="http://schemas.openxmlformats.org/drawingml/2006/main" noGrp="1"/>
+          </p:cNvSpPr>
+          <p:nvPr/>
+        </p:nvSpPr>
+        <p:spPr>
+          <a:xfrm xmlns:a="http://schemas.openxmlformats.org/drawingml/2006/main">
+            <a:off x="0" y="0"/>
+            <a:ext cx="171450" cy="6858000"/>
+          </a:xfrm>
+          <a:prstGeom xmlns:a="http://schemas.openxmlformats.org/drawingml/2006/main" prst="rect">
+            <a:avLst/>
+          </a:prstGeom>
+          <a:solidFill xmlns:a="http://schemas.openxmlformats.org/drawingml/2006/main">
+            <a:srgbClr val="6657E8"/>
+          </a:solidFill>
+          <a:ln xmlns:a="http://schemas.openxmlformats.org/drawingml/2006/main" w="0">
+            <a:noFill/>
+            <a:prstDash val="solid"/>
+          </a:ln>
+        </p:spPr>
+      </p:sp>
+      <p:sp>
+        <p:nvSpPr>
+          <p:cNvPr id="2" name="">
+            <a:extLst xmlns:a="http://schemas.openxmlformats.org/drawingml/2006/main">
+              <a:ext uri="{FF2B5EF4-FFF2-40B4-BE49-F238E27FC236}">
+                <a16:creationId xmlns:a16="http://schemas.microsoft.com/office/drawing/2014/main" id="{3AF6E4B8-E11E-4918-83D4-76EA0904B0D0}"/>
+              </a:ext>
+            </a:extLst>
+          </p:cNvPr>
+          <p:cNvSpPr>
+            <a:spLocks xmlns:a="http://schemas.openxmlformats.org/drawingml/2006/main" noGrp="1"/>
+          </p:cNvSpPr>
+          <p:nvPr/>
+        </p:nvSpPr>
+        <p:spPr>
+          <a:xfrm xmlns:a="http://schemas.openxmlformats.org/drawingml/2006/main">
+            <a:off x="647700" y="457200"/>
+            <a:ext cx="10096500" cy="552450"/>
+          </a:xfrm>
+          <a:prstGeom xmlns:a="http://schemas.openxmlformats.org/drawingml/2006/main" prst="rect">
+            <a:avLst/>
+          </a:prstGeom>
+          <a:noFill xmlns:a="http://schemas.openxmlformats.org/drawingml/2006/main"/>
+          <a:ln xmlns:a="http://schemas.openxmlformats.org/drawingml/2006/main" w="0">
+            <a:noFill/>
+            <a:prstDash val="solid"/>
+          </a:ln>
+        </p:spPr>
+        <p:txBody>
+          <a:bodyPr xmlns:a="http://schemas.openxmlformats.org/drawingml/2006/main"/>
+          <a:lstStyle xmlns:a="http://schemas.openxmlformats.org/drawingml/2006/main"/>
+          <a:p xmlns:a="http://schemas.openxmlformats.org/drawingml/2006/main">
+            <a:pPr>
+              <a:defRPr sz="2700" b="1">
+                <a:solidFill>
+                  <a:srgbClr val="182235"/>
+                </a:solidFill>
+              </a:defRPr>
+            </a:pPr>
+            <a:r>
+              <a:rPr sz="2700" b="1">
+                <a:solidFill>
+                  <a:srgbClr val="182235"/>
+                </a:solidFill>
+              </a:rPr>
+              <a:t>다섯 문제로 오늘 배운 내용을 확인하세요</a:t>
+            </a:r>
+          </a:p>
+        </p:txBody>
+      </p:sp>
+      <p:sp>
+        <p:nvSpPr>
+          <p:cNvPr id="3" name="">
+            <a:extLst xmlns:a="http://schemas.openxmlformats.org/drawingml/2006/main">
+              <a:ext uri="{FF2B5EF4-FFF2-40B4-BE49-F238E27FC236}">
+                <a16:creationId xmlns:a16="http://schemas.microsoft.com/office/drawing/2014/main" id="{ACAB343A-4885-4650-BFA2-BA98411257D6}"/>
+              </a:ext>
+            </a:extLst>
+          </p:cNvPr>
+          <p:cNvSpPr>
+            <a:spLocks xmlns:a="http://schemas.openxmlformats.org/drawingml/2006/main" noGrp="1"/>
+          </p:cNvSpPr>
+          <p:nvPr/>
+        </p:nvSpPr>
+        <p:spPr>
+          <a:xfrm xmlns:a="http://schemas.openxmlformats.org/drawingml/2006/main">
+            <a:off x="666750" y="6419850"/>
+            <a:ext cx="10096500" cy="209550"/>
+          </a:xfrm>
+          <a:prstGeom xmlns:a="http://schemas.openxmlformats.org/drawingml/2006/main" prst="rect">
+            <a:avLst/>
+          </a:prstGeom>
+          <a:noFill xmlns:a="http://schemas.openxmlformats.org/drawingml/2006/main"/>
+          <a:ln xmlns:a="http://schemas.openxmlformats.org/drawingml/2006/main" w="0">
+            <a:noFill/>
+            <a:prstDash val="solid"/>
+          </a:ln>
+        </p:spPr>
+        <p:txBody>
+          <a:bodyPr xmlns:a="http://schemas.openxmlformats.org/drawingml/2006/main"/>
+          <a:lstStyle xmlns:a="http://schemas.openxmlformats.org/drawingml/2006/main"/>
+          <a:p xmlns:a="http://schemas.openxmlformats.org/drawingml/2006/main">
+            <a:pPr>
+              <a:defRPr sz="975">
+                <a:solidFill>
+                  <a:srgbClr val="657083"/>
+                </a:solidFill>
+              </a:defRPr>
+            </a:pPr>
+            <a:r>
+              <a:rPr sz="975">
+                <a:solidFill>
+                  <a:srgbClr val="657083"/>
+                </a:solidFill>
+              </a:rPr>
+              <a:t>EDU 웹개발 교육 플랫폼  ·  15</a:t>
+            </a:r>
+          </a:p>
+        </p:txBody>
+      </p:sp>
+      <p:sp>
+        <p:nvSpPr>
+          <p:cNvPr id="4" name="">
+            <a:extLst xmlns:a="http://schemas.openxmlformats.org/drawingml/2006/main">
+              <a:ext uri="{FF2B5EF4-FFF2-40B4-BE49-F238E27FC236}">
+                <a16:creationId xmlns:a16="http://schemas.microsoft.com/office/drawing/2014/main" id="{FB4C4327-4DF4-4DD9-9283-3D7DF6AFCE1E}"/>
+              </a:ext>
+            </a:extLst>
+          </p:cNvPr>
+          <p:cNvSpPr>
+            <a:spLocks xmlns:a="http://schemas.openxmlformats.org/drawingml/2006/main" noGrp="1"/>
+          </p:cNvSpPr>
+          <p:nvPr/>
+        </p:nvSpPr>
+        <p:spPr>
+          <a:xfrm xmlns:a="http://schemas.openxmlformats.org/drawingml/2006/main">
+            <a:off x="857250" y="1285875"/>
+            <a:ext cx="10287000" cy="552450"/>
+          </a:xfrm>
+          <a:prstGeom xmlns:a="http://schemas.openxmlformats.org/drawingml/2006/main" prst="rect">
+            <a:avLst/>
+          </a:prstGeom>
+          <a:noFill xmlns:a="http://schemas.openxmlformats.org/drawingml/2006/main"/>
+          <a:ln xmlns:a="http://schemas.openxmlformats.org/drawingml/2006/main" w="0">
+            <a:noFill/>
+            <a:prstDash val="solid"/>
+          </a:ln>
+        </p:spPr>
+        <p:txBody>
+          <a:bodyPr xmlns:a="http://schemas.openxmlformats.org/drawingml/2006/main"/>
+          <a:lstStyle xmlns:a="http://schemas.openxmlformats.org/drawingml/2006/main"/>
+          <a:p xmlns:a="http://schemas.openxmlformats.org/drawingml/2006/main">
+            <a:pPr>
+              <a:defRPr sz="1650" b="0">
+                <a:solidFill>
+                  <a:srgbClr val="182235"/>
+                </a:solidFill>
+              </a:defRPr>
+            </a:pPr>
+            <a:r>
+              <a:rPr sz="1650" b="0">
+                <a:solidFill>
+                  <a:srgbClr val="182235"/>
+                </a:solidFill>
+              </a:rPr>
+              <a:t>1. 좋은 요청의 첫 정보는?</a:t>
+            </a:r>
+          </a:p>
+        </p:txBody>
+      </p:sp>
+      <p:sp>
+        <p:nvSpPr>
+          <p:cNvPr id="5" name="">
+            <a:extLst xmlns:a="http://schemas.openxmlformats.org/drawingml/2006/main">
+              <a:ext uri="{FF2B5EF4-FFF2-40B4-BE49-F238E27FC236}">
+                <a16:creationId xmlns:a16="http://schemas.microsoft.com/office/drawing/2014/main" id="{BB4DF2AA-9320-4863-AA63-3A7DFB96C15F}"/>
+              </a:ext>
+            </a:extLst>
+          </p:cNvPr>
+          <p:cNvSpPr>
+            <a:spLocks xmlns:a="http://schemas.openxmlformats.org/drawingml/2006/main" noGrp="1"/>
+          </p:cNvSpPr>
+          <p:nvPr/>
+        </p:nvSpPr>
+        <p:spPr>
+          <a:xfrm xmlns:a="http://schemas.openxmlformats.org/drawingml/2006/main">
+            <a:off x="857250" y="2162175"/>
+            <a:ext cx="10287000" cy="552450"/>
+          </a:xfrm>
+          <a:prstGeom xmlns:a="http://schemas.openxmlformats.org/drawingml/2006/main" prst="rect">
+            <a:avLst/>
+          </a:prstGeom>
+          <a:noFill xmlns:a="http://schemas.openxmlformats.org/drawingml/2006/main"/>
+          <a:ln xmlns:a="http://schemas.openxmlformats.org/drawingml/2006/main" w="0">
+            <a:noFill/>
+            <a:prstDash val="solid"/>
+          </a:ln>
+        </p:spPr>
+        <p:txBody>
+          <a:bodyPr xmlns:a="http://schemas.openxmlformats.org/drawingml/2006/main"/>
+          <a:lstStyle xmlns:a="http://schemas.openxmlformats.org/drawingml/2006/main"/>
+          <a:p xmlns:a="http://schemas.openxmlformats.org/drawingml/2006/main">
+            <a:pPr>
+              <a:defRPr sz="1650" b="0">
+                <a:solidFill>
+                  <a:srgbClr val="182235"/>
+                </a:solidFill>
+              </a:defRPr>
+            </a:pPr>
+            <a:r>
+              <a:rPr sz="1650" b="0">
+                <a:solidFill>
+                  <a:srgbClr val="182235"/>
+                </a:solidFill>
+              </a:rPr>
+              <a:t>2. 유지 범위를 쓰는 이유는?</a:t>
+            </a:r>
+          </a:p>
+        </p:txBody>
+      </p:sp>
+      <p:sp>
+        <p:nvSpPr>
+          <p:cNvPr id="6" name="">
+            <a:extLst xmlns:a="http://schemas.openxmlformats.org/drawingml/2006/main">
+              <a:ext uri="{FF2B5EF4-FFF2-40B4-BE49-F238E27FC236}">
+                <a16:creationId xmlns:a16="http://schemas.microsoft.com/office/drawing/2014/main" id="{8FB7C5A9-373D-454E-96D1-70F699AC2B61}"/>
+              </a:ext>
+            </a:extLst>
+          </p:cNvPr>
+          <p:cNvSpPr>
+            <a:spLocks xmlns:a="http://schemas.openxmlformats.org/drawingml/2006/main" noGrp="1"/>
+          </p:cNvSpPr>
+          <p:nvPr/>
+        </p:nvSpPr>
+        <p:spPr>
+          <a:xfrm xmlns:a="http://schemas.openxmlformats.org/drawingml/2006/main">
+            <a:off x="857250" y="3038475"/>
+            <a:ext cx="10287000" cy="552450"/>
+          </a:xfrm>
+          <a:prstGeom xmlns:a="http://schemas.openxmlformats.org/drawingml/2006/main" prst="rect">
+            <a:avLst/>
+          </a:prstGeom>
+          <a:noFill xmlns:a="http://schemas.openxmlformats.org/drawingml/2006/main"/>
+          <a:ln xmlns:a="http://schemas.openxmlformats.org/drawingml/2006/main" w="0">
+            <a:noFill/>
+            <a:prstDash val="solid"/>
+          </a:ln>
+        </p:spPr>
+        <p:txBody>
+          <a:bodyPr xmlns:a="http://schemas.openxmlformats.org/drawingml/2006/main"/>
+          <a:lstStyle xmlns:a="http://schemas.openxmlformats.org/drawingml/2006/main"/>
+          <a:p xmlns:a="http://schemas.openxmlformats.org/drawingml/2006/main">
+            <a:pPr>
+              <a:defRPr sz="1650" b="0">
+                <a:solidFill>
+                  <a:srgbClr val="182235"/>
+                </a:solidFill>
+              </a:defRPr>
+            </a:pPr>
+            <a:r>
+              <a:rPr sz="1650" b="0">
+                <a:solidFill>
+                  <a:srgbClr val="182235"/>
+                </a:solidFill>
+              </a:rPr>
+              <a:t>3. 한 번에 몇 기능이 좋은가요?</a:t>
+            </a:r>
+          </a:p>
+        </p:txBody>
+      </p:sp>
+      <p:sp>
+        <p:nvSpPr>
+          <p:cNvPr id="7" name="">
+            <a:extLst xmlns:a="http://schemas.openxmlformats.org/drawingml/2006/main">
+              <a:ext uri="{FF2B5EF4-FFF2-40B4-BE49-F238E27FC236}">
+                <a16:creationId xmlns:a16="http://schemas.microsoft.com/office/drawing/2014/main" id="{1FEFFE59-B2AE-41D1-8567-056DA73E77E7}"/>
+              </a:ext>
+            </a:extLst>
+          </p:cNvPr>
+          <p:cNvSpPr>
+            <a:spLocks xmlns:a="http://schemas.openxmlformats.org/drawingml/2006/main" noGrp="1"/>
+          </p:cNvSpPr>
+          <p:nvPr/>
+        </p:nvSpPr>
+        <p:spPr>
+          <a:xfrm xmlns:a="http://schemas.openxmlformats.org/drawingml/2006/main">
+            <a:off x="857250" y="3914775"/>
+            <a:ext cx="10287000" cy="552450"/>
+          </a:xfrm>
+          <a:prstGeom xmlns:a="http://schemas.openxmlformats.org/drawingml/2006/main" prst="rect">
+            <a:avLst/>
+          </a:prstGeom>
+          <a:noFill xmlns:a="http://schemas.openxmlformats.org/drawingml/2006/main"/>
+          <a:ln xmlns:a="http://schemas.openxmlformats.org/drawingml/2006/main" w="0">
+            <a:noFill/>
+            <a:prstDash val="solid"/>
+          </a:ln>
+        </p:spPr>
+        <p:txBody>
+          <a:bodyPr xmlns:a="http://schemas.openxmlformats.org/drawingml/2006/main"/>
+          <a:lstStyle xmlns:a="http://schemas.openxmlformats.org/drawingml/2006/main"/>
+          <a:p xmlns:a="http://schemas.openxmlformats.org/drawingml/2006/main">
+            <a:pPr>
+              <a:defRPr sz="1650" b="0">
+                <a:solidFill>
+                  <a:srgbClr val="182235"/>
+                </a:solidFill>
+              </a:defRPr>
+            </a:pPr>
+            <a:r>
+              <a:rPr sz="1650" b="0">
+                <a:solidFill>
+                  <a:srgbClr val="182235"/>
+                </a:solidFill>
+              </a:rPr>
+              <a:t>4. 오류 요청에 꼭 넣을 것은?</a:t>
+            </a:r>
+          </a:p>
+        </p:txBody>
+      </p:sp>
+      <p:sp>
+        <p:nvSpPr>
+          <p:cNvPr id="8" name="">
+            <a:extLst xmlns:a="http://schemas.openxmlformats.org/drawingml/2006/main">
+              <a:ext uri="{FF2B5EF4-FFF2-40B4-BE49-F238E27FC236}">
+                <a16:creationId xmlns:a16="http://schemas.microsoft.com/office/drawing/2014/main" id="{647B236B-1304-4BDF-87CA-E542C3557E63}"/>
+              </a:ext>
+            </a:extLst>
+          </p:cNvPr>
+          <p:cNvSpPr>
+            <a:spLocks xmlns:a="http://schemas.openxmlformats.org/drawingml/2006/main" noGrp="1"/>
+          </p:cNvSpPr>
+          <p:nvPr/>
+        </p:nvSpPr>
+        <p:spPr>
+          <a:xfrm xmlns:a="http://schemas.openxmlformats.org/drawingml/2006/main">
+            <a:off x="857250" y="4791075"/>
+            <a:ext cx="10287000" cy="552450"/>
+          </a:xfrm>
+          <a:prstGeom xmlns:a="http://schemas.openxmlformats.org/drawingml/2006/main" prst="rect">
+            <a:avLst/>
+          </a:prstGeom>
+          <a:noFill xmlns:a="http://schemas.openxmlformats.org/drawingml/2006/main"/>
+          <a:ln xmlns:a="http://schemas.openxmlformats.org/drawingml/2006/main" w="0">
+            <a:noFill/>
+            <a:prstDash val="solid"/>
+          </a:ln>
+        </p:spPr>
+        <p:txBody>
+          <a:bodyPr xmlns:a="http://schemas.openxmlformats.org/drawingml/2006/main"/>
+          <a:lstStyle xmlns:a="http://schemas.openxmlformats.org/drawingml/2006/main"/>
+          <a:p xmlns:a="http://schemas.openxmlformats.org/drawingml/2006/main">
+            <a:pPr>
+              <a:defRPr sz="1650" b="1">
+                <a:solidFill>
+                  <a:srgbClr val="182235"/>
+                </a:solidFill>
+              </a:defRPr>
+            </a:pPr>
+            <a:r>
+              <a:rPr sz="1650" b="1">
+                <a:solidFill>
+                  <a:srgbClr val="182235"/>
+                </a:solidFill>
+              </a:rPr>
+              <a:t>5. 완료 기준은?</a:t>
+            </a:r>
+          </a:p>
+        </p:txBody>
+      </p:sp>
+      <p:sp>
+        <p:nvSpPr>
+          <p:cNvPr id="9" name="">
+            <a:extLst xmlns:a="http://schemas.openxmlformats.org/drawingml/2006/main">
+              <a:ext uri="{FF2B5EF4-FFF2-40B4-BE49-F238E27FC236}">
+                <a16:creationId xmlns:a16="http://schemas.microsoft.com/office/drawing/2014/main" id="{241503A5-67E1-430F-8B24-6CBB02F78887}"/>
+              </a:ext>
+            </a:extLst>
+          </p:cNvPr>
+          <p:cNvSpPr>
+            <a:spLocks xmlns:a="http://schemas.openxmlformats.org/drawingml/2006/main" noGrp="1"/>
+          </p:cNvSpPr>
+          <p:nvPr/>
+        </p:nvSpPr>
+        <p:spPr>
+          <a:xfrm xmlns:a="http://schemas.openxmlformats.org/drawingml/2006/main">
+            <a:off x="857250" y="5857875"/>
+            <a:ext cx="10001250" cy="304800"/>
+          </a:xfrm>
+          <a:prstGeom xmlns:a="http://schemas.openxmlformats.org/drawingml/2006/main" prst="rect">
+            <a:avLst/>
+          </a:prstGeom>
+          <a:noFill xmlns:a="http://schemas.openxmlformats.org/drawingml/2006/main"/>
+          <a:ln xmlns:a="http://schemas.openxmlformats.org/drawingml/2006/main" w="0">
+            <a:noFill/>
+            <a:prstDash val="solid"/>
+          </a:ln>
+        </p:spPr>
+        <p:txBody>
+          <a:bodyPr xmlns:a="http://schemas.openxmlformats.org/drawingml/2006/main"/>
+          <a:lstStyle xmlns:a="http://schemas.openxmlformats.org/drawingml/2006/main"/>
+          <a:p xmlns:a="http://schemas.openxmlformats.org/drawingml/2006/main">
+            <a:pPr>
+              <a:defRPr sz="1350" b="1">
+                <a:solidFill>
+                  <a:srgbClr val="6657E8"/>
+                </a:solidFill>
+              </a:defRPr>
+            </a:pPr>
+            <a:r>
+              <a:rPr sz="1350" b="1">
+                <a:solidFill>
+                  <a:srgbClr val="6657E8"/>
+                </a:solidFill>
+              </a:rPr>
+              <a:t>정답과 해설은 EDU 홈페이지 상세 자료에서 확인할 수 있습니다.</a:t>
+            </a:r>
+          </a:p>
+        </p:txBody>
+      </p:sp>
+    </p:spTree>
+    <p:extLst>
+      <p:ext uri="{BB962C8B-B14F-4D97-AF65-F5344CB8AC3E}">
+        <p14:creationId xmlns:p14="http://schemas.microsoft.com/office/powerpoint/2010/main" val="539550875"/>
       </p:ext>
     </p:extLst>
   </p:cSld>
@@ -1896,7 +5488,7 @@
           <p:cNvPr id="12" name="">
             <a:extLst xmlns:a="http://schemas.openxmlformats.org/drawingml/2006/main">
               <a:ext uri="{FF2B5EF4-FFF2-40B4-BE49-F238E27FC236}">
-                <a16:creationId xmlns:a16="http://schemas.microsoft.com/office/drawing/2014/main" id="{F1B63F94-62B2-4D0F-A6D4-A7AE893FF284}"/>
+                <a16:creationId xmlns:a16="http://schemas.microsoft.com/office/drawing/2014/main" id="{D11A2B43-0179-45B7-A15C-1B16DB2BBF0E}"/>
               </a:ext>
             </a:extLst>
           </p:cNvPr>
@@ -1927,7 +5519,7 @@
           <p:cNvPr id="2" name="">
             <a:extLst xmlns:a="http://schemas.openxmlformats.org/drawingml/2006/main">
               <a:ext uri="{FF2B5EF4-FFF2-40B4-BE49-F238E27FC236}">
-                <a16:creationId xmlns:a16="http://schemas.microsoft.com/office/drawing/2014/main" id="{390B7105-A5FF-4758-8A55-A7EE757B225E}"/>
+                <a16:creationId xmlns:a16="http://schemas.microsoft.com/office/drawing/2014/main" id="{8DC41328-EA9F-49EF-A262-EE23934EF736}"/>
               </a:ext>
             </a:extLst>
           </p:cNvPr>
@@ -1977,7 +5569,7 @@
           <p:cNvPr id="3" name="">
             <a:extLst xmlns:a="http://schemas.openxmlformats.org/drawingml/2006/main">
               <a:ext uri="{FF2B5EF4-FFF2-40B4-BE49-F238E27FC236}">
-                <a16:creationId xmlns:a16="http://schemas.microsoft.com/office/drawing/2014/main" id="{5FE06BC2-6E0E-4C15-BFFB-320900FF0920}"/>
+                <a16:creationId xmlns:a16="http://schemas.microsoft.com/office/drawing/2014/main" id="{0AE95E0F-7854-49D7-A5B5-32014D8691B8}"/>
               </a:ext>
             </a:extLst>
           </p:cNvPr>
@@ -2027,7 +5619,7 @@
           <p:cNvPr id="4" name="">
             <a:extLst xmlns:a="http://schemas.openxmlformats.org/drawingml/2006/main">
               <a:ext uri="{FF2B5EF4-FFF2-40B4-BE49-F238E27FC236}">
-                <a16:creationId xmlns:a16="http://schemas.microsoft.com/office/drawing/2014/main" id="{466C5C0A-8FEB-45DC-AFE5-B7C549F9F9E8}"/>
+                <a16:creationId xmlns:a16="http://schemas.microsoft.com/office/drawing/2014/main" id="{606CE51F-D9AD-4572-A1E1-F7DEBC844477}"/>
               </a:ext>
             </a:extLst>
           </p:cNvPr>
@@ -2060,7 +5652,7 @@
           <p:cNvPr id="5" name="">
             <a:extLst xmlns:a="http://schemas.openxmlformats.org/drawingml/2006/main">
               <a:ext uri="{FF2B5EF4-FFF2-40B4-BE49-F238E27FC236}">
-                <a16:creationId xmlns:a16="http://schemas.microsoft.com/office/drawing/2014/main" id="{968DE17F-0AE0-4B2E-86F7-2749421EBC30}"/>
+                <a16:creationId xmlns:a16="http://schemas.microsoft.com/office/drawing/2014/main" id="{98DA9DB0-902F-431A-BF17-54EB12D1DBA0}"/>
               </a:ext>
             </a:extLst>
           </p:cNvPr>
@@ -2110,7 +5702,7 @@
           <p:cNvPr id="6" name="">
             <a:extLst xmlns:a="http://schemas.openxmlformats.org/drawingml/2006/main">
               <a:ext uri="{FF2B5EF4-FFF2-40B4-BE49-F238E27FC236}">
-                <a16:creationId xmlns:a16="http://schemas.microsoft.com/office/drawing/2014/main" id="{9EACBCF2-7F4B-4F35-AD34-C9B9744A7A76}"/>
+                <a16:creationId xmlns:a16="http://schemas.microsoft.com/office/drawing/2014/main" id="{4E21BE9E-334F-4E90-B3E1-0AAEA540F6BE}"/>
               </a:ext>
             </a:extLst>
           </p:cNvPr>
@@ -2160,7 +5752,7 @@
           <p:cNvPr id="7" name="">
             <a:extLst xmlns:a="http://schemas.openxmlformats.org/drawingml/2006/main">
               <a:ext uri="{FF2B5EF4-FFF2-40B4-BE49-F238E27FC236}">
-                <a16:creationId xmlns:a16="http://schemas.microsoft.com/office/drawing/2014/main" id="{1A971A8F-6DBE-46D5-B4C8-1768B834E4A3}"/>
+                <a16:creationId xmlns:a16="http://schemas.microsoft.com/office/drawing/2014/main" id="{4B8101D9-AD6B-4B25-829D-1C86BA517209}"/>
               </a:ext>
             </a:extLst>
           </p:cNvPr>
@@ -2193,7 +5785,7 @@
           <p:cNvPr id="8" name="">
             <a:extLst xmlns:a="http://schemas.openxmlformats.org/drawingml/2006/main">
               <a:ext uri="{FF2B5EF4-FFF2-40B4-BE49-F238E27FC236}">
-                <a16:creationId xmlns:a16="http://schemas.microsoft.com/office/drawing/2014/main" id="{14389BF6-4EB4-4A2F-B56A-8F342715C586}"/>
+                <a16:creationId xmlns:a16="http://schemas.microsoft.com/office/drawing/2014/main" id="{BB70BB1C-0D01-470A-B040-03BEFDF6774D}"/>
               </a:ext>
             </a:extLst>
           </p:cNvPr>
@@ -2243,7 +5835,7 @@
           <p:cNvPr id="9" name="">
             <a:extLst xmlns:a="http://schemas.openxmlformats.org/drawingml/2006/main">
               <a:ext uri="{FF2B5EF4-FFF2-40B4-BE49-F238E27FC236}">
-                <a16:creationId xmlns:a16="http://schemas.microsoft.com/office/drawing/2014/main" id="{6B0F8E09-15BF-48B2-ADA9-20A99A50DA34}"/>
+                <a16:creationId xmlns:a16="http://schemas.microsoft.com/office/drawing/2014/main" id="{F4820814-7763-4086-AFDC-3B24BC342D58}"/>
               </a:ext>
             </a:extLst>
           </p:cNvPr>
@@ -2293,7 +5885,7 @@
           <p:cNvPr id="10" name="">
             <a:extLst xmlns:a="http://schemas.openxmlformats.org/drawingml/2006/main">
               <a:ext uri="{FF2B5EF4-FFF2-40B4-BE49-F238E27FC236}">
-                <a16:creationId xmlns:a16="http://schemas.microsoft.com/office/drawing/2014/main" id="{97A2536C-7987-4C74-9775-FE655832C177}"/>
+                <a16:creationId xmlns:a16="http://schemas.microsoft.com/office/drawing/2014/main" id="{429101C3-4D54-4BFC-A1DC-DE6B36FFFE9B}"/>
               </a:ext>
             </a:extLst>
           </p:cNvPr>
@@ -2326,7 +5918,7 @@
           <p:cNvPr id="11" name="">
             <a:extLst xmlns:a="http://schemas.openxmlformats.org/drawingml/2006/main">
               <a:ext uri="{FF2B5EF4-FFF2-40B4-BE49-F238E27FC236}">
-                <a16:creationId xmlns:a16="http://schemas.microsoft.com/office/drawing/2014/main" id="{277D0EC6-EDED-44C0-85E4-DA96FF4E1366}"/>
+                <a16:creationId xmlns:a16="http://schemas.microsoft.com/office/drawing/2014/main" id="{EFE24977-B269-4977-867F-C58FC55180F0}"/>
               </a:ext>
             </a:extLst>
           </p:cNvPr>
@@ -2391,7 +5983,7 @@
     </p:spTree>
     <p:extLst>
       <p:ext uri="{BB962C8B-B14F-4D97-AF65-F5344CB8AC3E}">
-        <p14:creationId xmlns:p14="http://schemas.microsoft.com/office/powerpoint/2010/main" val="1475650675"/>
+        <p14:creationId xmlns:p14="http://schemas.microsoft.com/office/powerpoint/2010/main" val="1877053568"/>
       </p:ext>
     </p:extLst>
   </p:cSld>
@@ -2422,7 +6014,7 @@
           <p:cNvPr id="8" name="">
             <a:extLst xmlns:a="http://schemas.openxmlformats.org/drawingml/2006/main">
               <a:ext uri="{FF2B5EF4-FFF2-40B4-BE49-F238E27FC236}">
-                <a16:creationId xmlns:a16="http://schemas.microsoft.com/office/drawing/2014/main" id="{1952A28E-C49C-43DA-89F5-565947BE6639}"/>
+                <a16:creationId xmlns:a16="http://schemas.microsoft.com/office/drawing/2014/main" id="{83D616A4-D6C9-4611-A4C1-794A7E2DFF80}"/>
               </a:ext>
             </a:extLst>
           </p:cNvPr>
@@ -2453,7 +6045,7 @@
           <p:cNvPr id="2" name="">
             <a:extLst xmlns:a="http://schemas.openxmlformats.org/drawingml/2006/main">
               <a:ext uri="{FF2B5EF4-FFF2-40B4-BE49-F238E27FC236}">
-                <a16:creationId xmlns:a16="http://schemas.microsoft.com/office/drawing/2014/main" id="{ED2B3F34-B97B-49F7-BFE0-38F810B78F84}"/>
+                <a16:creationId xmlns:a16="http://schemas.microsoft.com/office/drawing/2014/main" id="{32F1D08B-4DBF-41B2-87DF-DB61BFCCE223}"/>
               </a:ext>
             </a:extLst>
           </p:cNvPr>
@@ -2503,7 +6095,7 @@
           <p:cNvPr id="3" name="">
             <a:extLst xmlns:a="http://schemas.openxmlformats.org/drawingml/2006/main">
               <a:ext uri="{FF2B5EF4-FFF2-40B4-BE49-F238E27FC236}">
-                <a16:creationId xmlns:a16="http://schemas.microsoft.com/office/drawing/2014/main" id="{1AF50EFC-97DF-4708-80D4-E75B4EF3D1FE}"/>
+                <a16:creationId xmlns:a16="http://schemas.microsoft.com/office/drawing/2014/main" id="{63A09E7C-54DD-4554-80A7-536BE47D6E8E}"/>
               </a:ext>
             </a:extLst>
           </p:cNvPr>
@@ -2553,7 +6145,7 @@
           <p:cNvPr id="4" name="">
             <a:extLst xmlns:a="http://schemas.openxmlformats.org/drawingml/2006/main">
               <a:ext uri="{FF2B5EF4-FFF2-40B4-BE49-F238E27FC236}">
-                <a16:creationId xmlns:a16="http://schemas.microsoft.com/office/drawing/2014/main" id="{2AB91478-9311-4589-BFE0-5666EAF81A99}"/>
+                <a16:creationId xmlns:a16="http://schemas.microsoft.com/office/drawing/2014/main" id="{C6A41237-6075-4345-A82E-C0C6073F107E}"/>
               </a:ext>
             </a:extLst>
           </p:cNvPr>
@@ -2586,7 +6178,7 @@
           <p:cNvPr id="5" name="">
             <a:extLst xmlns:a="http://schemas.openxmlformats.org/drawingml/2006/main">
               <a:ext uri="{FF2B5EF4-FFF2-40B4-BE49-F238E27FC236}">
-                <a16:creationId xmlns:a16="http://schemas.microsoft.com/office/drawing/2014/main" id="{ACFB1C22-D03F-4FB0-B57E-60EEE72BFCBE}"/>
+                <a16:creationId xmlns:a16="http://schemas.microsoft.com/office/drawing/2014/main" id="{E0B3CB9D-415A-4D2A-9014-32CD8BF4718E}"/>
               </a:ext>
             </a:extLst>
           </p:cNvPr>
@@ -2636,7 +6228,7 @@
           <p:cNvPr id="6" name="">
             <a:extLst xmlns:a="http://schemas.openxmlformats.org/drawingml/2006/main">
               <a:ext uri="{FF2B5EF4-FFF2-40B4-BE49-F238E27FC236}">
-                <a16:creationId xmlns:a16="http://schemas.microsoft.com/office/drawing/2014/main" id="{18EDE40B-894A-404B-AD4B-9DFB7CE52149}"/>
+                <a16:creationId xmlns:a16="http://schemas.microsoft.com/office/drawing/2014/main" id="{8B075655-D4F0-4C01-80E2-25008A6C97A8}"/>
               </a:ext>
             </a:extLst>
           </p:cNvPr>
@@ -2686,7 +6278,7 @@
           <p:cNvPr id="7" name="">
             <a:extLst xmlns:a="http://schemas.openxmlformats.org/drawingml/2006/main">
               <a:ext uri="{FF2B5EF4-FFF2-40B4-BE49-F238E27FC236}">
-                <a16:creationId xmlns:a16="http://schemas.microsoft.com/office/drawing/2014/main" id="{5F16E0F7-5DBD-42E4-8834-D95CBBE5C252}"/>
+                <a16:creationId xmlns:a16="http://schemas.microsoft.com/office/drawing/2014/main" id="{00DB8E35-5BEB-4C4C-BBC6-45C1D8F5DC63}"/>
               </a:ext>
             </a:extLst>
           </p:cNvPr>
@@ -2734,7 +6326,7 @@
     </p:spTree>
     <p:extLst>
       <p:ext uri="{BB962C8B-B14F-4D97-AF65-F5344CB8AC3E}">
-        <p14:creationId xmlns:p14="http://schemas.microsoft.com/office/powerpoint/2010/main" val="1706303607"/>
+        <p14:creationId xmlns:p14="http://schemas.microsoft.com/office/powerpoint/2010/main" val="354892054"/>
       </p:ext>
     </p:extLst>
   </p:cSld>
@@ -2765,7 +6357,7 @@
           <p:cNvPr id="16" name="">
             <a:extLst xmlns:a="http://schemas.openxmlformats.org/drawingml/2006/main">
               <a:ext uri="{FF2B5EF4-FFF2-40B4-BE49-F238E27FC236}">
-                <a16:creationId xmlns:a16="http://schemas.microsoft.com/office/drawing/2014/main" id="{896A2BED-89B7-4CF0-881B-E98F1E5F9A26}"/>
+                <a16:creationId xmlns:a16="http://schemas.microsoft.com/office/drawing/2014/main" id="{48B504AD-96FC-40F3-98E1-37AB256B3D1C}"/>
               </a:ext>
             </a:extLst>
           </p:cNvPr>
@@ -2796,7 +6388,7 @@
           <p:cNvPr id="2" name="">
             <a:extLst xmlns:a="http://schemas.openxmlformats.org/drawingml/2006/main">
               <a:ext uri="{FF2B5EF4-FFF2-40B4-BE49-F238E27FC236}">
-                <a16:creationId xmlns:a16="http://schemas.microsoft.com/office/drawing/2014/main" id="{B8243471-B944-42AB-9DD9-AFA1B0B0CEAE}"/>
+                <a16:creationId xmlns:a16="http://schemas.microsoft.com/office/drawing/2014/main" id="{438D9F0A-A034-443C-AE82-5AC324FEEEC6}"/>
               </a:ext>
             </a:extLst>
           </p:cNvPr>
@@ -2846,7 +6438,7 @@
           <p:cNvPr id="3" name="">
             <a:extLst xmlns:a="http://schemas.openxmlformats.org/drawingml/2006/main">
               <a:ext uri="{FF2B5EF4-FFF2-40B4-BE49-F238E27FC236}">
-                <a16:creationId xmlns:a16="http://schemas.microsoft.com/office/drawing/2014/main" id="{D3445229-E4DF-4B34-B78D-FB418E738294}"/>
+                <a16:creationId xmlns:a16="http://schemas.microsoft.com/office/drawing/2014/main" id="{AC0DCFFE-B656-4177-9A7D-BE6E76D1DFB9}"/>
               </a:ext>
             </a:extLst>
           </p:cNvPr>
@@ -2896,7 +6488,7 @@
           <p:cNvPr id="4" name="">
             <a:extLst xmlns:a="http://schemas.openxmlformats.org/drawingml/2006/main">
               <a:ext uri="{FF2B5EF4-FFF2-40B4-BE49-F238E27FC236}">
-                <a16:creationId xmlns:a16="http://schemas.microsoft.com/office/drawing/2014/main" id="{F2B4221B-7C15-4BD0-BBCC-66CF807E49BB}"/>
+                <a16:creationId xmlns:a16="http://schemas.microsoft.com/office/drawing/2014/main" id="{ABC6E3FC-9445-41E3-A355-EC7082909268}"/>
               </a:ext>
             </a:extLst>
           </p:cNvPr>
@@ -2929,7 +6521,7 @@
           <p:cNvPr id="5" name="">
             <a:extLst xmlns:a="http://schemas.openxmlformats.org/drawingml/2006/main">
               <a:ext uri="{FF2B5EF4-FFF2-40B4-BE49-F238E27FC236}">
-                <a16:creationId xmlns:a16="http://schemas.microsoft.com/office/drawing/2014/main" id="{85B16764-D1B0-4C4C-BE73-E5A026602C54}"/>
+                <a16:creationId xmlns:a16="http://schemas.microsoft.com/office/drawing/2014/main" id="{B8F87808-1697-4632-A485-D7D6A1D80727}"/>
               </a:ext>
             </a:extLst>
           </p:cNvPr>
@@ -2979,7 +6571,7 @@
           <p:cNvPr id="6" name="">
             <a:extLst xmlns:a="http://schemas.openxmlformats.org/drawingml/2006/main">
               <a:ext uri="{FF2B5EF4-FFF2-40B4-BE49-F238E27FC236}">
-                <a16:creationId xmlns:a16="http://schemas.microsoft.com/office/drawing/2014/main" id="{AF0D7478-16C0-479E-A53B-388BC01022DE}"/>
+                <a16:creationId xmlns:a16="http://schemas.microsoft.com/office/drawing/2014/main" id="{5C4AB1C5-3C96-4198-BA23-97F95D5ECC5D}"/>
               </a:ext>
             </a:extLst>
           </p:cNvPr>
@@ -3029,7 +6621,7 @@
           <p:cNvPr id="7" name="">
             <a:extLst xmlns:a="http://schemas.openxmlformats.org/drawingml/2006/main">
               <a:ext uri="{FF2B5EF4-FFF2-40B4-BE49-F238E27FC236}">
-                <a16:creationId xmlns:a16="http://schemas.microsoft.com/office/drawing/2014/main" id="{31F3593B-845D-4635-92F2-405EB6604006}"/>
+                <a16:creationId xmlns:a16="http://schemas.microsoft.com/office/drawing/2014/main" id="{38B910BF-898E-4BB6-89B7-3F61F6E76D7B}"/>
               </a:ext>
             </a:extLst>
           </p:cNvPr>
@@ -3062,7 +6654,7 @@
           <p:cNvPr id="8" name="">
             <a:extLst xmlns:a="http://schemas.openxmlformats.org/drawingml/2006/main">
               <a:ext uri="{FF2B5EF4-FFF2-40B4-BE49-F238E27FC236}">
-                <a16:creationId xmlns:a16="http://schemas.microsoft.com/office/drawing/2014/main" id="{B92809A0-B94B-4BCC-83F9-118E65BD31DD}"/>
+                <a16:creationId xmlns:a16="http://schemas.microsoft.com/office/drawing/2014/main" id="{31CDCB0E-65E0-4850-8EF3-783709375D0E}"/>
               </a:ext>
             </a:extLst>
           </p:cNvPr>
@@ -3112,7 +6704,7 @@
           <p:cNvPr id="9" name="">
             <a:extLst xmlns:a="http://schemas.openxmlformats.org/drawingml/2006/main">
               <a:ext uri="{FF2B5EF4-FFF2-40B4-BE49-F238E27FC236}">
-                <a16:creationId xmlns:a16="http://schemas.microsoft.com/office/drawing/2014/main" id="{828B7EA1-6207-4080-AD4E-ACAC1573999F}"/>
+                <a16:creationId xmlns:a16="http://schemas.microsoft.com/office/drawing/2014/main" id="{EC5F2558-CB87-4583-90CB-DEA48C082EBD}"/>
               </a:ext>
             </a:extLst>
           </p:cNvPr>
@@ -3162,7 +6754,7 @@
           <p:cNvPr id="10" name="">
             <a:extLst xmlns:a="http://schemas.openxmlformats.org/drawingml/2006/main">
               <a:ext uri="{FF2B5EF4-FFF2-40B4-BE49-F238E27FC236}">
-                <a16:creationId xmlns:a16="http://schemas.microsoft.com/office/drawing/2014/main" id="{46460E73-E285-4A5E-8DF0-A9B0D006E267}"/>
+                <a16:creationId xmlns:a16="http://schemas.microsoft.com/office/drawing/2014/main" id="{278FB0D2-ED5B-464C-AFEF-9E64496DFF78}"/>
               </a:ext>
             </a:extLst>
           </p:cNvPr>
@@ -3195,7 +6787,7 @@
           <p:cNvPr id="11" name="">
             <a:extLst xmlns:a="http://schemas.openxmlformats.org/drawingml/2006/main">
               <a:ext uri="{FF2B5EF4-FFF2-40B4-BE49-F238E27FC236}">
-                <a16:creationId xmlns:a16="http://schemas.microsoft.com/office/drawing/2014/main" id="{6D0E3BC8-17CA-457E-8DC2-27391D3B9A77}"/>
+                <a16:creationId xmlns:a16="http://schemas.microsoft.com/office/drawing/2014/main" id="{B15C163C-96E4-45E5-977F-827D27C58808}"/>
               </a:ext>
             </a:extLst>
           </p:cNvPr>
@@ -3245,7 +6837,7 @@
           <p:cNvPr id="12" name="">
             <a:extLst xmlns:a="http://schemas.openxmlformats.org/drawingml/2006/main">
               <a:ext uri="{FF2B5EF4-FFF2-40B4-BE49-F238E27FC236}">
-                <a16:creationId xmlns:a16="http://schemas.microsoft.com/office/drawing/2014/main" id="{C7CCEAF7-7EAD-4300-8E3B-0C83B4C9482D}"/>
+                <a16:creationId xmlns:a16="http://schemas.microsoft.com/office/drawing/2014/main" id="{6D148249-2716-4969-B4B7-F2D715E93DB1}"/>
               </a:ext>
             </a:extLst>
           </p:cNvPr>
@@ -3295,7 +6887,7 @@
           <p:cNvPr id="13" name="">
             <a:extLst xmlns:a="http://schemas.openxmlformats.org/drawingml/2006/main">
               <a:ext uri="{FF2B5EF4-FFF2-40B4-BE49-F238E27FC236}">
-                <a16:creationId xmlns:a16="http://schemas.microsoft.com/office/drawing/2014/main" id="{7FDE807B-7C55-49DC-92D3-65A5472D82C6}"/>
+                <a16:creationId xmlns:a16="http://schemas.microsoft.com/office/drawing/2014/main" id="{48B3C05A-1DAB-404C-BC17-21FE087DE845}"/>
               </a:ext>
             </a:extLst>
           </p:cNvPr>
@@ -3328,7 +6920,7 @@
           <p:cNvPr id="14" name="">
             <a:extLst xmlns:a="http://schemas.openxmlformats.org/drawingml/2006/main">
               <a:ext uri="{FF2B5EF4-FFF2-40B4-BE49-F238E27FC236}">
-                <a16:creationId xmlns:a16="http://schemas.microsoft.com/office/drawing/2014/main" id="{BD07B40C-3255-4C40-8342-EB48F4B3621A}"/>
+                <a16:creationId xmlns:a16="http://schemas.microsoft.com/office/drawing/2014/main" id="{9103BC16-FA8F-46E2-B04F-3535378C3117}"/>
               </a:ext>
             </a:extLst>
           </p:cNvPr>
@@ -3378,7 +6970,7 @@
           <p:cNvPr id="15" name="">
             <a:extLst xmlns:a="http://schemas.openxmlformats.org/drawingml/2006/main">
               <a:ext uri="{FF2B5EF4-FFF2-40B4-BE49-F238E27FC236}">
-                <a16:creationId xmlns:a16="http://schemas.microsoft.com/office/drawing/2014/main" id="{F7CA5A61-65CC-4410-9CED-4B79034E6CCB}"/>
+                <a16:creationId xmlns:a16="http://schemas.microsoft.com/office/drawing/2014/main" id="{20C37BEF-F0AC-4BCD-AB2A-95B698A3367C}"/>
               </a:ext>
             </a:extLst>
           </p:cNvPr>
@@ -3426,7 +7018,7 @@
     </p:spTree>
     <p:extLst>
       <p:ext uri="{BB962C8B-B14F-4D97-AF65-F5344CB8AC3E}">
-        <p14:creationId xmlns:p14="http://schemas.microsoft.com/office/powerpoint/2010/main" val="1063137305"/>
+        <p14:creationId xmlns:p14="http://schemas.microsoft.com/office/powerpoint/2010/main" val="855688083"/>
       </p:ext>
     </p:extLst>
   </p:cSld>
@@ -3457,7 +7049,7 @@
           <p:cNvPr id="8" name="">
             <a:extLst xmlns:a="http://schemas.openxmlformats.org/drawingml/2006/main">
               <a:ext uri="{FF2B5EF4-FFF2-40B4-BE49-F238E27FC236}">
-                <a16:creationId xmlns:a16="http://schemas.microsoft.com/office/drawing/2014/main" id="{C4EB9231-6552-4585-9AD9-741E23FA962B}"/>
+                <a16:creationId xmlns:a16="http://schemas.microsoft.com/office/drawing/2014/main" id="{B26CDA1D-CAA5-45D7-96E5-BAC51DA9038E}"/>
               </a:ext>
             </a:extLst>
           </p:cNvPr>
@@ -3488,7 +7080,7 @@
           <p:cNvPr id="2" name="">
             <a:extLst xmlns:a="http://schemas.openxmlformats.org/drawingml/2006/main">
               <a:ext uri="{FF2B5EF4-FFF2-40B4-BE49-F238E27FC236}">
-                <a16:creationId xmlns:a16="http://schemas.microsoft.com/office/drawing/2014/main" id="{D21E8EB4-1B4D-465D-833D-91DBC87D04A9}"/>
+                <a16:creationId xmlns:a16="http://schemas.microsoft.com/office/drawing/2014/main" id="{83AEDAA3-A5D8-43EA-BC44-DB0A2DCF53CD}"/>
               </a:ext>
             </a:extLst>
           </p:cNvPr>
@@ -3538,7 +7130,7 @@
           <p:cNvPr id="3" name="">
             <a:extLst xmlns:a="http://schemas.openxmlformats.org/drawingml/2006/main">
               <a:ext uri="{FF2B5EF4-FFF2-40B4-BE49-F238E27FC236}">
-                <a16:creationId xmlns:a16="http://schemas.microsoft.com/office/drawing/2014/main" id="{F264576F-7A0F-4143-BE74-7D0A55680C63}"/>
+                <a16:creationId xmlns:a16="http://schemas.microsoft.com/office/drawing/2014/main" id="{6BCB99D3-3005-432E-8FFE-42AE92F9E6DF}"/>
               </a:ext>
             </a:extLst>
           </p:cNvPr>
@@ -3588,7 +7180,7 @@
           <p:cNvPr id="4" name="">
             <a:extLst xmlns:a="http://schemas.openxmlformats.org/drawingml/2006/main">
               <a:ext uri="{FF2B5EF4-FFF2-40B4-BE49-F238E27FC236}">
-                <a16:creationId xmlns:a16="http://schemas.microsoft.com/office/drawing/2014/main" id="{A2546FB9-76F7-4BAE-91DF-D0921C35F039}"/>
+                <a16:creationId xmlns:a16="http://schemas.microsoft.com/office/drawing/2014/main" id="{7BF857B2-3C6F-48DD-932B-E1077B31A26F}"/>
               </a:ext>
             </a:extLst>
           </p:cNvPr>
@@ -3623,7 +7215,7 @@
           <p:cNvPr id="5" name="">
             <a:extLst xmlns:a="http://schemas.openxmlformats.org/drawingml/2006/main">
               <a:ext uri="{FF2B5EF4-FFF2-40B4-BE49-F238E27FC236}">
-                <a16:creationId xmlns:a16="http://schemas.microsoft.com/office/drawing/2014/main" id="{0F777461-AA89-4B08-A73C-7E4F5C9C53C2}"/>
+                <a16:creationId xmlns:a16="http://schemas.microsoft.com/office/drawing/2014/main" id="{C783BEC8-C8AF-4FD4-BD87-FC4454D23F71}"/>
               </a:ext>
             </a:extLst>
           </p:cNvPr>
@@ -3673,7 +7265,7 @@
           <p:cNvPr id="6" name="">
             <a:extLst xmlns:a="http://schemas.openxmlformats.org/drawingml/2006/main">
               <a:ext uri="{FF2B5EF4-FFF2-40B4-BE49-F238E27FC236}">
-                <a16:creationId xmlns:a16="http://schemas.microsoft.com/office/drawing/2014/main" id="{D105BA4F-D53B-4975-88D5-76B528D0E042}"/>
+                <a16:creationId xmlns:a16="http://schemas.microsoft.com/office/drawing/2014/main" id="{90DC4C37-4E81-4469-9099-518E352FE7E3}"/>
               </a:ext>
             </a:extLst>
           </p:cNvPr>
@@ -3757,7 +7349,7 @@
           <p:cNvPr id="7" name="">
             <a:extLst xmlns:a="http://schemas.openxmlformats.org/drawingml/2006/main">
               <a:ext uri="{FF2B5EF4-FFF2-40B4-BE49-F238E27FC236}">
-                <a16:creationId xmlns:a16="http://schemas.microsoft.com/office/drawing/2014/main" id="{1CCFEA37-DE7E-46FA-846D-25DBCDAC36A2}"/>
+                <a16:creationId xmlns:a16="http://schemas.microsoft.com/office/drawing/2014/main" id="{329B076C-D6E2-4DFF-B053-15AECCD9AADE}"/>
               </a:ext>
             </a:extLst>
           </p:cNvPr>
@@ -3805,7 +7397,7 @@
     </p:spTree>
     <p:extLst>
       <p:ext uri="{BB962C8B-B14F-4D97-AF65-F5344CB8AC3E}">
-        <p14:creationId xmlns:p14="http://schemas.microsoft.com/office/powerpoint/2010/main" val="300249749"/>
+        <p14:creationId xmlns:p14="http://schemas.microsoft.com/office/powerpoint/2010/main" val="2065194425"/>
       </p:ext>
     </p:extLst>
   </p:cSld>
@@ -3836,7 +7428,7 @@
           <p:cNvPr id="18" name="">
             <a:extLst xmlns:a="http://schemas.openxmlformats.org/drawingml/2006/main">
               <a:ext uri="{FF2B5EF4-FFF2-40B4-BE49-F238E27FC236}">
-                <a16:creationId xmlns:a16="http://schemas.microsoft.com/office/drawing/2014/main" id="{79F4525E-46E7-4EDC-B65D-8F927EF83543}"/>
+                <a16:creationId xmlns:a16="http://schemas.microsoft.com/office/drawing/2014/main" id="{C194A6E4-3E92-470C-8A5E-884575ACFF83}"/>
               </a:ext>
             </a:extLst>
           </p:cNvPr>
@@ -3867,7 +7459,7 @@
           <p:cNvPr id="2" name="">
             <a:extLst xmlns:a="http://schemas.openxmlformats.org/drawingml/2006/main">
               <a:ext uri="{FF2B5EF4-FFF2-40B4-BE49-F238E27FC236}">
-                <a16:creationId xmlns:a16="http://schemas.microsoft.com/office/drawing/2014/main" id="{DE95696B-C655-4FD0-8936-5E05E011868F}"/>
+                <a16:creationId xmlns:a16="http://schemas.microsoft.com/office/drawing/2014/main" id="{984B2D34-7D4F-42FA-B723-0C8456547DF2}"/>
               </a:ext>
             </a:extLst>
           </p:cNvPr>
@@ -3917,7 +7509,7 @@
           <p:cNvPr id="3" name="">
             <a:extLst xmlns:a="http://schemas.openxmlformats.org/drawingml/2006/main">
               <a:ext uri="{FF2B5EF4-FFF2-40B4-BE49-F238E27FC236}">
-                <a16:creationId xmlns:a16="http://schemas.microsoft.com/office/drawing/2014/main" id="{20D4CF51-DF45-47CD-84F6-E0EDEF5B0915}"/>
+                <a16:creationId xmlns:a16="http://schemas.microsoft.com/office/drawing/2014/main" id="{0019A24C-404F-4B8A-8F3C-5D1D3E775F1C}"/>
               </a:ext>
             </a:extLst>
           </p:cNvPr>
@@ -3967,7 +7559,7 @@
           <p:cNvPr id="4" name="">
             <a:extLst xmlns:a="http://schemas.openxmlformats.org/drawingml/2006/main">
               <a:ext uri="{FF2B5EF4-FFF2-40B4-BE49-F238E27FC236}">
-                <a16:creationId xmlns:a16="http://schemas.microsoft.com/office/drawing/2014/main" id="{1730929A-705A-4E81-9730-648FB187043D}"/>
+                <a16:creationId xmlns:a16="http://schemas.microsoft.com/office/drawing/2014/main" id="{5F9A697B-E08D-489C-A711-FC4B2A3A5145}"/>
               </a:ext>
             </a:extLst>
           </p:cNvPr>
@@ -4000,7 +7592,7 @@
           <p:cNvPr id="5" name="">
             <a:extLst xmlns:a="http://schemas.openxmlformats.org/drawingml/2006/main">
               <a:ext uri="{FF2B5EF4-FFF2-40B4-BE49-F238E27FC236}">
-                <a16:creationId xmlns:a16="http://schemas.microsoft.com/office/drawing/2014/main" id="{1439732C-EC5D-4BC7-9A35-D1FB61B9489F}"/>
+                <a16:creationId xmlns:a16="http://schemas.microsoft.com/office/drawing/2014/main" id="{0727F5DA-4636-4A85-97C5-423B218B0DE5}"/>
               </a:ext>
             </a:extLst>
           </p:cNvPr>
@@ -4050,7 +7642,7 @@
           <p:cNvPr id="6" name="">
             <a:extLst xmlns:a="http://schemas.openxmlformats.org/drawingml/2006/main">
               <a:ext uri="{FF2B5EF4-FFF2-40B4-BE49-F238E27FC236}">
-                <a16:creationId xmlns:a16="http://schemas.microsoft.com/office/drawing/2014/main" id="{2557E282-B0AE-4B5B-952E-BC5E1ACD750E}"/>
+                <a16:creationId xmlns:a16="http://schemas.microsoft.com/office/drawing/2014/main" id="{7E696796-14FA-450B-9010-1FDC5F0A2CAD}"/>
               </a:ext>
             </a:extLst>
           </p:cNvPr>
@@ -4100,7 +7692,7 @@
           <p:cNvPr id="7" name="">
             <a:extLst xmlns:a="http://schemas.openxmlformats.org/drawingml/2006/main">
               <a:ext uri="{FF2B5EF4-FFF2-40B4-BE49-F238E27FC236}">
-                <a16:creationId xmlns:a16="http://schemas.microsoft.com/office/drawing/2014/main" id="{4B8A6B62-34DF-4931-9DB8-988A95B46BBD}"/>
+                <a16:creationId xmlns:a16="http://schemas.microsoft.com/office/drawing/2014/main" id="{0C55A6C0-7633-49C3-8328-75C862B6EEDA}"/>
               </a:ext>
             </a:extLst>
           </p:cNvPr>
@@ -4133,7 +7725,7 @@
           <p:cNvPr id="8" name="">
             <a:extLst xmlns:a="http://schemas.openxmlformats.org/drawingml/2006/main">
               <a:ext uri="{FF2B5EF4-FFF2-40B4-BE49-F238E27FC236}">
-                <a16:creationId xmlns:a16="http://schemas.microsoft.com/office/drawing/2014/main" id="{DB005DDE-23E4-4D9F-8BEF-684D8A3F1854}"/>
+                <a16:creationId xmlns:a16="http://schemas.microsoft.com/office/drawing/2014/main" id="{C4393E01-2BF1-4CD1-8EEA-77224EC3CE72}"/>
               </a:ext>
             </a:extLst>
           </p:cNvPr>
@@ -4183,7 +7775,7 @@
           <p:cNvPr id="9" name="">
             <a:extLst xmlns:a="http://schemas.openxmlformats.org/drawingml/2006/main">
               <a:ext uri="{FF2B5EF4-FFF2-40B4-BE49-F238E27FC236}">
-                <a16:creationId xmlns:a16="http://schemas.microsoft.com/office/drawing/2014/main" id="{1BA77951-C395-4B93-8DD4-412E711FCD97}"/>
+                <a16:creationId xmlns:a16="http://schemas.microsoft.com/office/drawing/2014/main" id="{E9CB0DA2-7722-4F12-8FC4-24F27960C062}"/>
               </a:ext>
             </a:extLst>
           </p:cNvPr>
@@ -4233,7 +7825,7 @@
           <p:cNvPr id="10" name="">
             <a:extLst xmlns:a="http://schemas.openxmlformats.org/drawingml/2006/main">
               <a:ext uri="{FF2B5EF4-FFF2-40B4-BE49-F238E27FC236}">
-                <a16:creationId xmlns:a16="http://schemas.microsoft.com/office/drawing/2014/main" id="{3E09CBF1-5325-4E17-8E8F-348631389286}"/>
+                <a16:creationId xmlns:a16="http://schemas.microsoft.com/office/drawing/2014/main" id="{28CEB6AB-D360-4F20-B07E-C475228F4FF7}"/>
               </a:ext>
             </a:extLst>
           </p:cNvPr>
@@ -4266,7 +7858,7 @@
           <p:cNvPr id="11" name="">
             <a:extLst xmlns:a="http://schemas.openxmlformats.org/drawingml/2006/main">
               <a:ext uri="{FF2B5EF4-FFF2-40B4-BE49-F238E27FC236}">
-                <a16:creationId xmlns:a16="http://schemas.microsoft.com/office/drawing/2014/main" id="{B7961CD7-C3A7-4491-8BB7-86E229C22AEF}"/>
+                <a16:creationId xmlns:a16="http://schemas.microsoft.com/office/drawing/2014/main" id="{01F01EFA-5408-4666-A16F-FADD32EE0AFC}"/>
               </a:ext>
             </a:extLst>
           </p:cNvPr>
@@ -4316,7 +7908,7 @@
           <p:cNvPr id="12" name="">
             <a:extLst xmlns:a="http://schemas.openxmlformats.org/drawingml/2006/main">
               <a:ext uri="{FF2B5EF4-FFF2-40B4-BE49-F238E27FC236}">
-                <a16:creationId xmlns:a16="http://schemas.microsoft.com/office/drawing/2014/main" id="{315E6956-5BC1-4E94-8D2A-7ECA995DA5C5}"/>
+                <a16:creationId xmlns:a16="http://schemas.microsoft.com/office/drawing/2014/main" id="{B8E4F013-F9CC-4113-8032-DCA8ABFAD402}"/>
               </a:ext>
             </a:extLst>
           </p:cNvPr>
@@ -4366,7 +7958,7 @@
           <p:cNvPr id="13" name="">
             <a:extLst xmlns:a="http://schemas.openxmlformats.org/drawingml/2006/main">
               <a:ext uri="{FF2B5EF4-FFF2-40B4-BE49-F238E27FC236}">
-                <a16:creationId xmlns:a16="http://schemas.microsoft.com/office/drawing/2014/main" id="{6644F7F9-3B5B-4CE8-952F-5572A8EBA026}"/>
+                <a16:creationId xmlns:a16="http://schemas.microsoft.com/office/drawing/2014/main" id="{348EB3C2-8F2F-46AD-A046-1C5F425B1C1F}"/>
               </a:ext>
             </a:extLst>
           </p:cNvPr>
@@ -4399,7 +7991,7 @@
           <p:cNvPr id="14" name="">
             <a:extLst xmlns:a="http://schemas.openxmlformats.org/drawingml/2006/main">
               <a:ext uri="{FF2B5EF4-FFF2-40B4-BE49-F238E27FC236}">
-                <a16:creationId xmlns:a16="http://schemas.microsoft.com/office/drawing/2014/main" id="{4299276E-38E1-46C4-B0C6-31784C36EC8B}"/>
+                <a16:creationId xmlns:a16="http://schemas.microsoft.com/office/drawing/2014/main" id="{A881D607-C266-4D67-BC58-320948AC1D41}"/>
               </a:ext>
             </a:extLst>
           </p:cNvPr>
@@ -4449,7 +8041,7 @@
           <p:cNvPr id="15" name="">
             <a:extLst xmlns:a="http://schemas.openxmlformats.org/drawingml/2006/main">
               <a:ext uri="{FF2B5EF4-FFF2-40B4-BE49-F238E27FC236}">
-                <a16:creationId xmlns:a16="http://schemas.microsoft.com/office/drawing/2014/main" id="{3D6EF2A8-665C-4A45-91DC-572164ED60B1}"/>
+                <a16:creationId xmlns:a16="http://schemas.microsoft.com/office/drawing/2014/main" id="{BB4A3E72-216B-4C62-878B-F1E5C4E0FE69}"/>
               </a:ext>
             </a:extLst>
           </p:cNvPr>
@@ -4499,7 +8091,7 @@
           <p:cNvPr id="16" name="">
             <a:extLst xmlns:a="http://schemas.openxmlformats.org/drawingml/2006/main">
               <a:ext uri="{FF2B5EF4-FFF2-40B4-BE49-F238E27FC236}">
-                <a16:creationId xmlns:a16="http://schemas.microsoft.com/office/drawing/2014/main" id="{1E1D0D3D-FA9C-4C3A-9230-13D3761A8478}"/>
+                <a16:creationId xmlns:a16="http://schemas.microsoft.com/office/drawing/2014/main" id="{6893C243-47DD-4A9B-B502-4E16166C6084}"/>
               </a:ext>
             </a:extLst>
           </p:cNvPr>
@@ -4532,7 +8124,7 @@
           <p:cNvPr id="17" name="">
             <a:extLst xmlns:a="http://schemas.openxmlformats.org/drawingml/2006/main">
               <a:ext uri="{FF2B5EF4-FFF2-40B4-BE49-F238E27FC236}">
-                <a16:creationId xmlns:a16="http://schemas.microsoft.com/office/drawing/2014/main" id="{68BB7FDC-3FF8-4607-A660-8CF1AB60711D}"/>
+                <a16:creationId xmlns:a16="http://schemas.microsoft.com/office/drawing/2014/main" id="{CD89E472-2EF2-4D35-B9DD-1FAF51DAFE2D}"/>
               </a:ext>
             </a:extLst>
           </p:cNvPr>
@@ -4580,7 +8172,7 @@
     </p:spTree>
     <p:extLst>
       <p:ext uri="{BB962C8B-B14F-4D97-AF65-F5344CB8AC3E}">
-        <p14:creationId xmlns:p14="http://schemas.microsoft.com/office/powerpoint/2010/main" val="65653850"/>
+        <p14:creationId xmlns:p14="http://schemas.microsoft.com/office/powerpoint/2010/main" val="1110113299"/>
       </p:ext>
     </p:extLst>
   </p:cSld>
@@ -4611,7 +8203,7 @@
           <p:cNvPr id="8" name="">
             <a:extLst xmlns:a="http://schemas.openxmlformats.org/drawingml/2006/main">
               <a:ext uri="{FF2B5EF4-FFF2-40B4-BE49-F238E27FC236}">
-                <a16:creationId xmlns:a16="http://schemas.microsoft.com/office/drawing/2014/main" id="{3915A104-D65B-4E75-8662-C79D1C3E6254}"/>
+                <a16:creationId xmlns:a16="http://schemas.microsoft.com/office/drawing/2014/main" id="{45D60B4C-E7A2-4D51-B3AD-803A0F02B00F}"/>
               </a:ext>
             </a:extLst>
           </p:cNvPr>
@@ -4642,7 +8234,7 @@
           <p:cNvPr id="2" name="">
             <a:extLst xmlns:a="http://schemas.openxmlformats.org/drawingml/2006/main">
               <a:ext uri="{FF2B5EF4-FFF2-40B4-BE49-F238E27FC236}">
-                <a16:creationId xmlns:a16="http://schemas.microsoft.com/office/drawing/2014/main" id="{F31E0302-0B17-4E3E-B56A-7EC22F2842BB}"/>
+                <a16:creationId xmlns:a16="http://schemas.microsoft.com/office/drawing/2014/main" id="{0E9DE8CE-D81E-42E3-AB94-8C0E58D28279}"/>
               </a:ext>
             </a:extLst>
           </p:cNvPr>
@@ -4692,7 +8284,7 @@
           <p:cNvPr id="3" name="">
             <a:extLst xmlns:a="http://schemas.openxmlformats.org/drawingml/2006/main">
               <a:ext uri="{FF2B5EF4-FFF2-40B4-BE49-F238E27FC236}">
-                <a16:creationId xmlns:a16="http://schemas.microsoft.com/office/drawing/2014/main" id="{8CA813CE-6A2B-405C-9A2F-C84547928401}"/>
+                <a16:creationId xmlns:a16="http://schemas.microsoft.com/office/drawing/2014/main" id="{51AAFA78-AC1D-4CAC-A303-9E34DDC67251}"/>
               </a:ext>
             </a:extLst>
           </p:cNvPr>
@@ -4742,7 +8334,7 @@
           <p:cNvPr id="4" name="">
             <a:extLst xmlns:a="http://schemas.openxmlformats.org/drawingml/2006/main">
               <a:ext uri="{FF2B5EF4-FFF2-40B4-BE49-F238E27FC236}">
-                <a16:creationId xmlns:a16="http://schemas.microsoft.com/office/drawing/2014/main" id="{7CC97002-E36D-4F17-9572-7947BD17D20F}"/>
+                <a16:creationId xmlns:a16="http://schemas.microsoft.com/office/drawing/2014/main" id="{93BE2DEC-9D46-4F46-BE1D-8B4C860915C7}"/>
               </a:ext>
             </a:extLst>
           </p:cNvPr>
@@ -4775,7 +8367,7 @@
           <p:cNvPr id="5" name="">
             <a:extLst xmlns:a="http://schemas.openxmlformats.org/drawingml/2006/main">
               <a:ext uri="{FF2B5EF4-FFF2-40B4-BE49-F238E27FC236}">
-                <a16:creationId xmlns:a16="http://schemas.microsoft.com/office/drawing/2014/main" id="{307D043F-4592-43E7-B7DA-4EA8BDD47E90}"/>
+                <a16:creationId xmlns:a16="http://schemas.microsoft.com/office/drawing/2014/main" id="{2FAF7589-616D-432B-B412-A264466386D2}"/>
               </a:ext>
             </a:extLst>
           </p:cNvPr>
@@ -4825,7 +8417,7 @@
           <p:cNvPr id="6" name="">
             <a:extLst xmlns:a="http://schemas.openxmlformats.org/drawingml/2006/main">
               <a:ext uri="{FF2B5EF4-FFF2-40B4-BE49-F238E27FC236}">
-                <a16:creationId xmlns:a16="http://schemas.microsoft.com/office/drawing/2014/main" id="{1D14E467-5AF1-4E0A-B9C8-6668BC4C7D29}"/>
+                <a16:creationId xmlns:a16="http://schemas.microsoft.com/office/drawing/2014/main" id="{23C29E86-8802-43DD-9AB5-AD922C8B593B}"/>
               </a:ext>
             </a:extLst>
           </p:cNvPr>
@@ -4875,7 +8467,7 @@
           <p:cNvPr id="7" name="">
             <a:extLst xmlns:a="http://schemas.openxmlformats.org/drawingml/2006/main">
               <a:ext uri="{FF2B5EF4-FFF2-40B4-BE49-F238E27FC236}">
-                <a16:creationId xmlns:a16="http://schemas.microsoft.com/office/drawing/2014/main" id="{614CD7A0-10E5-4015-A526-60A41CD16128}"/>
+                <a16:creationId xmlns:a16="http://schemas.microsoft.com/office/drawing/2014/main" id="{8824EE26-A6E4-41B3-BBDD-8B15A2B4A323}"/>
               </a:ext>
             </a:extLst>
           </p:cNvPr>
@@ -4923,7 +8515,7 @@
     </p:spTree>
     <p:extLst>
       <p:ext uri="{BB962C8B-B14F-4D97-AF65-F5344CB8AC3E}">
-        <p14:creationId xmlns:p14="http://schemas.microsoft.com/office/powerpoint/2010/main" val="1902463685"/>
+        <p14:creationId xmlns:p14="http://schemas.microsoft.com/office/powerpoint/2010/main" val="365197657"/>
       </p:ext>
     </p:extLst>
   </p:cSld>
@@ -4954,7 +8546,7 @@
           <p:cNvPr id="14" name="">
             <a:extLst xmlns:a="http://schemas.openxmlformats.org/drawingml/2006/main">
               <a:ext uri="{FF2B5EF4-FFF2-40B4-BE49-F238E27FC236}">
-                <a16:creationId xmlns:a16="http://schemas.microsoft.com/office/drawing/2014/main" id="{B5EDECDE-4FDB-465E-AF4C-0DDA67A7923D}"/>
+                <a16:creationId xmlns:a16="http://schemas.microsoft.com/office/drawing/2014/main" id="{8E4F7A14-8BF8-4816-866F-3B162D32C96F}"/>
               </a:ext>
             </a:extLst>
           </p:cNvPr>
@@ -4985,7 +8577,7 @@
           <p:cNvPr id="2" name="">
             <a:extLst xmlns:a="http://schemas.openxmlformats.org/drawingml/2006/main">
               <a:ext uri="{FF2B5EF4-FFF2-40B4-BE49-F238E27FC236}">
-                <a16:creationId xmlns:a16="http://schemas.microsoft.com/office/drawing/2014/main" id="{1B517830-EC68-4C07-AF75-CB58A9D60B81}"/>
+                <a16:creationId xmlns:a16="http://schemas.microsoft.com/office/drawing/2014/main" id="{F2233C26-3A90-49CE-9EB4-BE851CB07768}"/>
               </a:ext>
             </a:extLst>
           </p:cNvPr>
@@ -5035,7 +8627,7 @@
           <p:cNvPr id="3" name="">
             <a:extLst xmlns:a="http://schemas.openxmlformats.org/drawingml/2006/main">
               <a:ext uri="{FF2B5EF4-FFF2-40B4-BE49-F238E27FC236}">
-                <a16:creationId xmlns:a16="http://schemas.microsoft.com/office/drawing/2014/main" id="{7DC6B915-E1DB-408D-927A-B8A6E22F5A0F}"/>
+                <a16:creationId xmlns:a16="http://schemas.microsoft.com/office/drawing/2014/main" id="{CDEC857C-8648-4781-9F01-44614D965FFE}"/>
               </a:ext>
             </a:extLst>
           </p:cNvPr>
@@ -5085,7 +8677,7 @@
           <p:cNvPr id="4" name="">
             <a:extLst xmlns:a="http://schemas.openxmlformats.org/drawingml/2006/main">
               <a:ext uri="{FF2B5EF4-FFF2-40B4-BE49-F238E27FC236}">
-                <a16:creationId xmlns:a16="http://schemas.microsoft.com/office/drawing/2014/main" id="{5CC3C076-8F1F-43E8-9339-CA815F849DE5}"/>
+                <a16:creationId xmlns:a16="http://schemas.microsoft.com/office/drawing/2014/main" id="{683A1906-3ABF-43D6-A975-B904B1C31AF2}"/>
               </a:ext>
             </a:extLst>
           </p:cNvPr>
@@ -5118,7 +8710,7 @@
           <p:cNvPr id="5" name="">
             <a:extLst xmlns:a="http://schemas.openxmlformats.org/drawingml/2006/main">
               <a:ext uri="{FF2B5EF4-FFF2-40B4-BE49-F238E27FC236}">
-                <a16:creationId xmlns:a16="http://schemas.microsoft.com/office/drawing/2014/main" id="{E2DBFEA0-6A92-40E3-B621-999811329020}"/>
+                <a16:creationId xmlns:a16="http://schemas.microsoft.com/office/drawing/2014/main" id="{24D84D5E-FE9D-42C8-A969-57D8C05CA590}"/>
               </a:ext>
             </a:extLst>
           </p:cNvPr>
@@ -5168,7 +8760,7 @@
           <p:cNvPr id="6" name="">
             <a:extLst xmlns:a="http://schemas.openxmlformats.org/drawingml/2006/main">
               <a:ext uri="{FF2B5EF4-FFF2-40B4-BE49-F238E27FC236}">
-                <a16:creationId xmlns:a16="http://schemas.microsoft.com/office/drawing/2014/main" id="{32134535-BABE-469D-B2E5-D88883D2851D}"/>
+                <a16:creationId xmlns:a16="http://schemas.microsoft.com/office/drawing/2014/main" id="{466E6147-25AD-44F5-89E9-67C08FC2A43B}"/>
               </a:ext>
             </a:extLst>
           </p:cNvPr>
@@ -5218,7 +8810,7 @@
           <p:cNvPr id="7" name="">
             <a:extLst xmlns:a="http://schemas.openxmlformats.org/drawingml/2006/main">
               <a:ext uri="{FF2B5EF4-FFF2-40B4-BE49-F238E27FC236}">
-                <a16:creationId xmlns:a16="http://schemas.microsoft.com/office/drawing/2014/main" id="{6EE218E9-0BFA-4030-915A-2AB4B50B564A}"/>
+                <a16:creationId xmlns:a16="http://schemas.microsoft.com/office/drawing/2014/main" id="{F2704535-9DF1-4466-9518-BA614A90F888}"/>
               </a:ext>
             </a:extLst>
           </p:cNvPr>
@@ -5251,7 +8843,7 @@
           <p:cNvPr id="8" name="">
             <a:extLst xmlns:a="http://schemas.openxmlformats.org/drawingml/2006/main">
               <a:ext uri="{FF2B5EF4-FFF2-40B4-BE49-F238E27FC236}">
-                <a16:creationId xmlns:a16="http://schemas.microsoft.com/office/drawing/2014/main" id="{0B9F7032-C43F-470E-9D17-CF44B5A7AFE7}"/>
+                <a16:creationId xmlns:a16="http://schemas.microsoft.com/office/drawing/2014/main" id="{969669A4-947C-480B-A127-3A9A8EF55C24}"/>
               </a:ext>
             </a:extLst>
           </p:cNvPr>
@@ -5301,7 +8893,7 @@
           <p:cNvPr id="9" name="">
             <a:extLst xmlns:a="http://schemas.openxmlformats.org/drawingml/2006/main">
               <a:ext uri="{FF2B5EF4-FFF2-40B4-BE49-F238E27FC236}">
-                <a16:creationId xmlns:a16="http://schemas.microsoft.com/office/drawing/2014/main" id="{73E096B7-20E2-47F5-9742-822EDC41F353}"/>
+                <a16:creationId xmlns:a16="http://schemas.microsoft.com/office/drawing/2014/main" id="{1C356889-415D-4F89-8FE1-8C63481CA26F}"/>
               </a:ext>
             </a:extLst>
           </p:cNvPr>
@@ -5351,7 +8943,7 @@
           <p:cNvPr id="10" name="">
             <a:extLst xmlns:a="http://schemas.openxmlformats.org/drawingml/2006/main">
               <a:ext uri="{FF2B5EF4-FFF2-40B4-BE49-F238E27FC236}">
-                <a16:creationId xmlns:a16="http://schemas.microsoft.com/office/drawing/2014/main" id="{4079B749-1FC2-4248-A674-C46F09B02793}"/>
+                <a16:creationId xmlns:a16="http://schemas.microsoft.com/office/drawing/2014/main" id="{7139788D-ADB7-473C-9DBA-4168B4C54D79}"/>
               </a:ext>
             </a:extLst>
           </p:cNvPr>
@@ -5384,7 +8976,7 @@
           <p:cNvPr id="11" name="">
             <a:extLst xmlns:a="http://schemas.openxmlformats.org/drawingml/2006/main">
               <a:ext uri="{FF2B5EF4-FFF2-40B4-BE49-F238E27FC236}">
-                <a16:creationId xmlns:a16="http://schemas.microsoft.com/office/drawing/2014/main" id="{63A7EFF0-25FB-477A-985D-884BB8B5E283}"/>
+                <a16:creationId xmlns:a16="http://schemas.microsoft.com/office/drawing/2014/main" id="{98277A45-FA53-4AC9-A22C-6A1DF2163034}"/>
               </a:ext>
             </a:extLst>
           </p:cNvPr>
@@ -5434,7 +9026,7 @@
           <p:cNvPr id="12" name="">
             <a:extLst xmlns:a="http://schemas.openxmlformats.org/drawingml/2006/main">
               <a:ext uri="{FF2B5EF4-FFF2-40B4-BE49-F238E27FC236}">
-                <a16:creationId xmlns:a16="http://schemas.microsoft.com/office/drawing/2014/main" id="{AAC8C854-5C58-4CFD-81DA-C2208DCE06FD}"/>
+                <a16:creationId xmlns:a16="http://schemas.microsoft.com/office/drawing/2014/main" id="{77EC5B01-2F38-48C2-A69B-FD0B9D12376B}"/>
               </a:ext>
             </a:extLst>
           </p:cNvPr>
@@ -5484,7 +9076,7 @@
           <p:cNvPr id="13" name="">
             <a:extLst xmlns:a="http://schemas.openxmlformats.org/drawingml/2006/main">
               <a:ext uri="{FF2B5EF4-FFF2-40B4-BE49-F238E27FC236}">
-                <a16:creationId xmlns:a16="http://schemas.microsoft.com/office/drawing/2014/main" id="{59935F95-553D-47CC-A694-4A565A4E700D}"/>
+                <a16:creationId xmlns:a16="http://schemas.microsoft.com/office/drawing/2014/main" id="{19184DC2-229B-4167-9BBA-156EF93680A4}"/>
               </a:ext>
             </a:extLst>
           </p:cNvPr>
@@ -5532,7 +9124,350 @@
     </p:spTree>
     <p:extLst>
       <p:ext uri="{BB962C8B-B14F-4D97-AF65-F5344CB8AC3E}">
-        <p14:creationId xmlns:p14="http://schemas.microsoft.com/office/powerpoint/2010/main" val="840491904"/>
+        <p14:creationId xmlns:p14="http://schemas.microsoft.com/office/powerpoint/2010/main" val="1087925293"/>
+      </p:ext>
+    </p:extLst>
+  </p:cSld>
+</p:sld>
+</file>
+
+<file path=ppt/slides/slide9.xml><?xml version="1.0" encoding="utf-8"?>
+<p:sld xmlns:p="http://schemas.openxmlformats.org/presentationml/2006/main">
+  <p:cSld>
+    <p:bg>
+      <p:bgPr>
+        <a:solidFill xmlns:a="http://schemas.openxmlformats.org/drawingml/2006/main">
+          <a:srgbClr val="FFFCF8"/>
+        </a:solidFill>
+      </p:bgPr>
+    </p:bg>
+    <p:spTree>
+      <p:nvGrpSpPr>
+        <p:cNvPr id="1" name=""/>
+        <p:cNvGrpSpPr/>
+        <p:nvPr/>
+      </p:nvGrpSpPr>
+      <p:grpSpPr>
+        <a:xfrm xmlns:a="http://schemas.openxmlformats.org/drawingml/2006/main"/>
+      </p:grpSpPr>
+      <p:sp>
+        <p:nvSpPr>
+          <p:cNvPr id="8" name="">
+            <a:extLst xmlns:a="http://schemas.openxmlformats.org/drawingml/2006/main">
+              <a:ext uri="{FF2B5EF4-FFF2-40B4-BE49-F238E27FC236}">
+                <a16:creationId xmlns:a16="http://schemas.microsoft.com/office/drawing/2014/main" id="{22D54B30-4C86-4710-8EC3-658FFE371597}"/>
+              </a:ext>
+            </a:extLst>
+          </p:cNvPr>
+          <p:cNvSpPr>
+            <a:spLocks xmlns:a="http://schemas.openxmlformats.org/drawingml/2006/main" noGrp="1"/>
+          </p:cNvSpPr>
+          <p:nvPr/>
+        </p:nvSpPr>
+        <p:spPr>
+          <a:xfrm xmlns:a="http://schemas.openxmlformats.org/drawingml/2006/main">
+            <a:off x="0" y="0"/>
+            <a:ext cx="171450" cy="6858000"/>
+          </a:xfrm>
+          <a:prstGeom xmlns:a="http://schemas.openxmlformats.org/drawingml/2006/main" prst="rect">
+            <a:avLst/>
+          </a:prstGeom>
+          <a:solidFill xmlns:a="http://schemas.openxmlformats.org/drawingml/2006/main">
+            <a:srgbClr val="6657E8"/>
+          </a:solidFill>
+          <a:ln xmlns:a="http://schemas.openxmlformats.org/drawingml/2006/main" w="0">
+            <a:noFill/>
+            <a:prstDash val="solid"/>
+          </a:ln>
+        </p:spPr>
+      </p:sp>
+      <p:sp>
+        <p:nvSpPr>
+          <p:cNvPr id="2" name="">
+            <a:extLst xmlns:a="http://schemas.openxmlformats.org/drawingml/2006/main">
+              <a:ext uri="{FF2B5EF4-FFF2-40B4-BE49-F238E27FC236}">
+                <a16:creationId xmlns:a16="http://schemas.microsoft.com/office/drawing/2014/main" id="{5EEB416A-DF69-4A57-AF38-8BA56C5678FD}"/>
+              </a:ext>
+            </a:extLst>
+          </p:cNvPr>
+          <p:cNvSpPr>
+            <a:spLocks xmlns:a="http://schemas.openxmlformats.org/drawingml/2006/main" noGrp="1"/>
+          </p:cNvSpPr>
+          <p:nvPr/>
+        </p:nvSpPr>
+        <p:spPr>
+          <a:xfrm xmlns:a="http://schemas.openxmlformats.org/drawingml/2006/main">
+            <a:off x="647700" y="457200"/>
+            <a:ext cx="10096500" cy="552450"/>
+          </a:xfrm>
+          <a:prstGeom xmlns:a="http://schemas.openxmlformats.org/drawingml/2006/main" prst="rect">
+            <a:avLst/>
+          </a:prstGeom>
+          <a:noFill xmlns:a="http://schemas.openxmlformats.org/drawingml/2006/main"/>
+          <a:ln xmlns:a="http://schemas.openxmlformats.org/drawingml/2006/main" w="0">
+            <a:noFill/>
+            <a:prstDash val="solid"/>
+          </a:ln>
+        </p:spPr>
+        <p:txBody>
+          <a:bodyPr xmlns:a="http://schemas.openxmlformats.org/drawingml/2006/main"/>
+          <a:lstStyle xmlns:a="http://schemas.openxmlformats.org/drawingml/2006/main"/>
+          <a:p xmlns:a="http://schemas.openxmlformats.org/drawingml/2006/main">
+            <a:pPr>
+              <a:defRPr sz="2700" b="1">
+                <a:solidFill>
+                  <a:srgbClr val="182235"/>
+                </a:solidFill>
+              </a:defRPr>
+            </a:pPr>
+            <a:r>
+              <a:rPr sz="2700" b="1">
+                <a:solidFill>
+                  <a:srgbClr val="182235"/>
+                </a:solidFill>
+              </a:rPr>
+              <a:t>왜 배우는지 알면 실습 방향이 보입니다</a:t>
+            </a:r>
+          </a:p>
+        </p:txBody>
+      </p:sp>
+      <p:sp>
+        <p:nvSpPr>
+          <p:cNvPr id="3" name="">
+            <a:extLst xmlns:a="http://schemas.openxmlformats.org/drawingml/2006/main">
+              <a:ext uri="{FF2B5EF4-FFF2-40B4-BE49-F238E27FC236}">
+                <a16:creationId xmlns:a16="http://schemas.microsoft.com/office/drawing/2014/main" id="{9AD396B8-01E9-4426-9349-A1A2A6F437A0}"/>
+              </a:ext>
+            </a:extLst>
+          </p:cNvPr>
+          <p:cNvSpPr>
+            <a:spLocks xmlns:a="http://schemas.openxmlformats.org/drawingml/2006/main" noGrp="1"/>
+          </p:cNvSpPr>
+          <p:nvPr/>
+        </p:nvSpPr>
+        <p:spPr>
+          <a:xfrm xmlns:a="http://schemas.openxmlformats.org/drawingml/2006/main">
+            <a:off x="666750" y="6419850"/>
+            <a:ext cx="10096500" cy="209550"/>
+          </a:xfrm>
+          <a:prstGeom xmlns:a="http://schemas.openxmlformats.org/drawingml/2006/main" prst="rect">
+            <a:avLst/>
+          </a:prstGeom>
+          <a:noFill xmlns:a="http://schemas.openxmlformats.org/drawingml/2006/main"/>
+          <a:ln xmlns:a="http://schemas.openxmlformats.org/drawingml/2006/main" w="0">
+            <a:noFill/>
+            <a:prstDash val="solid"/>
+          </a:ln>
+        </p:spPr>
+        <p:txBody>
+          <a:bodyPr xmlns:a="http://schemas.openxmlformats.org/drawingml/2006/main"/>
+          <a:lstStyle xmlns:a="http://schemas.openxmlformats.org/drawingml/2006/main"/>
+          <a:p xmlns:a="http://schemas.openxmlformats.org/drawingml/2006/main">
+            <a:pPr>
+              <a:defRPr sz="975">
+                <a:solidFill>
+                  <a:srgbClr val="657083"/>
+                </a:solidFill>
+              </a:defRPr>
+            </a:pPr>
+            <a:r>
+              <a:rPr sz="975">
+                <a:solidFill>
+                  <a:srgbClr val="657083"/>
+                </a:solidFill>
+              </a:rPr>
+              <a:t>EDU 웹개발 교육 플랫폼  ·  09</a:t>
+            </a:r>
+          </a:p>
+        </p:txBody>
+      </p:sp>
+      <p:sp>
+        <p:nvSpPr>
+          <p:cNvPr id="4" name="">
+            <a:extLst xmlns:a="http://schemas.openxmlformats.org/drawingml/2006/main">
+              <a:ext uri="{FF2B5EF4-FFF2-40B4-BE49-F238E27FC236}">
+                <a16:creationId xmlns:a16="http://schemas.microsoft.com/office/drawing/2014/main" id="{85829B44-B81F-4C92-A43B-A577A900233A}"/>
+              </a:ext>
+            </a:extLst>
+          </p:cNvPr>
+          <p:cNvSpPr>
+            <a:spLocks xmlns:a="http://schemas.openxmlformats.org/drawingml/2006/main" noGrp="1"/>
+          </p:cNvSpPr>
+          <p:nvPr/>
+        </p:nvSpPr>
+        <p:spPr>
+          <a:xfrm xmlns:a="http://schemas.openxmlformats.org/drawingml/2006/main">
+            <a:off x="685800" y="1381125"/>
+            <a:ext cx="10820400" cy="1809750"/>
+          </a:xfrm>
+          <a:prstGeom xmlns:a="http://schemas.openxmlformats.org/drawingml/2006/main" prst="roundRect">
+            <a:avLst>
+              <a:gd name="adj" fmla="val 6316"/>
+            </a:avLst>
+          </a:prstGeom>
+          <a:solidFill xmlns:a="http://schemas.openxmlformats.org/drawingml/2006/main">
+            <a:srgbClr val="EEEAFE"/>
+          </a:solidFill>
+          <a:ln xmlns:a="http://schemas.openxmlformats.org/drawingml/2006/main" w="0">
+            <a:noFill/>
+            <a:prstDash val="solid"/>
+          </a:ln>
+        </p:spPr>
+      </p:sp>
+      <p:sp>
+        <p:nvSpPr>
+          <p:cNvPr id="5" name="">
+            <a:extLst xmlns:a="http://schemas.openxmlformats.org/drawingml/2006/main">
+              <a:ext uri="{FF2B5EF4-FFF2-40B4-BE49-F238E27FC236}">
+                <a16:creationId xmlns:a16="http://schemas.microsoft.com/office/drawing/2014/main" id="{BD206F53-5B76-44F9-89BC-92778F7AD768}"/>
+              </a:ext>
+            </a:extLst>
+          </p:cNvPr>
+          <p:cNvSpPr>
+            <a:spLocks xmlns:a="http://schemas.openxmlformats.org/drawingml/2006/main" noGrp="1"/>
+          </p:cNvSpPr>
+          <p:nvPr/>
+        </p:nvSpPr>
+        <p:spPr>
+          <a:xfrm xmlns:a="http://schemas.openxmlformats.org/drawingml/2006/main">
+            <a:off x="1066800" y="1762125"/>
+            <a:ext cx="10058400" cy="1143000"/>
+          </a:xfrm>
+          <a:prstGeom xmlns:a="http://schemas.openxmlformats.org/drawingml/2006/main" prst="rect">
+            <a:avLst/>
+          </a:prstGeom>
+          <a:noFill xmlns:a="http://schemas.openxmlformats.org/drawingml/2006/main"/>
+          <a:ln xmlns:a="http://schemas.openxmlformats.org/drawingml/2006/main" w="0">
+            <a:noFill/>
+            <a:prstDash val="solid"/>
+          </a:ln>
+        </p:spPr>
+        <p:txBody>
+          <a:bodyPr xmlns:a="http://schemas.openxmlformats.org/drawingml/2006/main"/>
+          <a:lstStyle xmlns:a="http://schemas.openxmlformats.org/drawingml/2006/main"/>
+          <a:p xmlns:a="http://schemas.openxmlformats.org/drawingml/2006/main">
+            <a:pPr>
+              <a:defRPr sz="1875">
+                <a:solidFill>
+                  <a:srgbClr val="182235"/>
+                </a:solidFill>
+              </a:defRPr>
+            </a:pPr>
+            <a:r>
+              <a:rPr sz="1875">
+                <a:solidFill>
+                  <a:srgbClr val="182235"/>
+                </a:solidFill>
+              </a:rPr>
+              <a:t>AI는 마음을 읽지 못합니다. 위치, 목표, 유지 범위와 확인 방법이 분명할수록 결과가 정확하고 안전해집니다.</a:t>
+            </a:r>
+          </a:p>
+        </p:txBody>
+      </p:sp>
+      <p:sp>
+        <p:nvSpPr>
+          <p:cNvPr id="6" name="">
+            <a:extLst xmlns:a="http://schemas.openxmlformats.org/drawingml/2006/main">
+              <a:ext uri="{FF2B5EF4-FFF2-40B4-BE49-F238E27FC236}">
+                <a16:creationId xmlns:a16="http://schemas.microsoft.com/office/drawing/2014/main" id="{B4F94BD4-5B73-4625-9689-3DE06B75030C}"/>
+              </a:ext>
+            </a:extLst>
+          </p:cNvPr>
+          <p:cNvSpPr>
+            <a:spLocks xmlns:a="http://schemas.openxmlformats.org/drawingml/2006/main" noGrp="1"/>
+          </p:cNvSpPr>
+          <p:nvPr/>
+        </p:nvSpPr>
+        <p:spPr>
+          <a:xfrm xmlns:a="http://schemas.openxmlformats.org/drawingml/2006/main">
+            <a:off x="838200" y="3714750"/>
+            <a:ext cx="2476500" cy="323850"/>
+          </a:xfrm>
+          <a:prstGeom xmlns:a="http://schemas.openxmlformats.org/drawingml/2006/main" prst="rect">
+            <a:avLst/>
+          </a:prstGeom>
+          <a:noFill xmlns:a="http://schemas.openxmlformats.org/drawingml/2006/main"/>
+          <a:ln xmlns:a="http://schemas.openxmlformats.org/drawingml/2006/main" w="0">
+            <a:noFill/>
+            <a:prstDash val="solid"/>
+          </a:ln>
+        </p:spPr>
+        <p:txBody>
+          <a:bodyPr xmlns:a="http://schemas.openxmlformats.org/drawingml/2006/main"/>
+          <a:lstStyle xmlns:a="http://schemas.openxmlformats.org/drawingml/2006/main"/>
+          <a:p xmlns:a="http://schemas.openxmlformats.org/drawingml/2006/main">
+            <a:pPr>
+              <a:defRPr sz="1575" b="1">
+                <a:solidFill>
+                  <a:srgbClr val="6657E8"/>
+                </a:solidFill>
+              </a:defRPr>
+            </a:pPr>
+            <a:r>
+              <a:rPr sz="1575" b="1">
+                <a:solidFill>
+                  <a:srgbClr val="6657E8"/>
+                </a:solidFill>
+              </a:rPr>
+              <a:t>오늘 완성할 결과</a:t>
+            </a:r>
+          </a:p>
+        </p:txBody>
+      </p:sp>
+      <p:sp>
+        <p:nvSpPr>
+          <p:cNvPr id="7" name="">
+            <a:extLst xmlns:a="http://schemas.openxmlformats.org/drawingml/2006/main">
+              <a:ext uri="{FF2B5EF4-FFF2-40B4-BE49-F238E27FC236}">
+                <a16:creationId xmlns:a16="http://schemas.microsoft.com/office/drawing/2014/main" id="{03205DD2-2793-478F-82D4-D6590510F45F}"/>
+              </a:ext>
+            </a:extLst>
+          </p:cNvPr>
+          <p:cNvSpPr>
+            <a:spLocks xmlns:a="http://schemas.openxmlformats.org/drawingml/2006/main" noGrp="1"/>
+          </p:cNvSpPr>
+          <p:nvPr/>
+        </p:nvSpPr>
+        <p:spPr>
+          <a:xfrm xmlns:a="http://schemas.openxmlformats.org/drawingml/2006/main">
+            <a:off x="838200" y="4191000"/>
+            <a:ext cx="10096500" cy="857250"/>
+          </a:xfrm>
+          <a:prstGeom xmlns:a="http://schemas.openxmlformats.org/drawingml/2006/main" prst="rect">
+            <a:avLst/>
+          </a:prstGeom>
+          <a:noFill xmlns:a="http://schemas.openxmlformats.org/drawingml/2006/main"/>
+          <a:ln xmlns:a="http://schemas.openxmlformats.org/drawingml/2006/main" w="0">
+            <a:noFill/>
+            <a:prstDash val="solid"/>
+          </a:ln>
+        </p:spPr>
+        <p:txBody>
+          <a:bodyPr xmlns:a="http://schemas.openxmlformats.org/drawingml/2006/main"/>
+          <a:lstStyle xmlns:a="http://schemas.openxmlformats.org/drawingml/2006/main"/>
+          <a:p xmlns:a="http://schemas.openxmlformats.org/drawingml/2006/main">
+            <a:pPr>
+              <a:defRPr sz="2025" b="1">
+                <a:solidFill>
+                  <a:srgbClr val="182235"/>
+                </a:solidFill>
+              </a:defRPr>
+            </a:pPr>
+            <a:r>
+              <a:rPr sz="2025" b="1">
+                <a:solidFill>
+                  <a:srgbClr val="182235"/>
+                </a:solidFill>
+              </a:rPr>
+              <a:t>한 번에 실행할 수 있고 완료 여부를 확인할 수 있는 개발 요청서를 작성합니다.</a:t>
+            </a:r>
+          </a:p>
+        </p:txBody>
+      </p:sp>
+    </p:spTree>
+    <p:extLst>
+      <p:ext uri="{BB962C8B-B14F-4D97-AF65-F5344CB8AC3E}">
+        <p14:creationId xmlns:p14="http://schemas.microsoft.com/office/powerpoint/2010/main" val="568463081"/>
       </p:ext>
     </p:extLst>
   </p:cSld>
